--- a/docs/business/proposals/urdeal-store-owner-deck.pptx
+++ b/docs/business/proposals/urdeal-store-owner-deck.pptx
@@ -13,9 +13,10 @@
     <p:sldId id="261" r:id="rId7"/>
     <p:sldId id="262" r:id="rId8"/>
     <p:sldId id="263" r:id="rId9"/>
+    <p:sldId id="264" r:id="rId10"/>
   </p:sldIdLst>
   <p:notesMasterIdLst>
-    <p:notesMasterId r:id="rId10"/>
+    <p:notesMasterId r:id="rId11"/>
   </p:notesMasterIdLst>
   <p:sldSz cx="12192000" cy="6858000"/>
   <p:notesSz cx="6858000" cy="12192000"/>
@@ -509,7 +510,7 @@
           <a:p>
             <a:r>
               <a:rPr lang="en-US" dirty="0"/>
-              <a:t>표지. 대표 최종 구성안 v2. 대안 헤드라인: "체험단에 지치신 사장님들께." / "공짜 손님, 이제 그만 받으셔도 됩니다." 10%: 직접 등록 기준(fee-resolver.ts). 오른쪽은 urdeal.kr 홈 라이브 캡처.</a:t>
+              <a:t>표지. 대표 최종 구성안(09-14). 10%: 직접 등록 기준(fee-resolver.ts). 오른쪽은 urdeal.kr 홈 라이브 캡처.</a:t>
             </a:r>
             <a:endParaRPr lang="en-US" dirty="0"/>
           </a:p>
@@ -685,7 +686,7 @@
           <a:p>
             <a:r>
               <a:rPr lang="en-US" dirty="0"/>
-              <a:t>상품 2888 실측: 정가 25,000 / 판매가 16,500. 장당 입금 14,850, 재료비 8,750(정가×35% 가정) → 6,100. 월 30/90/150장 순수익 183,000 / 549,000 / 915,000원. 카드 수수료(현재 약 2.75%, 변동 가능)는 유어딜 부담.</a:t>
+              <a:t>상품 2888 실측: 정가 25,000 / 판매가 16,500 → 수수료 1,650 → 입금 14,850. 카드 수수료(현재 약 2.75%, 변동 가능)는 유어딜 부담. 월 판매 시나리오와 업종 평균가 표는 상세판 5장.</a:t>
             </a:r>
             <a:endParaRPr lang="en-US" dirty="0"/>
           </a:p>
@@ -773,7 +774,7 @@
           <a:p>
             <a:r>
               <a:rPr lang="en-US" dirty="0"/>
-              <a:t>노출 4곳: 홈 섹션/지도(/map)/검색·카톡 OG/유어쇼츠(/videos). 소개비: 매장 제안 %, 매장 부담 — %·풀 규모 숫자는 넣지 않는다. 리뷰 보너스 1,000딜 유어딜 부담 — "포인트"로만.</a:t>
+              <a:t>노출 4곳: 홈 섹션/지도(/map)/검색·카톡 OG/유어쇼츠(/videos). 크리에이터 풀: /api/admin/ads/influencer-pool/stats 2026-09-13 실측 youtube 18,170 / naver_blog 172,755 (전체 201,471, 연락 가능 46,220). 소개비: 매장 제안 %·매장 부담·상한 없음.</a:t>
             </a:r>
             <a:endParaRPr lang="en-US" dirty="0"/>
           </a:p>
@@ -861,7 +862,7 @@
           <a:p>
             <a:r>
               <a:rPr lang="en-US" dirty="0"/>
-              <a:t>만료 자동 환불: auto-settlement.ts (100%). QR CAS: group-buy-voucher.routes.ts. 독점·계약기간 없음. 수량 상한은 상품 필드.</a:t>
+              <a:t>사용 조건 프리셋: voucher-usage-conditions.ts (평일만 / 점심시간 11~15시 등). 수량 한정: 상품 필드. 이용권별 링크·카톡 공유: /group-buy/:id OG. 매장 QR: 매장 페이지 주소를 QR 로 만드는 것(전용 포스터 기능은 없음 — 그래서 "주소를 QR 로 만들어"로 적음). 리뷰 보너스 1,000딜 유어딜 부담.</a:t>
             </a:r>
             <a:endParaRPr lang="en-US" dirty="0"/>
           </a:p>
@@ -949,7 +950,7 @@
           <a:p>
             <a:r>
               <a:rPr lang="en-US" dirty="0"/>
-              <a:t>StoreRegisterModal.tsx 마법사. 승인은 사람(seller-stores.routes.ts 자동 승인 없음). "대신 만들어 드립니다"는 대표 운영 약속(코드 아님). 누가 먼저 올려 둔 매장의 사장님 입구는 /store/find (상세판 9장).</a:t>
+              <a:t>만료 자동 환불: auto-settlement.ts (100%). QR CAS: group-buy-voucher.routes.ts. 독점·계약기간 없음. 수량 상한은 상품 필드.</a:t>
             </a:r>
             <a:endParaRPr lang="en-US" dirty="0"/>
           </a:p>
@@ -1037,7 +1038,7 @@
           <a:p>
             <a:r>
               <a:rPr lang="en-US" dirty="0"/>
-              <a:t>사용 처리: group-buy-voucher.routes.ts. payouts-generate.ts: 매주 월요일, 최소 10,000원(이월), 승인·송금은 사람. 계좌 변경 owner 전용.</a:t>
+              <a:t>StoreRegisterModal.tsx 마법사. 승인은 사람(seller-stores.routes.ts 자동 승인 없음). "대신 만들어 드립니다"는 대표 운영 약속(코드 아님).</a:t>
             </a:r>
             <a:endParaRPr lang="en-US" dirty="0"/>
           </a:p>
@@ -1125,7 +1126,7 @@
           <a:p>
             <a:r>
               <a:rPr lang="en-US" dirty="0"/>
-              <a:t>대안 헤드라인: "잘 맞는지 한 달만 해보셔도 됩니다." / "부담 없이 시작하고, 부담 없이 그만두세요." 연락처는 대표 지정값.</a:t>
+              <a:t>사용 처리: group-buy-voucher.routes.ts. payouts-generate.ts: 매주 월요일, 최소 10,000원(이월), 승인·송금은 사람. 계좌 변경 owner 전용. 판매 추이: 셀러 대시보드 daily_revenue + 상품별 판매 수.</a:t>
             </a:r>
             <a:endParaRPr lang="en-US" dirty="0"/>
           </a:p>
@@ -1149,6 +1150,94 @@
             <a:fld id="{F7021451-1387-4CA6-816F-3879F97B5CBC}" type="slidenum">
               <a:rPr lang="en-US"/>
               <a:t>8</a:t>
+            </a:fld>
+            <a:endParaRPr lang="en-US"/>
+          </a:p>
+        </p:txBody>
+      </p:sp>
+    </p:spTree>
+    <p:extLst>
+      <p:ext uri="{BB962C8B-B14F-4D97-AF65-F5344CB8AC3E}">
+        <p14:creationId xmlns:p14="http://schemas.microsoft.com/office/powerpoint/2010/main" val="1024086991"/>
+      </p:ext>
+    </p:extLst>
+  </p:cSld>
+  <p:clrMapOvr>
+    <a:masterClrMapping/>
+  </p:clrMapOvr>
+</p:notes>
+</file>
+
+<file path=ppt/notesSlides/notesSlide9.xml><?xml version="1.0" encoding="utf-8"?>
+<p:notes xmlns:a="http://schemas.openxmlformats.org/drawingml/2006/main" xmlns:r="http://schemas.openxmlformats.org/officeDocument/2006/relationships" xmlns:p="http://schemas.openxmlformats.org/presentationml/2006/main">
+  <p:cSld>
+    <p:spTree>
+      <p:nvGrpSpPr>
+        <p:cNvPr id="1" name=""/>
+        <p:cNvGrpSpPr/>
+        <p:nvPr/>
+      </p:nvGrpSpPr>
+      <p:grpSpPr>
+        <a:xfrm>
+          <a:off x="0" y="0"/>
+          <a:ext cx="0" cy="0"/>
+          <a:chOff x="0" y="0"/>
+          <a:chExt cx="0" cy="0"/>
+        </a:xfrm>
+      </p:grpSpPr>
+      <p:sp>
+        <p:nvSpPr>
+          <p:cNvPr id="2" name="Slide Image Placeholder 1"/>
+          <p:cNvSpPr>
+            <a:spLocks noGrp="1" noRot="1" noChangeAspect="1"/>
+          </p:cNvSpPr>
+          <p:nvPr>
+            <p:ph type="sldImg"/>
+          </p:nvPr>
+        </p:nvSpPr>
+        <p:spPr/>
+      </p:sp>
+      <p:sp>
+        <p:nvSpPr>
+          <p:cNvPr id="3" name="Notes Placeholder 2"/>
+          <p:cNvSpPr>
+            <a:spLocks noGrp="1"/>
+          </p:cNvSpPr>
+          <p:nvPr>
+            <p:ph type="body" idx="1"/>
+          </p:nvPr>
+        </p:nvSpPr>
+        <p:spPr/>
+        <p:txBody>
+          <a:bodyPr/>
+          <a:lstStyle/>
+          <a:p>
+            <a:r>
+              <a:rPr lang="en-US" dirty="0"/>
+              <a:t>연락처는 대표 지정값. "사람이 답합니다"는 운영 약속 — 카카오 채널 응대가 실제로 붙어 있어야 한다.</a:t>
+            </a:r>
+            <a:endParaRPr lang="en-US" dirty="0"/>
+          </a:p>
+        </p:txBody>
+      </p:sp>
+      <p:sp>
+        <p:nvSpPr>
+          <p:cNvPr id="4" name="Slide Number Placeholder 3"/>
+          <p:cNvSpPr>
+            <a:spLocks noGrp="1"/>
+          </p:cNvSpPr>
+          <p:nvPr>
+            <p:ph type="sldNum" sz="quarter" idx="10"/>
+          </p:nvPr>
+        </p:nvSpPr>
+        <p:spPr/>
+        <p:txBody>
+          <a:bodyPr/>
+          <a:lstStyle/>
+          <a:p>
+            <a:fld id="{F7021451-1387-4CA6-816F-3879F97B5CBC}" type="slidenum">
+              <a:rPr lang="en-US"/>
+              <a:t>9</a:t>
             </a:fld>
             <a:endParaRPr lang="en-US"/>
           </a:p>
@@ -2465,7 +2554,7 @@
                 <a:ea typeface="Pretendard" pitchFamily="34" charset="-122"/>
                 <a:cs typeface="Pretendard" pitchFamily="34" charset="-120"/>
               </a:rPr>
-              <a:t>대행비 선지불 + 무료 식사 제공</a:t>
+              <a:t>대행비 선지불 + 무료 식사</a:t>
             </a:r>
             <a:endParaRPr lang="en-US" sz="1100" dirty="0"/>
           </a:p>
@@ -3149,7 +3238,7 @@
                 <a:ea typeface="Pretendard" pitchFamily="34" charset="-122"/>
                 <a:cs typeface="Pretendard" pitchFamily="34" charset="-120"/>
               </a:rPr>
-              <a:t>몇 장 팔리고 몇 명 왔는지 전부 숫자로</a:t>
+              <a:t>몇 장 팔리고 몇 명 왔는지 숫자로</a:t>
             </a:r>
             <a:endParaRPr lang="en-US" sz="1100" dirty="0"/>
           </a:p>
@@ -3426,60 +3515,18 @@
       </p:sp>
       <p:sp>
         <p:nvSpPr>
-          <p:cNvPr id="6" name="Text 3"/>
-          <p:cNvSpPr txBox="1"/>
-          <p:nvPr/>
-        </p:nvSpPr>
-        <p:spPr>
-          <a:xfrm>
-            <a:off x="685800" y="1783080"/>
-            <a:ext cx="10820095" cy="685800"/>
-          </a:xfrm>
-          <a:prstGeom prst="rect">
-            <a:avLst/>
-          </a:prstGeom>
-          <a:noFill/>
-          <a:ln/>
-        </p:spPr>
-        <p:txBody>
-          <a:bodyPr wrap="square" lIns="0" tIns="0" rIns="0" bIns="0" rtlCol="0" anchor="t"/>
-          <a:lstStyle/>
-          <a:p>
-            <a:pPr indent="0" marL="0">
-              <a:lnSpc>
-                <a:spcPct val="150000"/>
-              </a:lnSpc>
-              <a:buNone/>
-            </a:pPr>
-            <a:r>
-              <a:rPr lang="en-US" sz="1250" dirty="0">
-                <a:solidFill>
-                  <a:srgbClr val="6E6B68"/>
-                </a:solidFill>
-                <a:latin typeface="Pretendard" pitchFamily="34" charset="0"/>
-                <a:ea typeface="Pretendard" pitchFamily="34" charset="-122"/>
-                <a:cs typeface="Pretendard" pitchFamily="34" charset="-120"/>
-              </a:rPr>
-              <a:t>체험단 한 팀에 나가는 무료 식사값이면, 유어딜에선 돈 내는 손님이 옵니다. 그 손님이 몇 명인지, 언제 왔는지, 얼마를 썼는지가 매장 관리 화면에 그대로 남습니다. "효과가 있었나?"를 감으로 판단할 필요가 없습니다.</a:t>
-            </a:r>
-            <a:endParaRPr lang="en-US" sz="1250" dirty="0"/>
-          </a:p>
-        </p:txBody>
-      </p:sp>
-      <p:sp>
-        <p:nvSpPr>
-          <p:cNvPr id="7" name="Shape 4"/>
+          <p:cNvPr id="6" name="Shape 3"/>
           <p:cNvSpPr/>
           <p:nvPr/>
         </p:nvSpPr>
         <p:spPr>
           <a:xfrm>
-            <a:off x="685800" y="2606040"/>
-            <a:ext cx="5394960" cy="3611880"/>
+            <a:off x="685800" y="1965960"/>
+            <a:ext cx="5394960" cy="4251960"/>
           </a:xfrm>
           <a:prstGeom prst="roundRect">
             <a:avLst>
-              <a:gd name="adj" fmla="val 3544"/>
+              <a:gd name="adj" fmla="val 3011"/>
             </a:avLst>
           </a:prstGeom>
           <a:solidFill>
@@ -3502,40 +3549,79 @@
       </p:sp>
       <p:sp>
         <p:nvSpPr>
+          <p:cNvPr id="7" name="Text 4"/>
+          <p:cNvSpPr txBox="1"/>
+          <p:nvPr/>
+        </p:nvSpPr>
+        <p:spPr>
+          <a:xfrm>
+            <a:off x="1005840" y="2148840"/>
+            <a:ext cx="4754880" cy="237744"/>
+          </a:xfrm>
+          <a:prstGeom prst="rect">
+            <a:avLst/>
+          </a:prstGeom>
+          <a:noFill/>
+          <a:ln/>
+        </p:spPr>
+        <p:txBody>
+          <a:bodyPr wrap="square" lIns="0" tIns="0" rIns="0" bIns="0" rtlCol="0" anchor="ctr"/>
+          <a:lstStyle/>
+          <a:p>
+            <a:pPr indent="0" marL="0">
+              <a:buNone/>
+            </a:pPr>
+            <a:r>
+              <a:rPr lang="en-US" sz="1000" b="1" spc="120" kern="0" dirty="0">
+                <a:solidFill>
+                  <a:srgbClr val="8A8580"/>
+                </a:solidFill>
+                <a:latin typeface="Pretendard" pitchFamily="34" charset="0"/>
+                <a:ea typeface="Pretendard" pitchFamily="34" charset="-122"/>
+                <a:cs typeface="Pretendard" pitchFamily="34" charset="-120"/>
+              </a:rPr>
+              <a:t>지금 팔리는 실제 상품 (치즈돈가스 2인 세트)</a:t>
+            </a:r>
+            <a:endParaRPr lang="en-US" sz="1000" dirty="0"/>
+          </a:p>
+        </p:txBody>
+      </p:sp>
+      <p:sp>
+        <p:nvSpPr>
           <p:cNvPr id="8" name="Text 5"/>
           <p:cNvSpPr txBox="1"/>
           <p:nvPr/>
         </p:nvSpPr>
         <p:spPr>
           <a:xfrm>
-            <a:off x="1005840" y="2761488"/>
-            <a:ext cx="4754880" cy="237744"/>
-          </a:xfrm>
-          <a:prstGeom prst="rect">
-            <a:avLst/>
-          </a:prstGeom>
-          <a:noFill/>
-          <a:ln/>
-        </p:spPr>
-        <p:txBody>
-          <a:bodyPr wrap="square" lIns="0" tIns="0" rIns="0" bIns="0" rtlCol="0" anchor="ctr"/>
-          <a:lstStyle/>
-          <a:p>
-            <a:pPr indent="0" marL="0">
-              <a:buNone/>
-            </a:pPr>
-            <a:r>
-              <a:rPr lang="en-US" sz="1000" b="1" spc="120" kern="0" dirty="0">
-                <a:solidFill>
-                  <a:srgbClr val="8A8580"/>
-                </a:solidFill>
-                <a:latin typeface="Pretendard" pitchFamily="34" charset="0"/>
-                <a:ea typeface="Pretendard" pitchFamily="34" charset="-122"/>
-                <a:cs typeface="Pretendard" pitchFamily="34" charset="-120"/>
-              </a:rPr>
-              <a:t>지금 유어딜에서 팔리고 있는 실제 상품 (치즈돈가스 2인 세트)</a:t>
-            </a:r>
-            <a:endParaRPr lang="en-US" sz="1000" dirty="0"/>
+            <a:off x="1005840" y="2468880"/>
+            <a:ext cx="3043123" cy="347472"/>
+          </a:xfrm>
+          <a:prstGeom prst="rect">
+            <a:avLst/>
+          </a:prstGeom>
+          <a:noFill/>
+          <a:ln/>
+        </p:spPr>
+        <p:txBody>
+          <a:bodyPr wrap="square" lIns="0" tIns="0" rIns="0" bIns="0" rtlCol="0" anchor="ctr"/>
+          <a:lstStyle/>
+          <a:p>
+            <a:pPr indent="0" marL="0">
+              <a:buNone/>
+            </a:pPr>
+            <a:r>
+              <a:rPr lang="en-US" sz="1150" dirty="0">
+                <a:solidFill>
+                  <a:srgbClr val="6E6B68"/>
+                </a:solidFill>
+                <a:latin typeface="Pretendard" pitchFamily="34" charset="0"/>
+                <a:ea typeface="Pretendard" pitchFamily="34" charset="-122"/>
+                <a:cs typeface="Pretendard" pitchFamily="34" charset="-120"/>
+              </a:rPr>
+              <a:t>정가</a:t>
+            </a:r>
+            <a:endParaRPr lang="en-US" sz="1150" dirty="0"/>
           </a:p>
         </p:txBody>
       </p:sp>
@@ -3547,8 +3633,47 @@
         </p:nvSpPr>
         <p:spPr>
           <a:xfrm>
-            <a:off x="1005840" y="3063240"/>
-            <a:ext cx="3043123" cy="256032"/>
+            <a:off x="3621024" y="2468880"/>
+            <a:ext cx="2139696" cy="347472"/>
+          </a:xfrm>
+          <a:prstGeom prst="rect">
+            <a:avLst/>
+          </a:prstGeom>
+          <a:noFill/>
+          <a:ln/>
+        </p:spPr>
+        <p:txBody>
+          <a:bodyPr wrap="square" lIns="0" tIns="0" rIns="0" bIns="0" rtlCol="0" anchor="ctr"/>
+          <a:lstStyle/>
+          <a:p>
+            <a:pPr algn="r" indent="0" marL="0">
+              <a:buNone/>
+            </a:pPr>
+            <a:r>
+              <a:rPr lang="en-US" sz="1200" b="1" dirty="0">
+                <a:solidFill>
+                  <a:srgbClr val="16181C"/>
+                </a:solidFill>
+                <a:latin typeface="Pretendard" pitchFamily="34" charset="0"/>
+                <a:ea typeface="Pretendard" pitchFamily="34" charset="-122"/>
+                <a:cs typeface="Pretendard" pitchFamily="34" charset="-120"/>
+              </a:rPr>
+              <a:t>25,000원</a:t>
+            </a:r>
+            <a:endParaRPr lang="en-US" sz="1200" dirty="0"/>
+          </a:p>
+        </p:txBody>
+      </p:sp>
+      <p:sp>
+        <p:nvSpPr>
+          <p:cNvPr id="10" name="Text 7"/>
+          <p:cNvSpPr txBox="1"/>
+          <p:nvPr/>
+        </p:nvSpPr>
+        <p:spPr>
+          <a:xfrm>
+            <a:off x="1005840" y="2889504"/>
+            <a:ext cx="3043123" cy="347472"/>
           </a:xfrm>
           <a:prstGeom prst="rect">
             <a:avLst/>
@@ -3572,7 +3697,7 @@
                 <a:ea typeface="Pretendard" pitchFamily="34" charset="-122"/>
                 <a:cs typeface="Pretendard" pitchFamily="34" charset="-120"/>
               </a:rPr>
-              <a:t>정가</a:t>
+              <a:t>이용권 판매가 (할인율은 사장님이 정함)</a:t>
             </a:r>
             <a:endParaRPr lang="en-US" sz="1150" dirty="0"/>
           </a:p>
@@ -3580,14 +3705,14 @@
       </p:sp>
       <p:sp>
         <p:nvSpPr>
-          <p:cNvPr id="10" name="Text 7"/>
-          <p:cNvSpPr txBox="1"/>
-          <p:nvPr/>
-        </p:nvSpPr>
-        <p:spPr>
-          <a:xfrm>
-            <a:off x="3621024" y="3063240"/>
-            <a:ext cx="2139696" cy="256032"/>
+          <p:cNvPr id="11" name="Text 8"/>
+          <p:cNvSpPr txBox="1"/>
+          <p:nvPr/>
+        </p:nvSpPr>
+        <p:spPr>
+          <a:xfrm>
+            <a:off x="3621024" y="2889504"/>
+            <a:ext cx="2139696" cy="347472"/>
           </a:xfrm>
           <a:prstGeom prst="rect">
             <a:avLst/>
@@ -3611,7 +3736,7 @@
                 <a:ea typeface="Pretendard" pitchFamily="34" charset="-122"/>
                 <a:cs typeface="Pretendard" pitchFamily="34" charset="-120"/>
               </a:rPr>
-              <a:t>25,000원</a:t>
+              <a:t>16,500원</a:t>
             </a:r>
             <a:endParaRPr lang="en-US" sz="1200" dirty="0"/>
           </a:p>
@@ -3619,91 +3744,13 @@
       </p:sp>
       <p:sp>
         <p:nvSpPr>
-          <p:cNvPr id="11" name="Text 8"/>
-          <p:cNvSpPr txBox="1"/>
-          <p:nvPr/>
-        </p:nvSpPr>
-        <p:spPr>
-          <a:xfrm>
-            <a:off x="1005840" y="3392424"/>
-            <a:ext cx="3043123" cy="256032"/>
-          </a:xfrm>
-          <a:prstGeom prst="rect">
-            <a:avLst/>
-          </a:prstGeom>
-          <a:noFill/>
-          <a:ln/>
-        </p:spPr>
-        <p:txBody>
-          <a:bodyPr wrap="square" lIns="0" tIns="0" rIns="0" bIns="0" rtlCol="0" anchor="ctr"/>
-          <a:lstStyle/>
-          <a:p>
-            <a:pPr indent="0" marL="0">
-              <a:buNone/>
-            </a:pPr>
-            <a:r>
-              <a:rPr lang="en-US" sz="1150" dirty="0">
-                <a:solidFill>
-                  <a:srgbClr val="6E6B68"/>
-                </a:solidFill>
-                <a:latin typeface="Pretendard" pitchFamily="34" charset="0"/>
-                <a:ea typeface="Pretendard" pitchFamily="34" charset="-122"/>
-                <a:cs typeface="Pretendard" pitchFamily="34" charset="-120"/>
-              </a:rPr>
-              <a:t>이용권 판매가 (할인율은 사장님이 정함)</a:t>
-            </a:r>
-            <a:endParaRPr lang="en-US" sz="1150" dirty="0"/>
-          </a:p>
-        </p:txBody>
-      </p:sp>
-      <p:sp>
-        <p:nvSpPr>
-          <p:cNvPr id="12" name="Text 9"/>
-          <p:cNvSpPr txBox="1"/>
-          <p:nvPr/>
-        </p:nvSpPr>
-        <p:spPr>
-          <a:xfrm>
-            <a:off x="3621024" y="3392424"/>
-            <a:ext cx="2139696" cy="256032"/>
-          </a:xfrm>
-          <a:prstGeom prst="rect">
-            <a:avLst/>
-          </a:prstGeom>
-          <a:noFill/>
-          <a:ln/>
-        </p:spPr>
-        <p:txBody>
-          <a:bodyPr wrap="square" lIns="0" tIns="0" rIns="0" bIns="0" rtlCol="0" anchor="ctr"/>
-          <a:lstStyle/>
-          <a:p>
-            <a:pPr algn="r" indent="0" marL="0">
-              <a:buNone/>
-            </a:pPr>
-            <a:r>
-              <a:rPr lang="en-US" sz="1200" b="1" dirty="0">
-                <a:solidFill>
-                  <a:srgbClr val="16181C"/>
-                </a:solidFill>
-                <a:latin typeface="Pretendard" pitchFamily="34" charset="0"/>
-                <a:ea typeface="Pretendard" pitchFamily="34" charset="-122"/>
-                <a:cs typeface="Pretendard" pitchFamily="34" charset="-120"/>
-              </a:rPr>
-              <a:t>16,500원</a:t>
-            </a:r>
-            <a:endParaRPr lang="en-US" sz="1200" dirty="0"/>
-          </a:p>
-        </p:txBody>
-      </p:sp>
-      <p:sp>
-        <p:nvSpPr>
-          <p:cNvPr id="13" name="Shape 10"/>
+          <p:cNvPr id="12" name="Shape 9"/>
           <p:cNvSpPr/>
           <p:nvPr/>
         </p:nvSpPr>
         <p:spPr>
           <a:xfrm>
-            <a:off x="1005840" y="3694176"/>
+            <a:off x="1005840" y="3282696"/>
             <a:ext cx="4754880" cy="0"/>
           </a:xfrm>
           <a:prstGeom prst="line">
@@ -3720,14 +3767,92 @@
       </p:sp>
       <p:sp>
         <p:nvSpPr>
+          <p:cNvPr id="13" name="Text 10"/>
+          <p:cNvSpPr txBox="1"/>
+          <p:nvPr/>
+        </p:nvSpPr>
+        <p:spPr>
+          <a:xfrm>
+            <a:off x="1005840" y="3310128"/>
+            <a:ext cx="3043123" cy="347472"/>
+          </a:xfrm>
+          <a:prstGeom prst="rect">
+            <a:avLst/>
+          </a:prstGeom>
+          <a:noFill/>
+          <a:ln/>
+        </p:spPr>
+        <p:txBody>
+          <a:bodyPr wrap="square" lIns="0" tIns="0" rIns="0" bIns="0" rtlCol="0" anchor="ctr"/>
+          <a:lstStyle/>
+          <a:p>
+            <a:pPr indent="0" marL="0">
+              <a:buNone/>
+            </a:pPr>
+            <a:r>
+              <a:rPr lang="en-US" sz="1150" dirty="0">
+                <a:solidFill>
+                  <a:srgbClr val="6E6B68"/>
+                </a:solidFill>
+                <a:latin typeface="Pretendard" pitchFamily="34" charset="0"/>
+                <a:ea typeface="Pretendard" pitchFamily="34" charset="-122"/>
+                <a:cs typeface="Pretendard" pitchFamily="34" charset="-120"/>
+              </a:rPr>
+              <a:t>유어딜 10%</a:t>
+            </a:r>
+            <a:endParaRPr lang="en-US" sz="1150" dirty="0"/>
+          </a:p>
+        </p:txBody>
+      </p:sp>
+      <p:sp>
+        <p:nvSpPr>
           <p:cNvPr id="14" name="Text 11"/>
           <p:cNvSpPr txBox="1"/>
           <p:nvPr/>
         </p:nvSpPr>
         <p:spPr>
           <a:xfrm>
-            <a:off x="1005840" y="3721608"/>
-            <a:ext cx="3043123" cy="256032"/>
+            <a:off x="3621024" y="3310128"/>
+            <a:ext cx="2139696" cy="347472"/>
+          </a:xfrm>
+          <a:prstGeom prst="rect">
+            <a:avLst/>
+          </a:prstGeom>
+          <a:noFill/>
+          <a:ln/>
+        </p:spPr>
+        <p:txBody>
+          <a:bodyPr wrap="square" lIns="0" tIns="0" rIns="0" bIns="0" rtlCol="0" anchor="ctr"/>
+          <a:lstStyle/>
+          <a:p>
+            <a:pPr algn="r" indent="0" marL="0">
+              <a:buNone/>
+            </a:pPr>
+            <a:r>
+              <a:rPr lang="en-US" sz="1200" b="1" dirty="0">
+                <a:solidFill>
+                  <a:srgbClr val="16181C"/>
+                </a:solidFill>
+                <a:latin typeface="Pretendard" pitchFamily="34" charset="0"/>
+                <a:ea typeface="Pretendard" pitchFamily="34" charset="-122"/>
+                <a:cs typeface="Pretendard" pitchFamily="34" charset="-120"/>
+              </a:rPr>
+              <a:t>−1,650원</a:t>
+            </a:r>
+            <a:endParaRPr lang="en-US" sz="1200" dirty="0"/>
+          </a:p>
+        </p:txBody>
+      </p:sp>
+      <p:sp>
+        <p:nvSpPr>
+          <p:cNvPr id="15" name="Text 12"/>
+          <p:cNvSpPr txBox="1"/>
+          <p:nvPr/>
+        </p:nvSpPr>
+        <p:spPr>
+          <a:xfrm>
+            <a:off x="1005840" y="3730752"/>
+            <a:ext cx="3043123" cy="347472"/>
           </a:xfrm>
           <a:prstGeom prst="rect">
             <a:avLst/>
@@ -3751,7 +3876,7 @@
                 <a:ea typeface="Pretendard" pitchFamily="34" charset="-122"/>
                 <a:cs typeface="Pretendard" pitchFamily="34" charset="-120"/>
               </a:rPr>
-              <a:t>유어딜 수수료 10%</a:t>
+              <a:t>카드 수수료</a:t>
             </a:r>
             <a:endParaRPr lang="en-US" sz="1150" dirty="0"/>
           </a:p>
@@ -3759,14 +3884,14 @@
       </p:sp>
       <p:sp>
         <p:nvSpPr>
-          <p:cNvPr id="15" name="Text 12"/>
-          <p:cNvSpPr txBox="1"/>
-          <p:nvPr/>
-        </p:nvSpPr>
-        <p:spPr>
-          <a:xfrm>
-            <a:off x="3621024" y="3721608"/>
-            <a:ext cx="2139696" cy="256032"/>
+          <p:cNvPr id="16" name="Text 13"/>
+          <p:cNvSpPr txBox="1"/>
+          <p:nvPr/>
+        </p:nvSpPr>
+        <p:spPr>
+          <a:xfrm>
+            <a:off x="3621024" y="3730752"/>
+            <a:ext cx="2139696" cy="347472"/>
           </a:xfrm>
           <a:prstGeom prst="rect">
             <a:avLst/>
@@ -3790,7 +3915,7 @@
                 <a:ea typeface="Pretendard" pitchFamily="34" charset="-122"/>
                 <a:cs typeface="Pretendard" pitchFamily="34" charset="-120"/>
               </a:rPr>
-              <a:t>−1,650원</a:t>
+              <a:t>0원 (유어딜 부담)</a:t>
             </a:r>
             <a:endParaRPr lang="en-US" sz="1200" dirty="0"/>
           </a:p>
@@ -3798,91 +3923,13 @@
       </p:sp>
       <p:sp>
         <p:nvSpPr>
-          <p:cNvPr id="16" name="Text 13"/>
-          <p:cNvSpPr txBox="1"/>
-          <p:nvPr/>
-        </p:nvSpPr>
-        <p:spPr>
-          <a:xfrm>
-            <a:off x="1005840" y="4050792"/>
-            <a:ext cx="3043123" cy="256032"/>
-          </a:xfrm>
-          <a:prstGeom prst="rect">
-            <a:avLst/>
-          </a:prstGeom>
-          <a:noFill/>
-          <a:ln/>
-        </p:spPr>
-        <p:txBody>
-          <a:bodyPr wrap="square" lIns="0" tIns="0" rIns="0" bIns="0" rtlCol="0" anchor="ctr"/>
-          <a:lstStyle/>
-          <a:p>
-            <a:pPr indent="0" marL="0">
-              <a:buNone/>
-            </a:pPr>
-            <a:r>
-              <a:rPr lang="en-US" sz="1150" dirty="0">
-                <a:solidFill>
-                  <a:srgbClr val="6E6B68"/>
-                </a:solidFill>
-                <a:latin typeface="Pretendard" pitchFamily="34" charset="0"/>
-                <a:ea typeface="Pretendard" pitchFamily="34" charset="-122"/>
-                <a:cs typeface="Pretendard" pitchFamily="34" charset="-120"/>
-              </a:rPr>
-              <a:t>카드 수수료</a:t>
-            </a:r>
-            <a:endParaRPr lang="en-US" sz="1150" dirty="0"/>
-          </a:p>
-        </p:txBody>
-      </p:sp>
-      <p:sp>
-        <p:nvSpPr>
-          <p:cNvPr id="17" name="Text 14"/>
-          <p:cNvSpPr txBox="1"/>
-          <p:nvPr/>
-        </p:nvSpPr>
-        <p:spPr>
-          <a:xfrm>
-            <a:off x="3621024" y="4050792"/>
-            <a:ext cx="2139696" cy="256032"/>
-          </a:xfrm>
-          <a:prstGeom prst="rect">
-            <a:avLst/>
-          </a:prstGeom>
-          <a:noFill/>
-          <a:ln/>
-        </p:spPr>
-        <p:txBody>
-          <a:bodyPr wrap="square" lIns="0" tIns="0" rIns="0" bIns="0" rtlCol="0" anchor="ctr"/>
-          <a:lstStyle/>
-          <a:p>
-            <a:pPr algn="r" indent="0" marL="0">
-              <a:buNone/>
-            </a:pPr>
-            <a:r>
-              <a:rPr lang="en-US" sz="1200" b="1" dirty="0">
-                <a:solidFill>
-                  <a:srgbClr val="16181C"/>
-                </a:solidFill>
-                <a:latin typeface="Pretendard" pitchFamily="34" charset="0"/>
-                <a:ea typeface="Pretendard" pitchFamily="34" charset="-122"/>
-                <a:cs typeface="Pretendard" pitchFamily="34" charset="-120"/>
-              </a:rPr>
-              <a:t>0원 (유어딜 부담)</a:t>
-            </a:r>
-            <a:endParaRPr lang="en-US" sz="1200" dirty="0"/>
-          </a:p>
-        </p:txBody>
-      </p:sp>
-      <p:sp>
-        <p:nvSpPr>
-          <p:cNvPr id="18" name="Shape 15"/>
+          <p:cNvPr id="17" name="Shape 14"/>
           <p:cNvSpPr/>
           <p:nvPr/>
         </p:nvSpPr>
         <p:spPr>
           <a:xfrm>
-            <a:off x="1005840" y="4352544"/>
+            <a:off x="1005840" y="4123944"/>
             <a:ext cx="4754880" cy="0"/>
           </a:xfrm>
           <a:prstGeom prst="line">
@@ -3899,30 +3946,111 @@
       </p:sp>
       <p:sp>
         <p:nvSpPr>
+          <p:cNvPr id="18" name="Text 15"/>
+          <p:cNvSpPr txBox="1"/>
+          <p:nvPr/>
+        </p:nvSpPr>
+        <p:spPr>
+          <a:xfrm>
+            <a:off x="1005840" y="4151376"/>
+            <a:ext cx="3043123" cy="347472"/>
+          </a:xfrm>
+          <a:prstGeom prst="rect">
+            <a:avLst/>
+          </a:prstGeom>
+          <a:noFill/>
+          <a:ln/>
+        </p:spPr>
+        <p:txBody>
+          <a:bodyPr wrap="square" lIns="0" tIns="0" rIns="0" bIns="0" rtlCol="0" anchor="ctr"/>
+          <a:lstStyle/>
+          <a:p>
+            <a:pPr indent="0" marL="0">
+              <a:buNone/>
+            </a:pPr>
+            <a:r>
+              <a:rPr lang="en-US" sz="1150" b="1" dirty="0">
+                <a:solidFill>
+                  <a:srgbClr val="16181C"/>
+                </a:solidFill>
+                <a:latin typeface="Pretendard" pitchFamily="34" charset="0"/>
+                <a:ea typeface="Pretendard" pitchFamily="34" charset="-122"/>
+                <a:cs typeface="Pretendard" pitchFamily="34" charset="-120"/>
+              </a:rPr>
+              <a:t>사장님 계좌에</a:t>
+            </a:r>
+            <a:endParaRPr lang="en-US" sz="1150" dirty="0"/>
+          </a:p>
+        </p:txBody>
+      </p:sp>
+      <p:sp>
+        <p:nvSpPr>
           <p:cNvPr id="19" name="Text 16"/>
           <p:cNvSpPr txBox="1"/>
           <p:nvPr/>
         </p:nvSpPr>
         <p:spPr>
           <a:xfrm>
-            <a:off x="1005840" y="4379976"/>
-            <a:ext cx="3043123" cy="256032"/>
-          </a:xfrm>
-          <a:prstGeom prst="rect">
-            <a:avLst/>
-          </a:prstGeom>
-          <a:noFill/>
-          <a:ln/>
-        </p:spPr>
-        <p:txBody>
-          <a:bodyPr wrap="square" lIns="0" tIns="0" rIns="0" bIns="0" rtlCol="0" anchor="ctr"/>
-          <a:lstStyle/>
-          <a:p>
-            <a:pPr indent="0" marL="0">
-              <a:buNone/>
-            </a:pPr>
-            <a:r>
-              <a:rPr lang="en-US" sz="1150" b="1" dirty="0">
+            <a:off x="3621024" y="4151376"/>
+            <a:ext cx="2139696" cy="347472"/>
+          </a:xfrm>
+          <a:prstGeom prst="rect">
+            <a:avLst/>
+          </a:prstGeom>
+          <a:noFill/>
+          <a:ln/>
+        </p:spPr>
+        <p:txBody>
+          <a:bodyPr wrap="square" lIns="0" tIns="0" rIns="0" bIns="0" rtlCol="0" anchor="ctr"/>
+          <a:lstStyle/>
+          <a:p>
+            <a:pPr algn="r" indent="0" marL="0">
+              <a:buNone/>
+            </a:pPr>
+            <a:r>
+              <a:rPr lang="en-US" sz="1200" b="1" dirty="0">
+                <a:solidFill>
+                  <a:srgbClr val="1C69EF"/>
+                </a:solidFill>
+                <a:latin typeface="Pretendard" pitchFamily="34" charset="0"/>
+                <a:ea typeface="Pretendard" pitchFamily="34" charset="-122"/>
+                <a:cs typeface="Pretendard" pitchFamily="34" charset="-120"/>
+              </a:rPr>
+              <a:t>14,850원</a:t>
+            </a:r>
+            <a:endParaRPr lang="en-US" sz="1200" dirty="0"/>
+          </a:p>
+        </p:txBody>
+      </p:sp>
+      <p:sp>
+        <p:nvSpPr>
+          <p:cNvPr id="20" name="Text 17"/>
+          <p:cNvSpPr txBox="1"/>
+          <p:nvPr/>
+        </p:nvSpPr>
+        <p:spPr>
+          <a:xfrm>
+            <a:off x="1005840" y="4754880"/>
+            <a:ext cx="4754880" cy="1280160"/>
+          </a:xfrm>
+          <a:prstGeom prst="rect">
+            <a:avLst/>
+          </a:prstGeom>
+          <a:noFill/>
+          <a:ln/>
+        </p:spPr>
+        <p:txBody>
+          <a:bodyPr wrap="square" lIns="0" tIns="0" rIns="0" bIns="0" rtlCol="0" anchor="t"/>
+          <a:lstStyle/>
+          <a:p>
+            <a:pPr indent="0" marL="0">
+              <a:lnSpc>
+                <a:spcPct val="145000"/>
+              </a:lnSpc>
+              <a:buNone/>
+            </a:pPr>
+            <a:r>
+              <a:rPr lang="en-US" sz="1100" dirty="0">
                 <a:solidFill>
                   <a:srgbClr val="16181C"/>
                 </a:solidFill>
@@ -3930,620 +4058,21 @@
                 <a:ea typeface="Pretendard" pitchFamily="34" charset="-122"/>
                 <a:cs typeface="Pretendard" pitchFamily="34" charset="-120"/>
               </a:rPr>
-              <a:t>사장님 계좌에 들어오는 돈</a:t>
-            </a:r>
-            <a:endParaRPr lang="en-US" sz="1150" dirty="0"/>
-          </a:p>
-        </p:txBody>
-      </p:sp>
-      <p:sp>
-        <p:nvSpPr>
-          <p:cNvPr id="20" name="Text 17"/>
-          <p:cNvSpPr txBox="1"/>
-          <p:nvPr/>
-        </p:nvSpPr>
-        <p:spPr>
-          <a:xfrm>
-            <a:off x="3621024" y="4379976"/>
-            <a:ext cx="2139696" cy="256032"/>
-          </a:xfrm>
-          <a:prstGeom prst="rect">
-            <a:avLst/>
-          </a:prstGeom>
-          <a:noFill/>
-          <a:ln/>
-        </p:spPr>
-        <p:txBody>
-          <a:bodyPr wrap="square" lIns="0" tIns="0" rIns="0" bIns="0" rtlCol="0" anchor="ctr"/>
-          <a:lstStyle/>
-          <a:p>
-            <a:pPr algn="r" indent="0" marL="0">
-              <a:buNone/>
-            </a:pPr>
-            <a:r>
-              <a:rPr lang="en-US" sz="1200" b="1" dirty="0">
-                <a:solidFill>
-                  <a:srgbClr val="1C69EF"/>
-                </a:solidFill>
-                <a:latin typeface="Pretendard" pitchFamily="34" charset="0"/>
-                <a:ea typeface="Pretendard" pitchFamily="34" charset="-122"/>
-                <a:cs typeface="Pretendard" pitchFamily="34" charset="-120"/>
-              </a:rPr>
-              <a:t>14,850원</a:t>
-            </a:r>
-            <a:endParaRPr lang="en-US" sz="1200" dirty="0"/>
-          </a:p>
-        </p:txBody>
-      </p:sp>
-      <p:sp>
-        <p:nvSpPr>
-          <p:cNvPr id="21" name="Text 18"/>
-          <p:cNvSpPr txBox="1"/>
-          <p:nvPr/>
-        </p:nvSpPr>
-        <p:spPr>
-          <a:xfrm>
-            <a:off x="1005840" y="4800600"/>
-            <a:ext cx="1554480" cy="237744"/>
-          </a:xfrm>
-          <a:prstGeom prst="rect">
-            <a:avLst/>
-          </a:prstGeom>
-          <a:noFill/>
-          <a:ln/>
-        </p:spPr>
-        <p:txBody>
-          <a:bodyPr wrap="square" lIns="0" tIns="0" rIns="0" bIns="0" rtlCol="0" anchor="ctr"/>
-          <a:lstStyle/>
-          <a:p>
-            <a:pPr algn="l" indent="0" marL="0">
-              <a:buNone/>
-            </a:pPr>
-            <a:r>
-              <a:rPr lang="en-US" sz="950" b="1" dirty="0">
-                <a:solidFill>
-                  <a:srgbClr val="8A8580"/>
-                </a:solidFill>
-                <a:latin typeface="Pretendard" pitchFamily="34" charset="0"/>
-                <a:ea typeface="Pretendard" pitchFamily="34" charset="-122"/>
-                <a:cs typeface="Pretendard" pitchFamily="34" charset="-120"/>
-              </a:rPr>
-              <a:t>하루 판매 (월 장수)</a:t>
-            </a:r>
-            <a:endParaRPr lang="en-US" sz="950" dirty="0"/>
-          </a:p>
-        </p:txBody>
-      </p:sp>
-      <p:sp>
-        <p:nvSpPr>
-          <p:cNvPr id="22" name="Text 19"/>
-          <p:cNvSpPr txBox="1"/>
-          <p:nvPr/>
-        </p:nvSpPr>
-        <p:spPr>
-          <a:xfrm>
-            <a:off x="2560320" y="4800600"/>
-            <a:ext cx="1600200" cy="237744"/>
-          </a:xfrm>
-          <a:prstGeom prst="rect">
-            <a:avLst/>
-          </a:prstGeom>
-          <a:noFill/>
-          <a:ln/>
-        </p:spPr>
-        <p:txBody>
-          <a:bodyPr wrap="square" lIns="0" tIns="0" rIns="0" bIns="0" rtlCol="0" anchor="ctr"/>
-          <a:lstStyle/>
-          <a:p>
-            <a:pPr algn="r" indent="0" marL="0">
-              <a:buNone/>
-            </a:pPr>
-            <a:r>
-              <a:rPr lang="en-US" sz="950" b="1" dirty="0">
-                <a:solidFill>
-                  <a:srgbClr val="8A8580"/>
-                </a:solidFill>
-                <a:latin typeface="Pretendard" pitchFamily="34" charset="0"/>
-                <a:ea typeface="Pretendard" pitchFamily="34" charset="-122"/>
-                <a:cs typeface="Pretendard" pitchFamily="34" charset="-120"/>
-              </a:rPr>
-              <a:t>계좌 입금</a:t>
-            </a:r>
-            <a:endParaRPr lang="en-US" sz="950" dirty="0"/>
-          </a:p>
-        </p:txBody>
-      </p:sp>
-      <p:sp>
-        <p:nvSpPr>
-          <p:cNvPr id="23" name="Text 20"/>
-          <p:cNvSpPr txBox="1"/>
-          <p:nvPr/>
-        </p:nvSpPr>
-        <p:spPr>
-          <a:xfrm>
-            <a:off x="4160520" y="4800600"/>
-            <a:ext cx="1600200" cy="237744"/>
-          </a:xfrm>
-          <a:prstGeom prst="rect">
-            <a:avLst/>
-          </a:prstGeom>
-          <a:noFill/>
-          <a:ln/>
-        </p:spPr>
-        <p:txBody>
-          <a:bodyPr wrap="square" lIns="0" tIns="0" rIns="0" bIns="0" rtlCol="0" anchor="ctr"/>
-          <a:lstStyle/>
-          <a:p>
-            <a:pPr algn="r" indent="0" marL="0">
-              <a:buNone/>
-            </a:pPr>
-            <a:r>
-              <a:rPr lang="en-US" sz="950" b="1" dirty="0">
-                <a:solidFill>
-                  <a:srgbClr val="8A8580"/>
-                </a:solidFill>
-                <a:latin typeface="Pretendard" pitchFamily="34" charset="0"/>
-                <a:ea typeface="Pretendard" pitchFamily="34" charset="-122"/>
-                <a:cs typeface="Pretendard" pitchFamily="34" charset="-120"/>
-              </a:rPr>
-              <a:t>순수익 (재료비 35% 가정)</a:t>
-            </a:r>
-            <a:endParaRPr lang="en-US" sz="950" dirty="0"/>
-          </a:p>
-        </p:txBody>
-      </p:sp>
-      <p:sp>
-        <p:nvSpPr>
-          <p:cNvPr id="24" name="Shape 21"/>
+              <a:t>체험단 한 팀에 나가는 무료 식사값이면, 유어딜에선 돈 내는 손님이 옵니다. 그 손님이 몇 명인지, 언제 왔는지, 얼마를 썼는지가 매장 화면에 그대로 남습니다. "효과가 있었나?"를 감으로 판단할 필요가 없습니다.</a:t>
+            </a:r>
+            <a:endParaRPr lang="en-US" sz="1100" dirty="0"/>
+          </a:p>
+        </p:txBody>
+      </p:sp>
+      <p:sp>
+        <p:nvSpPr>
+          <p:cNvPr id="21" name="Shape 18"/>
           <p:cNvSpPr/>
           <p:nvPr/>
         </p:nvSpPr>
         <p:spPr>
           <a:xfrm>
-            <a:off x="1005840" y="5074920"/>
-            <a:ext cx="4754880" cy="0"/>
-          </a:xfrm>
-          <a:prstGeom prst="line">
-            <a:avLst/>
-          </a:prstGeom>
-          <a:noFill/>
-          <a:ln w="9525">
-            <a:solidFill>
-              <a:srgbClr val="E6E2DE"/>
-            </a:solidFill>
-            <a:prstDash val="solid"/>
-          </a:ln>
-        </p:spPr>
-      </p:sp>
-      <p:sp>
-        <p:nvSpPr>
-          <p:cNvPr id="25" name="Text 22"/>
-          <p:cNvSpPr txBox="1"/>
-          <p:nvPr/>
-        </p:nvSpPr>
-        <p:spPr>
-          <a:xfrm>
-            <a:off x="1005840" y="5129784"/>
-            <a:ext cx="1554480" cy="219456"/>
-          </a:xfrm>
-          <a:prstGeom prst="rect">
-            <a:avLst/>
-          </a:prstGeom>
-          <a:noFill/>
-          <a:ln/>
-        </p:spPr>
-        <p:txBody>
-          <a:bodyPr wrap="square" lIns="0" tIns="0" rIns="0" bIns="0" rtlCol="0" anchor="ctr"/>
-          <a:lstStyle/>
-          <a:p>
-            <a:pPr algn="l" indent="0" marL="0">
-              <a:buNone/>
-            </a:pPr>
-            <a:r>
-              <a:rPr lang="en-US" sz="1000" dirty="0">
-                <a:solidFill>
-                  <a:srgbClr val="16181C"/>
-                </a:solidFill>
-                <a:latin typeface="Pretendard" pitchFamily="34" charset="0"/>
-                <a:ea typeface="Pretendard" pitchFamily="34" charset="-122"/>
-                <a:cs typeface="Pretendard" pitchFamily="34" charset="-120"/>
-              </a:rPr>
-              <a:t>1장 (월 30장)</a:t>
-            </a:r>
-            <a:endParaRPr lang="en-US" sz="1000" dirty="0"/>
-          </a:p>
-        </p:txBody>
-      </p:sp>
-      <p:sp>
-        <p:nvSpPr>
-          <p:cNvPr id="26" name="Text 23"/>
-          <p:cNvSpPr txBox="1"/>
-          <p:nvPr/>
-        </p:nvSpPr>
-        <p:spPr>
-          <a:xfrm>
-            <a:off x="2560320" y="5129784"/>
-            <a:ext cx="1600200" cy="219456"/>
-          </a:xfrm>
-          <a:prstGeom prst="rect">
-            <a:avLst/>
-          </a:prstGeom>
-          <a:noFill/>
-          <a:ln/>
-        </p:spPr>
-        <p:txBody>
-          <a:bodyPr wrap="square" lIns="0" tIns="0" rIns="0" bIns="0" rtlCol="0" anchor="ctr"/>
-          <a:lstStyle/>
-          <a:p>
-            <a:pPr algn="r" indent="0" marL="0">
-              <a:buNone/>
-            </a:pPr>
-            <a:r>
-              <a:rPr lang="en-US" sz="1000" dirty="0">
-                <a:solidFill>
-                  <a:srgbClr val="16181C"/>
-                </a:solidFill>
-                <a:latin typeface="Pretendard" pitchFamily="34" charset="0"/>
-                <a:ea typeface="Pretendard" pitchFamily="34" charset="-122"/>
-                <a:cs typeface="Pretendard" pitchFamily="34" charset="-120"/>
-              </a:rPr>
-              <a:t>445,500원</a:t>
-            </a:r>
-            <a:endParaRPr lang="en-US" sz="1000" dirty="0"/>
-          </a:p>
-        </p:txBody>
-      </p:sp>
-      <p:sp>
-        <p:nvSpPr>
-          <p:cNvPr id="27" name="Text 24"/>
-          <p:cNvSpPr txBox="1"/>
-          <p:nvPr/>
-        </p:nvSpPr>
-        <p:spPr>
-          <a:xfrm>
-            <a:off x="4160520" y="5129784"/>
-            <a:ext cx="1600200" cy="219456"/>
-          </a:xfrm>
-          <a:prstGeom prst="rect">
-            <a:avLst/>
-          </a:prstGeom>
-          <a:noFill/>
-          <a:ln/>
-        </p:spPr>
-        <p:txBody>
-          <a:bodyPr wrap="square" lIns="0" tIns="0" rIns="0" bIns="0" rtlCol="0" anchor="ctr"/>
-          <a:lstStyle/>
-          <a:p>
-            <a:pPr algn="r" indent="0" marL="0">
-              <a:buNone/>
-            </a:pPr>
-            <a:r>
-              <a:rPr lang="en-US" sz="1000" b="1" dirty="0">
-                <a:solidFill>
-                  <a:srgbClr val="1C69EF"/>
-                </a:solidFill>
-                <a:latin typeface="Pretendard" pitchFamily="34" charset="0"/>
-                <a:ea typeface="Pretendard" pitchFamily="34" charset="-122"/>
-                <a:cs typeface="Pretendard" pitchFamily="34" charset="-120"/>
-              </a:rPr>
-              <a:t>183,000원</a:t>
-            </a:r>
-            <a:endParaRPr lang="en-US" sz="1000" dirty="0"/>
-          </a:p>
-        </p:txBody>
-      </p:sp>
-      <p:sp>
-        <p:nvSpPr>
-          <p:cNvPr id="28" name="Shape 25"/>
-          <p:cNvSpPr/>
-          <p:nvPr/>
-        </p:nvSpPr>
-        <p:spPr>
-          <a:xfrm>
-            <a:off x="1005840" y="5385816"/>
-            <a:ext cx="4754880" cy="0"/>
-          </a:xfrm>
-          <a:prstGeom prst="line">
-            <a:avLst/>
-          </a:prstGeom>
-          <a:noFill/>
-          <a:ln w="9525">
-            <a:solidFill>
-              <a:srgbClr val="E6E2DE"/>
-            </a:solidFill>
-            <a:prstDash val="solid"/>
-          </a:ln>
-        </p:spPr>
-      </p:sp>
-      <p:sp>
-        <p:nvSpPr>
-          <p:cNvPr id="29" name="Text 26"/>
-          <p:cNvSpPr txBox="1"/>
-          <p:nvPr/>
-        </p:nvSpPr>
-        <p:spPr>
-          <a:xfrm>
-            <a:off x="1005840" y="5422392"/>
-            <a:ext cx="1554480" cy="219456"/>
-          </a:xfrm>
-          <a:prstGeom prst="rect">
-            <a:avLst/>
-          </a:prstGeom>
-          <a:noFill/>
-          <a:ln/>
-        </p:spPr>
-        <p:txBody>
-          <a:bodyPr wrap="square" lIns="0" tIns="0" rIns="0" bIns="0" rtlCol="0" anchor="ctr"/>
-          <a:lstStyle/>
-          <a:p>
-            <a:pPr algn="l" indent="0" marL="0">
-              <a:buNone/>
-            </a:pPr>
-            <a:r>
-              <a:rPr lang="en-US" sz="1000" dirty="0">
-                <a:solidFill>
-                  <a:srgbClr val="16181C"/>
-                </a:solidFill>
-                <a:latin typeface="Pretendard" pitchFamily="34" charset="0"/>
-                <a:ea typeface="Pretendard" pitchFamily="34" charset="-122"/>
-                <a:cs typeface="Pretendard" pitchFamily="34" charset="-120"/>
-              </a:rPr>
-              <a:t>3장 (월 90장)</a:t>
-            </a:r>
-            <a:endParaRPr lang="en-US" sz="1000" dirty="0"/>
-          </a:p>
-        </p:txBody>
-      </p:sp>
-      <p:sp>
-        <p:nvSpPr>
-          <p:cNvPr id="30" name="Text 27"/>
-          <p:cNvSpPr txBox="1"/>
-          <p:nvPr/>
-        </p:nvSpPr>
-        <p:spPr>
-          <a:xfrm>
-            <a:off x="2560320" y="5422392"/>
-            <a:ext cx="1600200" cy="219456"/>
-          </a:xfrm>
-          <a:prstGeom prst="rect">
-            <a:avLst/>
-          </a:prstGeom>
-          <a:noFill/>
-          <a:ln/>
-        </p:spPr>
-        <p:txBody>
-          <a:bodyPr wrap="square" lIns="0" tIns="0" rIns="0" bIns="0" rtlCol="0" anchor="ctr"/>
-          <a:lstStyle/>
-          <a:p>
-            <a:pPr algn="r" indent="0" marL="0">
-              <a:buNone/>
-            </a:pPr>
-            <a:r>
-              <a:rPr lang="en-US" sz="1000" dirty="0">
-                <a:solidFill>
-                  <a:srgbClr val="16181C"/>
-                </a:solidFill>
-                <a:latin typeface="Pretendard" pitchFamily="34" charset="0"/>
-                <a:ea typeface="Pretendard" pitchFamily="34" charset="-122"/>
-                <a:cs typeface="Pretendard" pitchFamily="34" charset="-120"/>
-              </a:rPr>
-              <a:t>1,336,500원</a:t>
-            </a:r>
-            <a:endParaRPr lang="en-US" sz="1000" dirty="0"/>
-          </a:p>
-        </p:txBody>
-      </p:sp>
-      <p:sp>
-        <p:nvSpPr>
-          <p:cNvPr id="31" name="Text 28"/>
-          <p:cNvSpPr txBox="1"/>
-          <p:nvPr/>
-        </p:nvSpPr>
-        <p:spPr>
-          <a:xfrm>
-            <a:off x="4160520" y="5422392"/>
-            <a:ext cx="1600200" cy="219456"/>
-          </a:xfrm>
-          <a:prstGeom prst="rect">
-            <a:avLst/>
-          </a:prstGeom>
-          <a:noFill/>
-          <a:ln/>
-        </p:spPr>
-        <p:txBody>
-          <a:bodyPr wrap="square" lIns="0" tIns="0" rIns="0" bIns="0" rtlCol="0" anchor="ctr"/>
-          <a:lstStyle/>
-          <a:p>
-            <a:pPr algn="r" indent="0" marL="0">
-              <a:buNone/>
-            </a:pPr>
-            <a:r>
-              <a:rPr lang="en-US" sz="1000" b="1" dirty="0">
-                <a:solidFill>
-                  <a:srgbClr val="1C69EF"/>
-                </a:solidFill>
-                <a:latin typeface="Pretendard" pitchFamily="34" charset="0"/>
-                <a:ea typeface="Pretendard" pitchFamily="34" charset="-122"/>
-                <a:cs typeface="Pretendard" pitchFamily="34" charset="-120"/>
-              </a:rPr>
-              <a:t>549,000원</a:t>
-            </a:r>
-            <a:endParaRPr lang="en-US" sz="1000" dirty="0"/>
-          </a:p>
-        </p:txBody>
-      </p:sp>
-      <p:sp>
-        <p:nvSpPr>
-          <p:cNvPr id="32" name="Shape 29"/>
-          <p:cNvSpPr/>
-          <p:nvPr/>
-        </p:nvSpPr>
-        <p:spPr>
-          <a:xfrm>
-            <a:off x="1005840" y="5678424"/>
-            <a:ext cx="4754880" cy="0"/>
-          </a:xfrm>
-          <a:prstGeom prst="line">
-            <a:avLst/>
-          </a:prstGeom>
-          <a:noFill/>
-          <a:ln w="9525">
-            <a:solidFill>
-              <a:srgbClr val="E6E2DE"/>
-            </a:solidFill>
-            <a:prstDash val="solid"/>
-          </a:ln>
-        </p:spPr>
-      </p:sp>
-      <p:sp>
-        <p:nvSpPr>
-          <p:cNvPr id="33" name="Text 30"/>
-          <p:cNvSpPr txBox="1"/>
-          <p:nvPr/>
-        </p:nvSpPr>
-        <p:spPr>
-          <a:xfrm>
-            <a:off x="1005840" y="5715000"/>
-            <a:ext cx="1554480" cy="219456"/>
-          </a:xfrm>
-          <a:prstGeom prst="rect">
-            <a:avLst/>
-          </a:prstGeom>
-          <a:noFill/>
-          <a:ln/>
-        </p:spPr>
-        <p:txBody>
-          <a:bodyPr wrap="square" lIns="0" tIns="0" rIns="0" bIns="0" rtlCol="0" anchor="ctr"/>
-          <a:lstStyle/>
-          <a:p>
-            <a:pPr algn="l" indent="0" marL="0">
-              <a:buNone/>
-            </a:pPr>
-            <a:r>
-              <a:rPr lang="en-US" sz="1000" dirty="0">
-                <a:solidFill>
-                  <a:srgbClr val="16181C"/>
-                </a:solidFill>
-                <a:latin typeface="Pretendard" pitchFamily="34" charset="0"/>
-                <a:ea typeface="Pretendard" pitchFamily="34" charset="-122"/>
-                <a:cs typeface="Pretendard" pitchFamily="34" charset="-120"/>
-              </a:rPr>
-              <a:t>5장 (월 150장)</a:t>
-            </a:r>
-            <a:endParaRPr lang="en-US" sz="1000" dirty="0"/>
-          </a:p>
-        </p:txBody>
-      </p:sp>
-      <p:sp>
-        <p:nvSpPr>
-          <p:cNvPr id="34" name="Text 31"/>
-          <p:cNvSpPr txBox="1"/>
-          <p:nvPr/>
-        </p:nvSpPr>
-        <p:spPr>
-          <a:xfrm>
-            <a:off x="2560320" y="5715000"/>
-            <a:ext cx="1600200" cy="219456"/>
-          </a:xfrm>
-          <a:prstGeom prst="rect">
-            <a:avLst/>
-          </a:prstGeom>
-          <a:noFill/>
-          <a:ln/>
-        </p:spPr>
-        <p:txBody>
-          <a:bodyPr wrap="square" lIns="0" tIns="0" rIns="0" bIns="0" rtlCol="0" anchor="ctr"/>
-          <a:lstStyle/>
-          <a:p>
-            <a:pPr algn="r" indent="0" marL="0">
-              <a:buNone/>
-            </a:pPr>
-            <a:r>
-              <a:rPr lang="en-US" sz="1000" dirty="0">
-                <a:solidFill>
-                  <a:srgbClr val="16181C"/>
-                </a:solidFill>
-                <a:latin typeface="Pretendard" pitchFamily="34" charset="0"/>
-                <a:ea typeface="Pretendard" pitchFamily="34" charset="-122"/>
-                <a:cs typeface="Pretendard" pitchFamily="34" charset="-120"/>
-              </a:rPr>
-              <a:t>2,227,500원</a:t>
-            </a:r>
-            <a:endParaRPr lang="en-US" sz="1000" dirty="0"/>
-          </a:p>
-        </p:txBody>
-      </p:sp>
-      <p:sp>
-        <p:nvSpPr>
-          <p:cNvPr id="35" name="Text 32"/>
-          <p:cNvSpPr txBox="1"/>
-          <p:nvPr/>
-        </p:nvSpPr>
-        <p:spPr>
-          <a:xfrm>
-            <a:off x="4160520" y="5715000"/>
-            <a:ext cx="1600200" cy="219456"/>
-          </a:xfrm>
-          <a:prstGeom prst="rect">
-            <a:avLst/>
-          </a:prstGeom>
-          <a:noFill/>
-          <a:ln/>
-        </p:spPr>
-        <p:txBody>
-          <a:bodyPr wrap="square" lIns="0" tIns="0" rIns="0" bIns="0" rtlCol="0" anchor="ctr"/>
-          <a:lstStyle/>
-          <a:p>
-            <a:pPr algn="r" indent="0" marL="0">
-              <a:buNone/>
-            </a:pPr>
-            <a:r>
-              <a:rPr lang="en-US" sz="1000" b="1" dirty="0">
-                <a:solidFill>
-                  <a:srgbClr val="1C69EF"/>
-                </a:solidFill>
-                <a:latin typeface="Pretendard" pitchFamily="34" charset="0"/>
-                <a:ea typeface="Pretendard" pitchFamily="34" charset="-122"/>
-                <a:cs typeface="Pretendard" pitchFamily="34" charset="-120"/>
-              </a:rPr>
-              <a:t>915,000원</a:t>
-            </a:r>
-            <a:endParaRPr lang="en-US" sz="1000" dirty="0"/>
-          </a:p>
-        </p:txBody>
-      </p:sp>
-      <p:sp>
-        <p:nvSpPr>
-          <p:cNvPr id="36" name="Shape 33"/>
-          <p:cNvSpPr/>
-          <p:nvPr/>
-        </p:nvSpPr>
-        <p:spPr>
-          <a:xfrm>
-            <a:off x="1005840" y="5971032"/>
-            <a:ext cx="4754880" cy="0"/>
-          </a:xfrm>
-          <a:prstGeom prst="line">
-            <a:avLst/>
-          </a:prstGeom>
-          <a:noFill/>
-          <a:ln w="9525">
-            <a:solidFill>
-              <a:srgbClr val="E6E2DE"/>
-            </a:solidFill>
-            <a:prstDash val="solid"/>
-          </a:ln>
-        </p:spPr>
-      </p:sp>
-      <p:sp>
-        <p:nvSpPr>
-          <p:cNvPr id="37" name="Shape 34"/>
-          <p:cNvSpPr/>
-          <p:nvPr/>
-        </p:nvSpPr>
-        <p:spPr>
-          <a:xfrm>
-            <a:off x="6446520" y="2697480"/>
+            <a:off x="6446520" y="2103120"/>
             <a:ext cx="457200" cy="457200"/>
           </a:xfrm>
           <a:prstGeom prst="ellipse">
@@ -4562,7 +4091,7 @@
       </p:sp>
       <p:pic>
         <p:nvPicPr>
-          <p:cNvPr id="38" name="Image 1" descr="preencoded.png">    </p:cNvPr>
+          <p:cNvPr id="22" name="Image 1" descr="preencoded.png">    </p:cNvPr>
           <p:cNvPicPr>
             <a:picLocks noChangeAspect="1"/>
           </p:cNvPicPr>
@@ -4576,7 +4105,7 @@
         </p:blipFill>
         <p:spPr>
           <a:xfrm>
-            <a:off x="6565392" y="2816352"/>
+            <a:off x="6565392" y="2221992"/>
             <a:ext cx="219456" cy="219456"/>
           </a:xfrm>
           <a:prstGeom prst="rect">
@@ -4586,13 +4115,13 @@
       </p:pic>
       <p:sp>
         <p:nvSpPr>
-          <p:cNvPr id="39" name="Text 35"/>
-          <p:cNvSpPr txBox="1"/>
-          <p:nvPr/>
-        </p:nvSpPr>
-        <p:spPr>
-          <a:xfrm>
-            <a:off x="7086600" y="2697480"/>
+          <p:cNvPr id="23" name="Text 19"/>
+          <p:cNvSpPr txBox="1"/>
+          <p:nvPr/>
+        </p:nvSpPr>
+        <p:spPr>
+          <a:xfrm>
+            <a:off x="7086600" y="2103120"/>
             <a:ext cx="4419295" cy="329184"/>
           </a:xfrm>
           <a:prstGeom prst="rect">
@@ -4625,13 +4154,13 @@
       </p:sp>
       <p:sp>
         <p:nvSpPr>
-          <p:cNvPr id="40" name="Text 36"/>
-          <p:cNvSpPr txBox="1"/>
-          <p:nvPr/>
-        </p:nvSpPr>
-        <p:spPr>
-          <a:xfrm>
-            <a:off x="7086600" y="3081528"/>
+          <p:cNvPr id="24" name="Text 20"/>
+          <p:cNvSpPr txBox="1"/>
+          <p:nvPr/>
+        </p:nvSpPr>
+        <p:spPr>
+          <a:xfrm>
+            <a:off x="7086600" y="2487168"/>
             <a:ext cx="4419295" cy="731520"/>
           </a:xfrm>
           <a:prstGeom prst="rect">
@@ -4659,7 +4188,7 @@
                 <a:ea typeface="Pretendard" pitchFamily="34" charset="-122"/>
                 <a:cs typeface="Pretendard" pitchFamily="34" charset="-120"/>
               </a:rPr>
-              <a:t>이용권은 후기 약속이 아니라 매출입니다. 손님이 결제를 마친 뒤에 가게에 옵니다.</a:t>
+              <a:t>이용권은 후기 약속이 아니라 매출입니다.</a:t>
             </a:r>
             <a:endParaRPr lang="en-US" sz="1100" dirty="0"/>
           </a:p>
@@ -4667,13 +4196,13 @@
       </p:sp>
       <p:sp>
         <p:nvSpPr>
-          <p:cNvPr id="41" name="Shape 37"/>
+          <p:cNvPr id="25" name="Shape 21"/>
           <p:cNvSpPr/>
           <p:nvPr/>
         </p:nvSpPr>
         <p:spPr>
           <a:xfrm>
-            <a:off x="6446520" y="3886200"/>
+            <a:off x="6446520" y="3474720"/>
             <a:ext cx="457200" cy="457200"/>
           </a:xfrm>
           <a:prstGeom prst="ellipse">
@@ -4692,7 +4221,7 @@
       </p:sp>
       <p:pic>
         <p:nvPicPr>
-          <p:cNvPr id="42" name="Image 2" descr="preencoded.png">    </p:cNvPr>
+          <p:cNvPr id="26" name="Image 2" descr="preencoded.png">    </p:cNvPr>
           <p:cNvPicPr>
             <a:picLocks noChangeAspect="1"/>
           </p:cNvPicPr>
@@ -4706,7 +4235,7 @@
         </p:blipFill>
         <p:spPr>
           <a:xfrm>
-            <a:off x="6565392" y="4005072"/>
+            <a:off x="6565392" y="3593592"/>
             <a:ext cx="219456" cy="219456"/>
           </a:xfrm>
           <a:prstGeom prst="rect">
@@ -4716,13 +4245,13 @@
       </p:pic>
       <p:sp>
         <p:nvSpPr>
-          <p:cNvPr id="43" name="Text 38"/>
-          <p:cNvSpPr txBox="1"/>
-          <p:nvPr/>
-        </p:nvSpPr>
-        <p:spPr>
-          <a:xfrm>
-            <a:off x="7086600" y="3886200"/>
+          <p:cNvPr id="27" name="Text 22"/>
+          <p:cNvSpPr txBox="1"/>
+          <p:nvPr/>
+        </p:nvSpPr>
+        <p:spPr>
+          <a:xfrm>
+            <a:off x="7086600" y="3474720"/>
             <a:ext cx="4419295" cy="329184"/>
           </a:xfrm>
           <a:prstGeom prst="rect">
@@ -4755,13 +4284,13 @@
       </p:sp>
       <p:sp>
         <p:nvSpPr>
-          <p:cNvPr id="44" name="Text 39"/>
-          <p:cNvSpPr txBox="1"/>
-          <p:nvPr/>
-        </p:nvSpPr>
-        <p:spPr>
-          <a:xfrm>
-            <a:off x="7086600" y="4270248"/>
+          <p:cNvPr id="28" name="Text 23"/>
+          <p:cNvSpPr txBox="1"/>
+          <p:nvPr/>
+        </p:nvSpPr>
+        <p:spPr>
+          <a:xfrm>
+            <a:off x="7086600" y="3858768"/>
             <a:ext cx="4419295" cy="731520"/>
           </a:xfrm>
           <a:prstGeom prst="rect">
@@ -4789,7 +4318,7 @@
                 <a:ea typeface="Pretendard" pitchFamily="34" charset="-122"/>
                 <a:cs typeface="Pretendard" pitchFamily="34" charset="-120"/>
               </a:rPr>
-              <a:t>손님이 실제로 쓴 것만 정산 대상입니다. 예약이 아니라서 재료를 미리 준비할 일도 없습니다.</a:t>
+              <a:t>손님이 실제로 쓴 것만 정산 대상입니다.</a:t>
             </a:r>
             <a:endParaRPr lang="en-US" sz="1100" dirty="0"/>
           </a:p>
@@ -4797,13 +4326,13 @@
       </p:sp>
       <p:sp>
         <p:nvSpPr>
-          <p:cNvPr id="45" name="Shape 40"/>
+          <p:cNvPr id="29" name="Shape 24"/>
           <p:cNvSpPr/>
           <p:nvPr/>
         </p:nvSpPr>
         <p:spPr>
           <a:xfrm>
-            <a:off x="6446520" y="5074920"/>
+            <a:off x="6446520" y="4846320"/>
             <a:ext cx="457200" cy="457200"/>
           </a:xfrm>
           <a:prstGeom prst="ellipse">
@@ -4822,7 +4351,7 @@
       </p:sp>
       <p:pic>
         <p:nvPicPr>
-          <p:cNvPr id="46" name="Image 3" descr="preencoded.png">    </p:cNvPr>
+          <p:cNvPr id="30" name="Image 3" descr="preencoded.png">    </p:cNvPr>
           <p:cNvPicPr>
             <a:picLocks noChangeAspect="1"/>
           </p:cNvPicPr>
@@ -4836,7 +4365,7 @@
         </p:blipFill>
         <p:spPr>
           <a:xfrm>
-            <a:off x="6565392" y="5193792"/>
+            <a:off x="6565392" y="4965192"/>
             <a:ext cx="219456" cy="219456"/>
           </a:xfrm>
           <a:prstGeom prst="rect">
@@ -4846,13 +4375,13 @@
       </p:pic>
       <p:sp>
         <p:nvSpPr>
-          <p:cNvPr id="47" name="Text 41"/>
-          <p:cNvSpPr txBox="1"/>
-          <p:nvPr/>
-        </p:nvSpPr>
-        <p:spPr>
-          <a:xfrm>
-            <a:off x="7086600" y="5074920"/>
+          <p:cNvPr id="31" name="Text 25"/>
+          <p:cNvSpPr txBox="1"/>
+          <p:nvPr/>
+        </p:nvSpPr>
+        <p:spPr>
+          <a:xfrm>
+            <a:off x="7086600" y="4846320"/>
             <a:ext cx="4419295" cy="329184"/>
           </a:xfrm>
           <a:prstGeom prst="rect">
@@ -4885,13 +4414,13 @@
       </p:sp>
       <p:sp>
         <p:nvSpPr>
-          <p:cNvPr id="48" name="Text 42"/>
-          <p:cNvSpPr txBox="1"/>
-          <p:nvPr/>
-        </p:nvSpPr>
-        <p:spPr>
-          <a:xfrm>
-            <a:off x="7086600" y="5458968"/>
+          <p:cNvPr id="32" name="Text 26"/>
+          <p:cNvSpPr txBox="1"/>
+          <p:nvPr/>
+        </p:nvSpPr>
+        <p:spPr>
+          <a:xfrm>
+            <a:off x="7086600" y="5230368"/>
             <a:ext cx="4419295" cy="731520"/>
           </a:xfrm>
           <a:prstGeom prst="rect">
@@ -4919,7 +4448,7 @@
                 <a:ea typeface="Pretendard" pitchFamily="34" charset="-122"/>
                 <a:cs typeface="Pretendard" pitchFamily="34" charset="-120"/>
               </a:rPr>
-              <a:t>할인율, 수량, 유효기간 전부 사장님이 정합니다. 남는 메뉴만, 남는 만큼만 올리면 됩니다.</a:t>
+              <a:t>할인율, 수량, 유효기간 전부 사장님이 정합니다.</a:t>
             </a:r>
             <a:endParaRPr lang="en-US" sz="1100" dirty="0"/>
           </a:p>
@@ -5110,7 +4639,7 @@
         <p:spPr>
           <a:xfrm>
             <a:off x="685800" y="1828800"/>
-            <a:ext cx="7863840" cy="365760"/>
+            <a:ext cx="10820095" cy="548640"/>
           </a:xfrm>
           <a:prstGeom prst="rect">
             <a:avLst/>
@@ -5137,7 +4666,7 @@
                 <a:ea typeface="Pretendard" pitchFamily="34" charset="-122"/>
                 <a:cs typeface="Pretendard" pitchFamily="34" charset="-120"/>
               </a:rPr>
-              <a:t>등록만 하면 네 곳에 자동으로 뜹니다. 사장님이 콘텐츠를 만들 필요가 없습니다.</a:t>
+              <a:t>등록만 하면 유어딜 홈 인기 목록, 지도의 내 주변 이용권, 검색과 카카오톡 공유 카드, 영상 아래 구매 버튼, 네 곳에 자동으로 뜹니다.</a:t>
             </a:r>
             <a:endParaRPr lang="en-US" sz="1250" dirty="0"/>
           </a:p>
@@ -5151,12 +4680,12 @@
         </p:nvSpPr>
         <p:spPr>
           <a:xfrm>
-            <a:off x="685800" y="2377440"/>
-            <a:ext cx="5074920" cy="3794760"/>
+            <a:off x="685800" y="2514600"/>
+            <a:ext cx="3977640" cy="3657600"/>
           </a:xfrm>
           <a:prstGeom prst="roundRect">
             <a:avLst>
-              <a:gd name="adj" fmla="val 3373"/>
+              <a:gd name="adj" fmla="val 3500"/>
             </a:avLst>
           </a:prstGeom>
           <a:solidFill>
@@ -5185,8 +4714,8 @@
         </p:nvSpPr>
         <p:spPr>
           <a:xfrm>
-            <a:off x="960120" y="2560320"/>
-            <a:ext cx="4526280" cy="237744"/>
+            <a:off x="960120" y="2679192"/>
+            <a:ext cx="3429000" cy="237744"/>
           </a:xfrm>
           <a:prstGeom prst="rect">
             <a:avLst/>
@@ -5224,8 +4753,8 @@
         </p:nvSpPr>
         <p:spPr>
           <a:xfrm>
-            <a:off x="960120" y="2926080"/>
-            <a:ext cx="457200" cy="457200"/>
+            <a:off x="960120" y="3017520"/>
+            <a:ext cx="420624" cy="420624"/>
           </a:xfrm>
           <a:prstGeom prst="ellipse">
             <a:avLst/>
@@ -5257,8 +4786,8 @@
         </p:blipFill>
         <p:spPr>
           <a:xfrm>
-            <a:off x="1078992" y="3044952"/>
-            <a:ext cx="219456" cy="219456"/>
+            <a:off x="1069482" y="3126882"/>
+            <a:ext cx="201900" cy="201900"/>
           </a:xfrm>
           <a:prstGeom prst="rect">
             <a:avLst/>
@@ -5273,24 +4802,24 @@
         </p:nvSpPr>
         <p:spPr>
           <a:xfrm>
-            <a:off x="1600200" y="2944368"/>
-            <a:ext cx="3886200" cy="420624"/>
-          </a:xfrm>
-          <a:prstGeom prst="rect">
-            <a:avLst/>
-          </a:prstGeom>
-          <a:noFill/>
-          <a:ln/>
-        </p:spPr>
-        <p:txBody>
-          <a:bodyPr wrap="square" lIns="0" tIns="0" rIns="0" bIns="0" rtlCol="0" anchor="ctr"/>
-          <a:lstStyle/>
-          <a:p>
-            <a:pPr indent="0" marL="0">
-              <a:buNone/>
-            </a:pPr>
-            <a:r>
-              <a:rPr lang="en-US" sz="1300" b="1" spc="-30" kern="0" dirty="0">
+            <a:off x="1554480" y="3017520"/>
+            <a:ext cx="2880360" cy="420624"/>
+          </a:xfrm>
+          <a:prstGeom prst="rect">
+            <a:avLst/>
+          </a:prstGeom>
+          <a:noFill/>
+          <a:ln/>
+        </p:spPr>
+        <p:txBody>
+          <a:bodyPr wrap="square" lIns="0" tIns="0" rIns="0" bIns="0" rtlCol="0" anchor="ctr"/>
+          <a:lstStyle/>
+          <a:p>
+            <a:pPr indent="0" marL="0">
+              <a:buNone/>
+            </a:pPr>
+            <a:r>
+              <a:rPr lang="en-US" sz="1250" b="1" spc="-30" kern="0" dirty="0">
                 <a:solidFill>
                   <a:srgbClr val="16181C"/>
                 </a:solidFill>
@@ -5298,9 +4827,9 @@
                 <a:ea typeface="Pretendard" pitchFamily="34" charset="-122"/>
                 <a:cs typeface="Pretendard" pitchFamily="34" charset="-120"/>
               </a:rPr>
-              <a:t>유어딜 홈 인기 목록과 카테고리</a:t>
-            </a:r>
-            <a:endParaRPr lang="en-US" sz="1300" dirty="0"/>
+              <a:t>유어딜 홈 인기 목록</a:t>
+            </a:r>
+            <a:endParaRPr lang="en-US" sz="1250" dirty="0"/>
           </a:p>
         </p:txBody>
       </p:sp>
@@ -5312,8 +4841,8 @@
         </p:nvSpPr>
         <p:spPr>
           <a:xfrm>
-            <a:off x="960120" y="3657600"/>
-            <a:ext cx="457200" cy="457200"/>
+            <a:off x="960120" y="3749040"/>
+            <a:ext cx="420624" cy="420624"/>
           </a:xfrm>
           <a:prstGeom prst="ellipse">
             <a:avLst/>
@@ -5345,8 +4874,8 @@
         </p:blipFill>
         <p:spPr>
           <a:xfrm>
-            <a:off x="1078992" y="3776472"/>
-            <a:ext cx="219456" cy="219456"/>
+            <a:off x="1069482" y="3858402"/>
+            <a:ext cx="201900" cy="201900"/>
           </a:xfrm>
           <a:prstGeom prst="rect">
             <a:avLst/>
@@ -5361,24 +4890,24 @@
         </p:nvSpPr>
         <p:spPr>
           <a:xfrm>
-            <a:off x="1600200" y="3675888"/>
-            <a:ext cx="3886200" cy="420624"/>
-          </a:xfrm>
-          <a:prstGeom prst="rect">
-            <a:avLst/>
-          </a:prstGeom>
-          <a:noFill/>
-          <a:ln/>
-        </p:spPr>
-        <p:txBody>
-          <a:bodyPr wrap="square" lIns="0" tIns="0" rIns="0" bIns="0" rtlCol="0" anchor="ctr"/>
-          <a:lstStyle/>
-          <a:p>
-            <a:pPr indent="0" marL="0">
-              <a:buNone/>
-            </a:pPr>
-            <a:r>
-              <a:rPr lang="en-US" sz="1300" b="1" spc="-30" kern="0" dirty="0">
+            <a:off x="1554480" y="3749040"/>
+            <a:ext cx="2880360" cy="420624"/>
+          </a:xfrm>
+          <a:prstGeom prst="rect">
+            <a:avLst/>
+          </a:prstGeom>
+          <a:noFill/>
+          <a:ln/>
+        </p:spPr>
+        <p:txBody>
+          <a:bodyPr wrap="square" lIns="0" tIns="0" rIns="0" bIns="0" rtlCol="0" anchor="ctr"/>
+          <a:lstStyle/>
+          <a:p>
+            <a:pPr indent="0" marL="0">
+              <a:buNone/>
+            </a:pPr>
+            <a:r>
+              <a:rPr lang="en-US" sz="1250" b="1" spc="-30" kern="0" dirty="0">
                 <a:solidFill>
                   <a:srgbClr val="16181C"/>
                 </a:solidFill>
@@ -5388,7 +4917,7 @@
               </a:rPr>
               <a:t>지도의 내 주변 이용권</a:t>
             </a:r>
-            <a:endParaRPr lang="en-US" sz="1300" dirty="0"/>
+            <a:endParaRPr lang="en-US" sz="1250" dirty="0"/>
           </a:p>
         </p:txBody>
       </p:sp>
@@ -5400,8 +4929,8 @@
         </p:nvSpPr>
         <p:spPr>
           <a:xfrm>
-            <a:off x="960120" y="4389120"/>
-            <a:ext cx="457200" cy="457200"/>
+            <a:off x="960120" y="4480560"/>
+            <a:ext cx="420624" cy="420624"/>
           </a:xfrm>
           <a:prstGeom prst="ellipse">
             <a:avLst/>
@@ -5433,8 +4962,8 @@
         </p:blipFill>
         <p:spPr>
           <a:xfrm>
-            <a:off x="1078992" y="4507992"/>
-            <a:ext cx="219456" cy="219456"/>
+            <a:off x="1069482" y="4589922"/>
+            <a:ext cx="201900" cy="201900"/>
           </a:xfrm>
           <a:prstGeom prst="rect">
             <a:avLst/>
@@ -5449,24 +4978,24 @@
         </p:nvSpPr>
         <p:spPr>
           <a:xfrm>
-            <a:off x="1600200" y="4407408"/>
-            <a:ext cx="3886200" cy="420624"/>
-          </a:xfrm>
-          <a:prstGeom prst="rect">
-            <a:avLst/>
-          </a:prstGeom>
-          <a:noFill/>
-          <a:ln/>
-        </p:spPr>
-        <p:txBody>
-          <a:bodyPr wrap="square" lIns="0" tIns="0" rIns="0" bIns="0" rtlCol="0" anchor="ctr"/>
-          <a:lstStyle/>
-          <a:p>
-            <a:pPr indent="0" marL="0">
-              <a:buNone/>
-            </a:pPr>
-            <a:r>
-              <a:rPr lang="en-US" sz="1300" b="1" spc="-30" kern="0" dirty="0">
+            <a:off x="1554480" y="4480560"/>
+            <a:ext cx="2880360" cy="420624"/>
+          </a:xfrm>
+          <a:prstGeom prst="rect">
+            <a:avLst/>
+          </a:prstGeom>
+          <a:noFill/>
+          <a:ln/>
+        </p:spPr>
+        <p:txBody>
+          <a:bodyPr wrap="square" lIns="0" tIns="0" rIns="0" bIns="0" rtlCol="0" anchor="ctr"/>
+          <a:lstStyle/>
+          <a:p>
+            <a:pPr indent="0" marL="0">
+              <a:buNone/>
+            </a:pPr>
+            <a:r>
+              <a:rPr lang="en-US" sz="1250" b="1" spc="-30" kern="0" dirty="0">
                 <a:solidFill>
                   <a:srgbClr val="16181C"/>
                 </a:solidFill>
@@ -5476,7 +5005,7 @@
               </a:rPr>
               <a:t>검색과 카카오톡 공유 카드</a:t>
             </a:r>
-            <a:endParaRPr lang="en-US" sz="1300" dirty="0"/>
+            <a:endParaRPr lang="en-US" sz="1250" dirty="0"/>
           </a:p>
         </p:txBody>
       </p:sp>
@@ -5488,8 +5017,8 @@
         </p:nvSpPr>
         <p:spPr>
           <a:xfrm>
-            <a:off x="960120" y="5120640"/>
-            <a:ext cx="457200" cy="457200"/>
+            <a:off x="960120" y="5212080"/>
+            <a:ext cx="420624" cy="420624"/>
           </a:xfrm>
           <a:prstGeom prst="ellipse">
             <a:avLst/>
@@ -5521,8 +5050,8 @@
         </p:blipFill>
         <p:spPr>
           <a:xfrm>
-            <a:off x="1078992" y="5239512"/>
-            <a:ext cx="219456" cy="219456"/>
+            <a:off x="1069482" y="5321442"/>
+            <a:ext cx="201900" cy="201900"/>
           </a:xfrm>
           <a:prstGeom prst="rect">
             <a:avLst/>
@@ -5537,24 +5066,24 @@
         </p:nvSpPr>
         <p:spPr>
           <a:xfrm>
-            <a:off x="1600200" y="5138928"/>
-            <a:ext cx="3886200" cy="420624"/>
-          </a:xfrm>
-          <a:prstGeom prst="rect">
-            <a:avLst/>
-          </a:prstGeom>
-          <a:noFill/>
-          <a:ln/>
-        </p:spPr>
-        <p:txBody>
-          <a:bodyPr wrap="square" lIns="0" tIns="0" rIns="0" bIns="0" rtlCol="0" anchor="ctr"/>
-          <a:lstStyle/>
-          <a:p>
-            <a:pPr indent="0" marL="0">
-              <a:buNone/>
-            </a:pPr>
-            <a:r>
-              <a:rPr lang="en-US" sz="1300" b="1" spc="-30" kern="0" dirty="0">
+            <a:off x="1554480" y="5212080"/>
+            <a:ext cx="2880360" cy="420624"/>
+          </a:xfrm>
+          <a:prstGeom prst="rect">
+            <a:avLst/>
+          </a:prstGeom>
+          <a:noFill/>
+          <a:ln/>
+        </p:spPr>
+        <p:txBody>
+          <a:bodyPr wrap="square" lIns="0" tIns="0" rIns="0" bIns="0" rtlCol="0" anchor="ctr"/>
+          <a:lstStyle/>
+          <a:p>
+            <a:pPr indent="0" marL="0">
+              <a:buNone/>
+            </a:pPr>
+            <a:r>
+              <a:rPr lang="en-US" sz="1250" b="1" spc="-30" kern="0" dirty="0">
                 <a:solidFill>
                   <a:srgbClr val="16181C"/>
                 </a:solidFill>
@@ -5564,7 +5093,7 @@
               </a:rPr>
               <a:t>영상 아래 구매 버튼</a:t>
             </a:r>
-            <a:endParaRPr lang="en-US" sz="1300" dirty="0"/>
+            <a:endParaRPr lang="en-US" sz="1250" dirty="0"/>
           </a:p>
         </p:txBody>
       </p:sp>
@@ -5576,12 +5105,12 @@
         </p:nvSpPr>
         <p:spPr>
           <a:xfrm>
-            <a:off x="6080760" y="2377440"/>
-            <a:ext cx="3154680" cy="1783080"/>
+            <a:off x="4983480" y="2514600"/>
+            <a:ext cx="6522415" cy="3657600"/>
           </a:xfrm>
           <a:prstGeom prst="roundRect">
             <a:avLst>
-              <a:gd name="adj" fmla="val 7179"/>
+              <a:gd name="adj" fmla="val 3500"/>
             </a:avLst>
           </a:prstGeom>
           <a:solidFill>
@@ -5604,79 +5133,134 @@
       </p:sp>
       <p:sp>
         <p:nvSpPr>
-          <p:cNvPr id="22" name="Shape 15"/>
+          <p:cNvPr id="22" name="Text 15"/>
+          <p:cNvSpPr txBox="1"/>
+          <p:nvPr/>
+        </p:nvSpPr>
+        <p:spPr>
+          <a:xfrm>
+            <a:off x="5303520" y="2697480"/>
+            <a:ext cx="5882335" cy="329184"/>
+          </a:xfrm>
+          <a:prstGeom prst="rect">
+            <a:avLst/>
+          </a:prstGeom>
+          <a:noFill/>
+          <a:ln/>
+        </p:spPr>
+        <p:txBody>
+          <a:bodyPr wrap="square" lIns="0" tIns="0" rIns="0" bIns="0" rtlCol="0" anchor="ctr"/>
+          <a:lstStyle/>
+          <a:p>
+            <a:pPr indent="0" marL="0">
+              <a:buNone/>
+            </a:pPr>
+            <a:r>
+              <a:rPr lang="en-US" sz="1500" b="1" spc="-40" kern="0" dirty="0">
+                <a:solidFill>
+                  <a:srgbClr val="16181C"/>
+                </a:solidFill>
+                <a:latin typeface="Pretendard" pitchFamily="34" charset="0"/>
+                <a:ea typeface="Pretendard" pitchFamily="34" charset="-122"/>
+                <a:cs typeface="Pretendard" pitchFamily="34" charset="-120"/>
+              </a:rPr>
+              <a:t>그리고 저희에겐 파는 사람들이 있습니다.</a:t>
+            </a:r>
+            <a:endParaRPr lang="en-US" sz="1500" dirty="0"/>
+          </a:p>
+        </p:txBody>
+      </p:sp>
+      <p:sp>
+        <p:nvSpPr>
+          <p:cNvPr id="23" name="Text 16"/>
+          <p:cNvSpPr txBox="1"/>
+          <p:nvPr/>
+        </p:nvSpPr>
+        <p:spPr>
+          <a:xfrm>
+            <a:off x="5303520" y="3090672"/>
+            <a:ext cx="5882335" cy="1325880"/>
+          </a:xfrm>
+          <a:prstGeom prst="rect">
+            <a:avLst/>
+          </a:prstGeom>
+          <a:noFill/>
+          <a:ln/>
+        </p:spPr>
+        <p:txBody>
+          <a:bodyPr wrap="square" lIns="0" tIns="0" rIns="0" bIns="0" rtlCol="0" anchor="t"/>
+          <a:lstStyle/>
+          <a:p>
+            <a:pPr indent="0" marL="0">
+              <a:lnSpc>
+                <a:spcPct val="148000"/>
+              </a:lnSpc>
+              <a:buNone/>
+            </a:pPr>
+            <a:r>
+              <a:rPr lang="en-US" sz="1100" dirty="0">
+                <a:solidFill>
+                  <a:srgbClr val="6E6B68"/>
+                </a:solidFill>
+                <a:latin typeface="Pretendard" pitchFamily="34" charset="0"/>
+                <a:ea typeface="Pretendard" pitchFamily="34" charset="-122"/>
+                <a:cs typeface="Pretendard" pitchFamily="34" charset="-120"/>
+              </a:rPr>
+              <a:t>유어딜이 확보한 크리에이터 풀, 유튜버 18,170명과 네이버 블로거 172,755명(2026년 9월 기준)에게 사장님의 이용권 판매를 제안합니다. 맛집, 뷰티, 동네 콘텐츠를 만드는 사람들이 자기 채널에서 이용권을 소개하고, 그 링크로 팔린 것에만 소개비가 나갑니다. 여기서도 미리 주는 돈은 없습니다.</a:t>
+            </a:r>
+            <a:endParaRPr lang="en-US" sz="1100" dirty="0"/>
+          </a:p>
+        </p:txBody>
+      </p:sp>
+      <p:sp>
+        <p:nvSpPr>
+          <p:cNvPr id="24" name="Shape 17"/>
           <p:cNvSpPr/>
           <p:nvPr/>
         </p:nvSpPr>
         <p:spPr>
           <a:xfrm>
-            <a:off x="6355080" y="2606040"/>
-            <a:ext cx="420624" cy="420624"/>
-          </a:xfrm>
-          <a:prstGeom prst="ellipse">
-            <a:avLst/>
-          </a:prstGeom>
-          <a:solidFill>
-            <a:srgbClr val="E4EDFD"/>
-          </a:solidFill>
-          <a:ln w="12700">
+            <a:off x="5303520" y="4526280"/>
+            <a:ext cx="5882335" cy="0"/>
+          </a:xfrm>
+          <a:prstGeom prst="line">
+            <a:avLst/>
+          </a:prstGeom>
+          <a:noFill/>
+          <a:ln w="9525">
             <a:solidFill>
-              <a:srgbClr val="E4EDFD"/>
+              <a:srgbClr val="E6E2DE"/>
             </a:solidFill>
             <a:prstDash val="solid"/>
           </a:ln>
         </p:spPr>
       </p:sp>
-      <p:pic>
-        <p:nvPicPr>
-          <p:cNvPr id="23" name="Image 5" descr="preencoded.png">    </p:cNvPr>
-          <p:cNvPicPr>
-            <a:picLocks noChangeAspect="1"/>
-          </p:cNvPicPr>
-          <p:nvPr/>
-        </p:nvPicPr>
-        <p:blipFill>
-          <a:blip r:embed="rId6"/>
-          <a:stretch>
-            <a:fillRect/>
-          </a:stretch>
-        </p:blipFill>
-        <p:spPr>
-          <a:xfrm>
-            <a:off x="6464442" y="2715402"/>
-            <a:ext cx="201900" cy="201900"/>
-          </a:xfrm>
-          <a:prstGeom prst="rect">
-            <a:avLst/>
-          </a:prstGeom>
-        </p:spPr>
-      </p:pic>
-      <p:sp>
-        <p:nvSpPr>
-          <p:cNvPr id="24" name="Text 16"/>
-          <p:cNvSpPr txBox="1"/>
-          <p:nvPr/>
-        </p:nvSpPr>
-        <p:spPr>
-          <a:xfrm>
-            <a:off x="6903720" y="2651760"/>
-            <a:ext cx="2148840" cy="310896"/>
-          </a:xfrm>
-          <a:prstGeom prst="rect">
-            <a:avLst/>
-          </a:prstGeom>
-          <a:noFill/>
-          <a:ln/>
-        </p:spPr>
-        <p:txBody>
-          <a:bodyPr wrap="square" lIns="0" tIns="0" rIns="0" bIns="0" rtlCol="0" anchor="ctr"/>
-          <a:lstStyle/>
-          <a:p>
-            <a:pPr indent="0" marL="0">
-              <a:buNone/>
-            </a:pPr>
-            <a:r>
-              <a:rPr lang="en-US" sz="1350" b="1" spc="-30" kern="0" dirty="0">
+      <p:sp>
+        <p:nvSpPr>
+          <p:cNvPr id="25" name="Text 18"/>
+          <p:cNvSpPr txBox="1"/>
+          <p:nvPr/>
+        </p:nvSpPr>
+        <p:spPr>
+          <a:xfrm>
+            <a:off x="5303520" y="4709160"/>
+            <a:ext cx="1960778" cy="548640"/>
+          </a:xfrm>
+          <a:prstGeom prst="rect">
+            <a:avLst/>
+          </a:prstGeom>
+          <a:noFill/>
+          <a:ln/>
+        </p:spPr>
+        <p:txBody>
+          <a:bodyPr wrap="square" lIns="0" tIns="0" rIns="0" bIns="0" rtlCol="0" anchor="ctr"/>
+          <a:lstStyle/>
+          <a:p>
+            <a:pPr indent="0" marL="0">
+              <a:buNone/>
+            </a:pPr>
+            <a:r>
+              <a:rPr lang="en-US" sz="2400" b="1" spc="-100" kern="0" dirty="0">
                 <a:solidFill>
                   <a:srgbClr val="16181C"/>
                 </a:solidFill>
@@ -5684,37 +5268,34 @@
                 <a:ea typeface="Pretendard" pitchFamily="34" charset="-122"/>
                 <a:cs typeface="Pretendard" pitchFamily="34" charset="-120"/>
               </a:rPr>
-              <a:t>소개해 주는 사람들</a:t>
-            </a:r>
-            <a:endParaRPr lang="en-US" sz="1350" dirty="0"/>
-          </a:p>
-        </p:txBody>
-      </p:sp>
-      <p:sp>
-        <p:nvSpPr>
-          <p:cNvPr id="25" name="Text 17"/>
-          <p:cNvSpPr txBox="1"/>
-          <p:nvPr/>
-        </p:nvSpPr>
-        <p:spPr>
-          <a:xfrm>
-            <a:off x="6355080" y="3108960"/>
-            <a:ext cx="2606040" cy="1005840"/>
-          </a:xfrm>
-          <a:prstGeom prst="rect">
-            <a:avLst/>
-          </a:prstGeom>
-          <a:noFill/>
-          <a:ln/>
-        </p:spPr>
-        <p:txBody>
-          <a:bodyPr wrap="square" lIns="0" tIns="0" rIns="0" bIns="0" rtlCol="0" anchor="t"/>
-          <a:lstStyle/>
-          <a:p>
-            <a:pPr indent="0" marL="0">
-              <a:lnSpc>
-                <a:spcPct val="142000"/>
-              </a:lnSpc>
+              <a:t>18,170명</a:t>
+            </a:r>
+            <a:endParaRPr lang="en-US" sz="2400" dirty="0"/>
+          </a:p>
+        </p:txBody>
+      </p:sp>
+      <p:sp>
+        <p:nvSpPr>
+          <p:cNvPr id="26" name="Text 19"/>
+          <p:cNvSpPr txBox="1"/>
+          <p:nvPr/>
+        </p:nvSpPr>
+        <p:spPr>
+          <a:xfrm>
+            <a:off x="5303520" y="5285232"/>
+            <a:ext cx="1960778" cy="274320"/>
+          </a:xfrm>
+          <a:prstGeom prst="rect">
+            <a:avLst/>
+          </a:prstGeom>
+          <a:noFill/>
+          <a:ln/>
+        </p:spPr>
+        <p:txBody>
+          <a:bodyPr wrap="square" lIns="0" tIns="0" rIns="0" bIns="0" rtlCol="0" anchor="ctr"/>
+          <a:lstStyle/>
+          <a:p>
+            <a:pPr indent="0" marL="0">
               <a:buNone/>
             </a:pPr>
             <a:r>
@@ -5726,7 +5307,7 @@
                 <a:ea typeface="Pretendard" pitchFamily="34" charset="-122"/>
                 <a:cs typeface="Pretendard" pitchFamily="34" charset="-120"/>
               </a:rPr>
-              <a:t>동네 맛집, 뷰티 콘텐츠를 만드는 크리에이터들이 이용권을 소개하기도 합니다. 이때도 나가는 건 팔린 것에 대한 소개비뿐, 미리 주는 돈은 없습니다.</a:t>
+              <a:t>유튜버</a:t>
             </a:r>
             <a:endParaRPr lang="en-US" sz="1050" dirty="0"/>
           </a:p>
@@ -5734,113 +5315,30 @@
       </p:sp>
       <p:sp>
         <p:nvSpPr>
-          <p:cNvPr id="26" name="Shape 18"/>
-          <p:cNvSpPr/>
-          <p:nvPr/>
-        </p:nvSpPr>
-        <p:spPr>
-          <a:xfrm>
-            <a:off x="6080760" y="4389120"/>
-            <a:ext cx="3154680" cy="1783080"/>
-          </a:xfrm>
-          <a:prstGeom prst="roundRect">
-            <a:avLst>
-              <a:gd name="adj" fmla="val 7179"/>
-            </a:avLst>
-          </a:prstGeom>
-          <a:solidFill>
-            <a:srgbClr val="FFFFFF"/>
-          </a:solidFill>
-          <a:ln w="12700">
-            <a:solidFill>
-              <a:srgbClr val="FFFFFF"/>
-            </a:solidFill>
-            <a:prstDash val="solid"/>
-          </a:ln>
-          <a:effectLst>
-            <a:outerShdw sx="100000" sy="100000" kx="0" ky="0" algn="bl" rotWithShape="0" blurRad="101600" dist="25400" dir="5400000">
-              <a:srgbClr val="1A2C42">
-                <a:alpha val="7000"/>
-              </a:srgbClr>
-            </a:outerShdw>
-          </a:effectLst>
-        </p:spPr>
-      </p:sp>
-      <p:sp>
-        <p:nvSpPr>
-          <p:cNvPr id="27" name="Shape 19"/>
-          <p:cNvSpPr/>
-          <p:nvPr/>
-        </p:nvSpPr>
-        <p:spPr>
-          <a:xfrm>
-            <a:off x="6355080" y="4617720"/>
-            <a:ext cx="420624" cy="420624"/>
-          </a:xfrm>
-          <a:prstGeom prst="ellipse">
-            <a:avLst/>
-          </a:prstGeom>
-          <a:solidFill>
-            <a:srgbClr val="E4EDFD"/>
-          </a:solidFill>
-          <a:ln w="12700">
-            <a:solidFill>
-              <a:srgbClr val="E4EDFD"/>
-            </a:solidFill>
-            <a:prstDash val="solid"/>
-          </a:ln>
-        </p:spPr>
-      </p:sp>
-      <p:pic>
-        <p:nvPicPr>
-          <p:cNvPr id="28" name="Image 6" descr="preencoded.png">    </p:cNvPr>
-          <p:cNvPicPr>
-            <a:picLocks noChangeAspect="1"/>
-          </p:cNvPicPr>
-          <p:nvPr/>
-        </p:nvPicPr>
-        <p:blipFill>
-          <a:blip r:embed="rId7"/>
-          <a:stretch>
-            <a:fillRect/>
-          </a:stretch>
-        </p:blipFill>
-        <p:spPr>
-          <a:xfrm>
-            <a:off x="6464442" y="4727082"/>
-            <a:ext cx="201900" cy="201900"/>
-          </a:xfrm>
-          <a:prstGeom prst="rect">
-            <a:avLst/>
-          </a:prstGeom>
-        </p:spPr>
-      </p:pic>
-      <p:sp>
-        <p:nvSpPr>
-          <p:cNvPr id="29" name="Text 20"/>
-          <p:cNvSpPr txBox="1"/>
-          <p:nvPr/>
-        </p:nvSpPr>
-        <p:spPr>
-          <a:xfrm>
-            <a:off x="6903720" y="4663440"/>
-            <a:ext cx="2148840" cy="310896"/>
-          </a:xfrm>
-          <a:prstGeom prst="rect">
-            <a:avLst/>
-          </a:prstGeom>
-          <a:noFill/>
-          <a:ln/>
-        </p:spPr>
-        <p:txBody>
-          <a:bodyPr wrap="square" lIns="0" tIns="0" rIns="0" bIns="0" rtlCol="0" anchor="ctr"/>
-          <a:lstStyle/>
-          <a:p>
-            <a:pPr indent="0" marL="0">
-              <a:buNone/>
-            </a:pPr>
-            <a:r>
-              <a:rPr lang="en-US" sz="1350" b="1" spc="-30" kern="0" dirty="0">
+          <p:cNvPr id="27" name="Text 20"/>
+          <p:cNvSpPr txBox="1"/>
+          <p:nvPr/>
+        </p:nvSpPr>
+        <p:spPr>
+          <a:xfrm>
+            <a:off x="7264298" y="4709160"/>
+            <a:ext cx="1960778" cy="548640"/>
+          </a:xfrm>
+          <a:prstGeom prst="rect">
+            <a:avLst/>
+          </a:prstGeom>
+          <a:noFill/>
+          <a:ln/>
+        </p:spPr>
+        <p:txBody>
+          <a:bodyPr wrap="square" lIns="0" tIns="0" rIns="0" bIns="0" rtlCol="0" anchor="ctr"/>
+          <a:lstStyle/>
+          <a:p>
+            <a:pPr indent="0" marL="0">
+              <a:buNone/>
+            </a:pPr>
+            <a:r>
+              <a:rPr lang="en-US" sz="2400" b="1" spc="-100" kern="0" dirty="0">
                 <a:solidFill>
                   <a:srgbClr val="16181C"/>
                 </a:solidFill>
@@ -5848,37 +5346,34 @@
                 <a:ea typeface="Pretendard" pitchFamily="34" charset="-122"/>
                 <a:cs typeface="Pretendard" pitchFamily="34" charset="-120"/>
               </a:rPr>
-              <a:t>후기는 유어딜이 모읍니다</a:t>
-            </a:r>
-            <a:endParaRPr lang="en-US" sz="1350" dirty="0"/>
-          </a:p>
-        </p:txBody>
-      </p:sp>
-      <p:sp>
-        <p:nvSpPr>
-          <p:cNvPr id="30" name="Text 21"/>
-          <p:cNvSpPr txBox="1"/>
-          <p:nvPr/>
-        </p:nvSpPr>
-        <p:spPr>
-          <a:xfrm>
-            <a:off x="6355080" y="5120640"/>
-            <a:ext cx="2606040" cy="1005840"/>
-          </a:xfrm>
-          <a:prstGeom prst="rect">
-            <a:avLst/>
-          </a:prstGeom>
-          <a:noFill/>
-          <a:ln/>
-        </p:spPr>
-        <p:txBody>
-          <a:bodyPr wrap="square" lIns="0" tIns="0" rIns="0" bIns="0" rtlCol="0" anchor="t"/>
-          <a:lstStyle/>
-          <a:p>
-            <a:pPr indent="0" marL="0">
-              <a:lnSpc>
-                <a:spcPct val="142000"/>
-              </a:lnSpc>
+              <a:t>172,755명</a:t>
+            </a:r>
+            <a:endParaRPr lang="en-US" sz="2400" dirty="0"/>
+          </a:p>
+        </p:txBody>
+      </p:sp>
+      <p:sp>
+        <p:nvSpPr>
+          <p:cNvPr id="28" name="Text 21"/>
+          <p:cNvSpPr txBox="1"/>
+          <p:nvPr/>
+        </p:nvSpPr>
+        <p:spPr>
+          <a:xfrm>
+            <a:off x="7264298" y="5285232"/>
+            <a:ext cx="1960778" cy="274320"/>
+          </a:xfrm>
+          <a:prstGeom prst="rect">
+            <a:avLst/>
+          </a:prstGeom>
+          <a:noFill/>
+          <a:ln/>
+        </p:spPr>
+        <p:txBody>
+          <a:bodyPr wrap="square" lIns="0" tIns="0" rIns="0" bIns="0" rtlCol="0" anchor="ctr"/>
+          <a:lstStyle/>
+          <a:p>
+            <a:pPr indent="0" marL="0">
               <a:buNone/>
             </a:pPr>
             <a:r>
@@ -5890,58 +5385,73 @@
                 <a:ea typeface="Pretendard" pitchFamily="34" charset="-122"/>
                 <a:cs typeface="Pretendard" pitchFamily="34" charset="-120"/>
               </a:rPr>
-              <a:t>첫 후기를 남긴 손님에게는 유어딜이 포인트를 드립니다. 사장님 부담 없이 후기가 쌓입니다.</a:t>
+              <a:t>네이버 블로거</a:t>
             </a:r>
             <a:endParaRPr lang="en-US" sz="1050" dirty="0"/>
           </a:p>
         </p:txBody>
       </p:sp>
-      <p:pic>
-        <p:nvPicPr>
-          <p:cNvPr id="31" name="Image 7" descr="preencoded.png">    </p:cNvPr>
-          <p:cNvPicPr>
-            <a:picLocks noChangeAspect="1"/>
-          </p:cNvPicPr>
-          <p:nvPr/>
-        </p:nvPicPr>
-        <p:blipFill>
-          <a:blip r:embed="rId8"/>
-          <a:stretch>
-            <a:fillRect/>
-          </a:stretch>
-        </p:blipFill>
-        <p:spPr>
-          <a:xfrm>
-            <a:off x="9266853" y="717213"/>
-            <a:ext cx="2813205" cy="5377855"/>
-          </a:xfrm>
-          <a:prstGeom prst="rect">
-            <a:avLst/>
-          </a:prstGeom>
-        </p:spPr>
-      </p:pic>
-      <p:sp>
-        <p:nvSpPr>
-          <p:cNvPr id="32" name="Text 22"/>
-          <p:cNvSpPr txBox="1"/>
-          <p:nvPr/>
-        </p:nvSpPr>
-        <p:spPr>
-          <a:xfrm>
-            <a:off x="9144000" y="5998464"/>
-            <a:ext cx="3058911" cy="274320"/>
-          </a:xfrm>
-          <a:prstGeom prst="rect">
-            <a:avLst/>
-          </a:prstGeom>
-          <a:noFill/>
-          <a:ln/>
-        </p:spPr>
-        <p:txBody>
-          <a:bodyPr wrap="square" lIns="0" tIns="0" rIns="0" bIns="0" rtlCol="0" anchor="ctr"/>
-          <a:lstStyle/>
-          <a:p>
-            <a:pPr algn="ctr" indent="0" marL="0">
+      <p:sp>
+        <p:nvSpPr>
+          <p:cNvPr id="29" name="Text 22"/>
+          <p:cNvSpPr txBox="1"/>
+          <p:nvPr/>
+        </p:nvSpPr>
+        <p:spPr>
+          <a:xfrm>
+            <a:off x="9225077" y="4709160"/>
+            <a:ext cx="1960778" cy="548640"/>
+          </a:xfrm>
+          <a:prstGeom prst="rect">
+            <a:avLst/>
+          </a:prstGeom>
+          <a:noFill/>
+          <a:ln/>
+        </p:spPr>
+        <p:txBody>
+          <a:bodyPr wrap="square" lIns="0" tIns="0" rIns="0" bIns="0" rtlCol="0" anchor="ctr"/>
+          <a:lstStyle/>
+          <a:p>
+            <a:pPr indent="0" marL="0">
+              <a:buNone/>
+            </a:pPr>
+            <a:r>
+              <a:rPr lang="en-US" sz="2400" b="1" spc="-100" kern="0" dirty="0">
+                <a:solidFill>
+                  <a:srgbClr val="1C69EF"/>
+                </a:solidFill>
+                <a:latin typeface="Pretendard" pitchFamily="34" charset="0"/>
+                <a:ea typeface="Pretendard" pitchFamily="34" charset="-122"/>
+                <a:cs typeface="Pretendard" pitchFamily="34" charset="-120"/>
+              </a:rPr>
+              <a:t>0원</a:t>
+            </a:r>
+            <a:endParaRPr lang="en-US" sz="2400" dirty="0"/>
+          </a:p>
+        </p:txBody>
+      </p:sp>
+      <p:sp>
+        <p:nvSpPr>
+          <p:cNvPr id="30" name="Text 23"/>
+          <p:cNvSpPr txBox="1"/>
+          <p:nvPr/>
+        </p:nvSpPr>
+        <p:spPr>
+          <a:xfrm>
+            <a:off x="9225077" y="5285232"/>
+            <a:ext cx="1960778" cy="274320"/>
+          </a:xfrm>
+          <a:prstGeom prst="rect">
+            <a:avLst/>
+          </a:prstGeom>
+          <a:noFill/>
+          <a:ln/>
+        </p:spPr>
+        <p:txBody>
+          <a:bodyPr wrap="square" lIns="0" tIns="0" rIns="0" bIns="0" rtlCol="0" anchor="ctr"/>
+          <a:lstStyle/>
+          <a:p>
+            <a:pPr indent="0" marL="0">
               <a:buNone/>
             </a:pPr>
             <a:r>
@@ -5953,7 +5463,46 @@
                 <a:ea typeface="Pretendard" pitchFamily="34" charset="-122"/>
                 <a:cs typeface="Pretendard" pitchFamily="34" charset="-120"/>
               </a:rPr>
-              <a:t>유어딜 홈 (라이브 화면)</a:t>
+              <a:t>미리 나가는 홍보비</a:t>
+            </a:r>
+            <a:endParaRPr lang="en-US" sz="1050" dirty="0"/>
+          </a:p>
+        </p:txBody>
+      </p:sp>
+      <p:sp>
+        <p:nvSpPr>
+          <p:cNvPr id="31" name="Text 24"/>
+          <p:cNvSpPr txBox="1"/>
+          <p:nvPr/>
+        </p:nvSpPr>
+        <p:spPr>
+          <a:xfrm>
+            <a:off x="5303520" y="5669280"/>
+            <a:ext cx="5882335" cy="274320"/>
+          </a:xfrm>
+          <a:prstGeom prst="rect">
+            <a:avLst/>
+          </a:prstGeom>
+          <a:noFill/>
+          <a:ln/>
+        </p:spPr>
+        <p:txBody>
+          <a:bodyPr wrap="square" lIns="0" tIns="0" rIns="0" bIns="0" rtlCol="0" anchor="ctr"/>
+          <a:lstStyle/>
+          <a:p>
+            <a:pPr indent="0" marL="0">
+              <a:buNone/>
+            </a:pPr>
+            <a:r>
+              <a:rPr lang="en-US" sz="1050" b="1" dirty="0">
+                <a:solidFill>
+                  <a:srgbClr val="16181C"/>
+                </a:solidFill>
+                <a:latin typeface="Pretendard" pitchFamily="34" charset="0"/>
+                <a:ea typeface="Pretendard" pitchFamily="34" charset="-122"/>
+                <a:cs typeface="Pretendard" pitchFamily="34" charset="-120"/>
+              </a:rPr>
+              <a:t>소개비 %는 사장님이 정합니다. 제안하지 않으면 아무것도 나가지 않습니다.</a:t>
             </a:r>
             <a:endParaRPr lang="en-US" sz="1050" dirty="0"/>
           </a:p>
@@ -6129,7 +5678,7 @@
                 <a:ea typeface="Pretendard" pitchFamily="34" charset="-122"/>
                 <a:cs typeface="Pretendard" pitchFamily="34" charset="-120"/>
               </a:rPr>
-              <a:t>자주 묻는 질문</a:t>
+              <a:t>이런 식으로도 쓰십니다.</a:t>
             </a:r>
             <a:endParaRPr lang="en-US" sz="2700" dirty="0"/>
           </a:p>
@@ -6144,690 +5693,25 @@
         <p:spPr>
           <a:xfrm>
             <a:off x="685800" y="1965960"/>
-            <a:ext cx="3657600" cy="1207008"/>
-          </a:xfrm>
-          <a:prstGeom prst="roundRect">
-            <a:avLst>
-              <a:gd name="adj" fmla="val 10606"/>
-            </a:avLst>
+            <a:ext cx="420624" cy="420624"/>
+          </a:xfrm>
+          <a:prstGeom prst="ellipse">
+            <a:avLst/>
           </a:prstGeom>
           <a:solidFill>
-            <a:srgbClr val="FFFFFF"/>
+            <a:srgbClr val="E4EDFD"/>
           </a:solidFill>
           <a:ln w="12700">
             <a:solidFill>
-              <a:srgbClr val="FFFFFF"/>
+              <a:srgbClr val="E4EDFD"/>
             </a:solidFill>
             <a:prstDash val="solid"/>
           </a:ln>
-          <a:effectLst>
-            <a:outerShdw sx="100000" sy="100000" kx="0" ky="0" algn="bl" rotWithShape="0" blurRad="101600" dist="25400" dir="5400000">
-              <a:srgbClr val="1A2C42">
-                <a:alpha val="7000"/>
-              </a:srgbClr>
-            </a:outerShdw>
-          </a:effectLst>
-        </p:spPr>
-      </p:sp>
-      <p:sp>
-        <p:nvSpPr>
-          <p:cNvPr id="7" name="Text 4"/>
-          <p:cNvSpPr txBox="1"/>
-          <p:nvPr/>
-        </p:nvSpPr>
-        <p:spPr>
-          <a:xfrm>
-            <a:off x="941832" y="2121408"/>
-            <a:ext cx="3145536" cy="274320"/>
-          </a:xfrm>
-          <a:prstGeom prst="rect">
-            <a:avLst/>
-          </a:prstGeom>
-          <a:noFill/>
-          <a:ln/>
-        </p:spPr>
-        <p:txBody>
-          <a:bodyPr wrap="square" lIns="0" tIns="0" rIns="0" bIns="0" rtlCol="0" anchor="ctr"/>
-          <a:lstStyle/>
-          <a:p>
-            <a:pPr indent="0" marL="0">
-              <a:buNone/>
-            </a:pPr>
-            <a:r>
-              <a:rPr lang="en-US" sz="1200" b="1" spc="-30" kern="0" dirty="0">
-                <a:solidFill>
-                  <a:srgbClr val="16181C"/>
-                </a:solidFill>
-                <a:latin typeface="Pretendard" pitchFamily="34" charset="0"/>
-                <a:ea typeface="Pretendard" pitchFamily="34" charset="-122"/>
-                <a:cs typeface="Pretendard" pitchFamily="34" charset="-120"/>
-              </a:rPr>
-              <a:t>손님이 안 오면요? (노쇼)</a:t>
-            </a:r>
-            <a:endParaRPr lang="en-US" sz="1200" dirty="0"/>
-          </a:p>
-        </p:txBody>
-      </p:sp>
-      <p:sp>
-        <p:nvSpPr>
-          <p:cNvPr id="8" name="Text 5"/>
-          <p:cNvSpPr txBox="1"/>
-          <p:nvPr/>
-        </p:nvSpPr>
-        <p:spPr>
-          <a:xfrm>
-            <a:off x="941832" y="2423160"/>
-            <a:ext cx="3145536" cy="713232"/>
-          </a:xfrm>
-          <a:prstGeom prst="rect">
-            <a:avLst/>
-          </a:prstGeom>
-          <a:noFill/>
-          <a:ln/>
-        </p:spPr>
-        <p:txBody>
-          <a:bodyPr wrap="square" lIns="0" tIns="0" rIns="0" bIns="0" rtlCol="0" anchor="t"/>
-          <a:lstStyle/>
-          <a:p>
-            <a:pPr indent="0" marL="0">
-              <a:lnSpc>
-                <a:spcPct val="138000"/>
-              </a:lnSpc>
-              <a:buNone/>
-            </a:pPr>
-            <a:r>
-              <a:rPr lang="en-US" sz="1000" dirty="0">
-                <a:solidFill>
-                  <a:srgbClr val="6E6B68"/>
-                </a:solidFill>
-                <a:latin typeface="Pretendard" pitchFamily="34" charset="0"/>
-                <a:ea typeface="Pretendard" pitchFamily="34" charset="-122"/>
-                <a:cs typeface="Pretendard" pitchFamily="34" charset="-120"/>
-              </a:rPr>
-              <a:t>쓴 이용권만 정산하니까 손실이 없습니다. 예약이 아니라서 재료를 미리 준비할 필요도 없습니다.</a:t>
-            </a:r>
-            <a:endParaRPr lang="en-US" sz="1000" dirty="0"/>
-          </a:p>
-        </p:txBody>
-      </p:sp>
-      <p:sp>
-        <p:nvSpPr>
-          <p:cNvPr id="9" name="Shape 6"/>
-          <p:cNvSpPr/>
-          <p:nvPr/>
-        </p:nvSpPr>
-        <p:spPr>
-          <a:xfrm>
-            <a:off x="4572000" y="1965960"/>
-            <a:ext cx="3657600" cy="1207008"/>
-          </a:xfrm>
-          <a:prstGeom prst="roundRect">
-            <a:avLst>
-              <a:gd name="adj" fmla="val 10606"/>
-            </a:avLst>
-          </a:prstGeom>
-          <a:solidFill>
-            <a:srgbClr val="FFFFFF"/>
-          </a:solidFill>
-          <a:ln w="12700">
-            <a:solidFill>
-              <a:srgbClr val="FFFFFF"/>
-            </a:solidFill>
-            <a:prstDash val="solid"/>
-          </a:ln>
-          <a:effectLst>
-            <a:outerShdw sx="100000" sy="100000" kx="0" ky="0" algn="bl" rotWithShape="0" blurRad="101600" dist="25400" dir="5400000">
-              <a:srgbClr val="1A2C42">
-                <a:alpha val="7000"/>
-              </a:srgbClr>
-            </a:outerShdw>
-          </a:effectLst>
-        </p:spPr>
-      </p:sp>
-      <p:sp>
-        <p:nvSpPr>
-          <p:cNvPr id="10" name="Text 7"/>
-          <p:cNvSpPr txBox="1"/>
-          <p:nvPr/>
-        </p:nvSpPr>
-        <p:spPr>
-          <a:xfrm>
-            <a:off x="4828032" y="2121408"/>
-            <a:ext cx="3145536" cy="274320"/>
-          </a:xfrm>
-          <a:prstGeom prst="rect">
-            <a:avLst/>
-          </a:prstGeom>
-          <a:noFill/>
-          <a:ln/>
-        </p:spPr>
-        <p:txBody>
-          <a:bodyPr wrap="square" lIns="0" tIns="0" rIns="0" bIns="0" rtlCol="0" anchor="ctr"/>
-          <a:lstStyle/>
-          <a:p>
-            <a:pPr indent="0" marL="0">
-              <a:buNone/>
-            </a:pPr>
-            <a:r>
-              <a:rPr lang="en-US" sz="1200" b="1" spc="-30" kern="0" dirty="0">
-                <a:solidFill>
-                  <a:srgbClr val="16181C"/>
-                </a:solidFill>
-                <a:latin typeface="Pretendard" pitchFamily="34" charset="0"/>
-                <a:ea typeface="Pretendard" pitchFamily="34" charset="-122"/>
-                <a:cs typeface="Pretendard" pitchFamily="34" charset="-120"/>
-              </a:rPr>
-              <a:t>환불해 달라고 하면요?</a:t>
-            </a:r>
-            <a:endParaRPr lang="en-US" sz="1200" dirty="0"/>
-          </a:p>
-        </p:txBody>
-      </p:sp>
-      <p:sp>
-        <p:nvSpPr>
-          <p:cNvPr id="11" name="Text 8"/>
-          <p:cNvSpPr txBox="1"/>
-          <p:nvPr/>
-        </p:nvSpPr>
-        <p:spPr>
-          <a:xfrm>
-            <a:off x="4828032" y="2423160"/>
-            <a:ext cx="3145536" cy="713232"/>
-          </a:xfrm>
-          <a:prstGeom prst="rect">
-            <a:avLst/>
-          </a:prstGeom>
-          <a:noFill/>
-          <a:ln/>
-        </p:spPr>
-        <p:txBody>
-          <a:bodyPr wrap="square" lIns="0" tIns="0" rIns="0" bIns="0" rtlCol="0" anchor="t"/>
-          <a:lstStyle/>
-          <a:p>
-            <a:pPr indent="0" marL="0">
-              <a:lnSpc>
-                <a:spcPct val="138000"/>
-              </a:lnSpc>
-              <a:buNone/>
-            </a:pPr>
-            <a:r>
-              <a:rPr lang="en-US" sz="1000" dirty="0">
-                <a:solidFill>
-                  <a:srgbClr val="6E6B68"/>
-                </a:solidFill>
-                <a:latin typeface="Pretendard" pitchFamily="34" charset="0"/>
-                <a:ea typeface="Pretendard" pitchFamily="34" charset="-122"/>
-                <a:cs typeface="Pretendard" pitchFamily="34" charset="-120"/>
-              </a:rPr>
-              <a:t>환불은 유어딜과 토스가 처리합니다. 사장님은 그 사이에 서지 않습니다. 이미 쓴 이용권은 환불되지 않습니다.</a:t>
-            </a:r>
-            <a:endParaRPr lang="en-US" sz="1000" dirty="0"/>
-          </a:p>
-        </p:txBody>
-      </p:sp>
-      <p:sp>
-        <p:nvSpPr>
-          <p:cNvPr id="12" name="Shape 9"/>
-          <p:cNvSpPr/>
-          <p:nvPr/>
-        </p:nvSpPr>
-        <p:spPr>
-          <a:xfrm>
-            <a:off x="685800" y="3337560"/>
-            <a:ext cx="3657600" cy="1207008"/>
-          </a:xfrm>
-          <a:prstGeom prst="roundRect">
-            <a:avLst>
-              <a:gd name="adj" fmla="val 10606"/>
-            </a:avLst>
-          </a:prstGeom>
-          <a:solidFill>
-            <a:srgbClr val="FFFFFF"/>
-          </a:solidFill>
-          <a:ln w="12700">
-            <a:solidFill>
-              <a:srgbClr val="FFFFFF"/>
-            </a:solidFill>
-            <a:prstDash val="solid"/>
-          </a:ln>
-          <a:effectLst>
-            <a:outerShdw sx="100000" sy="100000" kx="0" ky="0" algn="bl" rotWithShape="0" blurRad="101600" dist="25400" dir="5400000">
-              <a:srgbClr val="1A2C42">
-                <a:alpha val="7000"/>
-              </a:srgbClr>
-            </a:outerShdw>
-          </a:effectLst>
-        </p:spPr>
-      </p:sp>
-      <p:sp>
-        <p:nvSpPr>
-          <p:cNvPr id="13" name="Text 10"/>
-          <p:cNvSpPr txBox="1"/>
-          <p:nvPr/>
-        </p:nvSpPr>
-        <p:spPr>
-          <a:xfrm>
-            <a:off x="941832" y="3493008"/>
-            <a:ext cx="3145536" cy="274320"/>
-          </a:xfrm>
-          <a:prstGeom prst="rect">
-            <a:avLst/>
-          </a:prstGeom>
-          <a:noFill/>
-          <a:ln/>
-        </p:spPr>
-        <p:txBody>
-          <a:bodyPr wrap="square" lIns="0" tIns="0" rIns="0" bIns="0" rtlCol="0" anchor="ctr"/>
-          <a:lstStyle/>
-          <a:p>
-            <a:pPr indent="0" marL="0">
-              <a:buNone/>
-            </a:pPr>
-            <a:r>
-              <a:rPr lang="en-US" sz="1200" b="1" spc="-30" kern="0" dirty="0">
-                <a:solidFill>
-                  <a:srgbClr val="16181C"/>
-                </a:solidFill>
-                <a:latin typeface="Pretendard" pitchFamily="34" charset="0"/>
-                <a:ea typeface="Pretendard" pitchFamily="34" charset="-122"/>
-                <a:cs typeface="Pretendard" pitchFamily="34" charset="-120"/>
-              </a:rPr>
-              <a:t>유효기간 지난 건요?</a:t>
-            </a:r>
-            <a:endParaRPr lang="en-US" sz="1200" dirty="0"/>
-          </a:p>
-        </p:txBody>
-      </p:sp>
-      <p:sp>
-        <p:nvSpPr>
-          <p:cNvPr id="14" name="Text 11"/>
-          <p:cNvSpPr txBox="1"/>
-          <p:nvPr/>
-        </p:nvSpPr>
-        <p:spPr>
-          <a:xfrm>
-            <a:off x="941832" y="3794760"/>
-            <a:ext cx="3145536" cy="713232"/>
-          </a:xfrm>
-          <a:prstGeom prst="rect">
-            <a:avLst/>
-          </a:prstGeom>
-          <a:noFill/>
-          <a:ln/>
-        </p:spPr>
-        <p:txBody>
-          <a:bodyPr wrap="square" lIns="0" tIns="0" rIns="0" bIns="0" rtlCol="0" anchor="t"/>
-          <a:lstStyle/>
-          <a:p>
-            <a:pPr indent="0" marL="0">
-              <a:lnSpc>
-                <a:spcPct val="138000"/>
-              </a:lnSpc>
-              <a:buNone/>
-            </a:pPr>
-            <a:r>
-              <a:rPr lang="en-US" sz="1000" dirty="0">
-                <a:solidFill>
-                  <a:srgbClr val="6E6B68"/>
-                </a:solidFill>
-                <a:latin typeface="Pretendard" pitchFamily="34" charset="0"/>
-                <a:ea typeface="Pretendard" pitchFamily="34" charset="-122"/>
-                <a:cs typeface="Pretendard" pitchFamily="34" charset="-120"/>
-              </a:rPr>
-              <a:t>안 쓴 이용권은 유어딜이 손님에게 100% 환불합니다. 사장님 계좌는 건드리지 않습니다.</a:t>
-            </a:r>
-            <a:endParaRPr lang="en-US" sz="1000" dirty="0"/>
-          </a:p>
-        </p:txBody>
-      </p:sp>
-      <p:sp>
-        <p:nvSpPr>
-          <p:cNvPr id="15" name="Shape 12"/>
-          <p:cNvSpPr/>
-          <p:nvPr/>
-        </p:nvSpPr>
-        <p:spPr>
-          <a:xfrm>
-            <a:off x="4572000" y="3337560"/>
-            <a:ext cx="3657600" cy="1207008"/>
-          </a:xfrm>
-          <a:prstGeom prst="roundRect">
-            <a:avLst>
-              <a:gd name="adj" fmla="val 10606"/>
-            </a:avLst>
-          </a:prstGeom>
-          <a:solidFill>
-            <a:srgbClr val="FFFFFF"/>
-          </a:solidFill>
-          <a:ln w="12700">
-            <a:solidFill>
-              <a:srgbClr val="FFFFFF"/>
-            </a:solidFill>
-            <a:prstDash val="solid"/>
-          </a:ln>
-          <a:effectLst>
-            <a:outerShdw sx="100000" sy="100000" kx="0" ky="0" algn="bl" rotWithShape="0" blurRad="101600" dist="25400" dir="5400000">
-              <a:srgbClr val="1A2C42">
-                <a:alpha val="7000"/>
-              </a:srgbClr>
-            </a:outerShdw>
-          </a:effectLst>
-        </p:spPr>
-      </p:sp>
-      <p:sp>
-        <p:nvSpPr>
-          <p:cNvPr id="16" name="Text 13"/>
-          <p:cNvSpPr txBox="1"/>
-          <p:nvPr/>
-        </p:nvSpPr>
-        <p:spPr>
-          <a:xfrm>
-            <a:off x="4828032" y="3493008"/>
-            <a:ext cx="3145536" cy="274320"/>
-          </a:xfrm>
-          <a:prstGeom prst="rect">
-            <a:avLst/>
-          </a:prstGeom>
-          <a:noFill/>
-          <a:ln/>
-        </p:spPr>
-        <p:txBody>
-          <a:bodyPr wrap="square" lIns="0" tIns="0" rIns="0" bIns="0" rtlCol="0" anchor="ctr"/>
-          <a:lstStyle/>
-          <a:p>
-            <a:pPr indent="0" marL="0">
-              <a:buNone/>
-            </a:pPr>
-            <a:r>
-              <a:rPr lang="en-US" sz="1200" b="1" spc="-30" kern="0" dirty="0">
-                <a:solidFill>
-                  <a:srgbClr val="16181C"/>
-                </a:solidFill>
-                <a:latin typeface="Pretendard" pitchFamily="34" charset="0"/>
-                <a:ea typeface="Pretendard" pitchFamily="34" charset="-122"/>
-                <a:cs typeface="Pretendard" pitchFamily="34" charset="-120"/>
-              </a:rPr>
-              <a:t>한 장으로 두 번 쓰려고 하면요?</a:t>
-            </a:r>
-            <a:endParaRPr lang="en-US" sz="1200" dirty="0"/>
-          </a:p>
-        </p:txBody>
-      </p:sp>
-      <p:sp>
-        <p:nvSpPr>
-          <p:cNvPr id="17" name="Text 14"/>
-          <p:cNvSpPr txBox="1"/>
-          <p:nvPr/>
-        </p:nvSpPr>
-        <p:spPr>
-          <a:xfrm>
-            <a:off x="4828032" y="3794760"/>
-            <a:ext cx="3145536" cy="713232"/>
-          </a:xfrm>
-          <a:prstGeom prst="rect">
-            <a:avLst/>
-          </a:prstGeom>
-          <a:noFill/>
-          <a:ln/>
-        </p:spPr>
-        <p:txBody>
-          <a:bodyPr wrap="square" lIns="0" tIns="0" rIns="0" bIns="0" rtlCol="0" anchor="t"/>
-          <a:lstStyle/>
-          <a:p>
-            <a:pPr indent="0" marL="0">
-              <a:lnSpc>
-                <a:spcPct val="138000"/>
-              </a:lnSpc>
-              <a:buNone/>
-            </a:pPr>
-            <a:r>
-              <a:rPr lang="en-US" sz="1000" dirty="0">
-                <a:solidFill>
-                  <a:srgbClr val="6E6B68"/>
-                </a:solidFill>
-                <a:latin typeface="Pretendard" pitchFamily="34" charset="0"/>
-                <a:ea typeface="Pretendard" pitchFamily="34" charset="-122"/>
-                <a:cs typeface="Pretendard" pitchFamily="34" charset="-120"/>
-              </a:rPr>
-              <a:t>QR 은 한 번 찍히면 끝입니다. 같은 코드가 두 번 통과하지 않습니다. 확인코드는 매장에서만 알려 줍니다.</a:t>
-            </a:r>
-            <a:endParaRPr lang="en-US" sz="1000" dirty="0"/>
-          </a:p>
-        </p:txBody>
-      </p:sp>
-      <p:sp>
-        <p:nvSpPr>
-          <p:cNvPr id="18" name="Shape 15"/>
-          <p:cNvSpPr/>
-          <p:nvPr/>
-        </p:nvSpPr>
-        <p:spPr>
-          <a:xfrm>
-            <a:off x="685800" y="4709160"/>
-            <a:ext cx="3657600" cy="1207008"/>
-          </a:xfrm>
-          <a:prstGeom prst="roundRect">
-            <a:avLst>
-              <a:gd name="adj" fmla="val 10606"/>
-            </a:avLst>
-          </a:prstGeom>
-          <a:solidFill>
-            <a:srgbClr val="FFFFFF"/>
-          </a:solidFill>
-          <a:ln w="12700">
-            <a:solidFill>
-              <a:srgbClr val="FFFFFF"/>
-            </a:solidFill>
-            <a:prstDash val="solid"/>
-          </a:ln>
-          <a:effectLst>
-            <a:outerShdw sx="100000" sy="100000" kx="0" ky="0" algn="bl" rotWithShape="0" blurRad="101600" dist="25400" dir="5400000">
-              <a:srgbClr val="1A2C42">
-                <a:alpha val="7000"/>
-              </a:srgbClr>
-            </a:outerShdw>
-          </a:effectLst>
-        </p:spPr>
-      </p:sp>
-      <p:sp>
-        <p:nvSpPr>
-          <p:cNvPr id="19" name="Text 16"/>
-          <p:cNvSpPr txBox="1"/>
-          <p:nvPr/>
-        </p:nvSpPr>
-        <p:spPr>
-          <a:xfrm>
-            <a:off x="941832" y="4864608"/>
-            <a:ext cx="3145536" cy="274320"/>
-          </a:xfrm>
-          <a:prstGeom prst="rect">
-            <a:avLst/>
-          </a:prstGeom>
-          <a:noFill/>
-          <a:ln/>
-        </p:spPr>
-        <p:txBody>
-          <a:bodyPr wrap="square" lIns="0" tIns="0" rIns="0" bIns="0" rtlCol="0" anchor="ctr"/>
-          <a:lstStyle/>
-          <a:p>
-            <a:pPr indent="0" marL="0">
-              <a:buNone/>
-            </a:pPr>
-            <a:r>
-              <a:rPr lang="en-US" sz="1200" b="1" spc="-30" kern="0" dirty="0">
-                <a:solidFill>
-                  <a:srgbClr val="16181C"/>
-                </a:solidFill>
-                <a:latin typeface="Pretendard" pitchFamily="34" charset="0"/>
-                <a:ea typeface="Pretendard" pitchFamily="34" charset="-122"/>
-                <a:cs typeface="Pretendard" pitchFamily="34" charset="-120"/>
-              </a:rPr>
-              <a:t>배달앱, 네이버예약이랑 같이 써도 되나요?</a:t>
-            </a:r>
-            <a:endParaRPr lang="en-US" sz="1200" dirty="0"/>
-          </a:p>
-        </p:txBody>
-      </p:sp>
-      <p:sp>
-        <p:nvSpPr>
-          <p:cNvPr id="20" name="Text 17"/>
-          <p:cNvSpPr txBox="1"/>
-          <p:nvPr/>
-        </p:nvSpPr>
-        <p:spPr>
-          <a:xfrm>
-            <a:off x="941832" y="5166360"/>
-            <a:ext cx="3145536" cy="713232"/>
-          </a:xfrm>
-          <a:prstGeom prst="rect">
-            <a:avLst/>
-          </a:prstGeom>
-          <a:noFill/>
-          <a:ln/>
-        </p:spPr>
-        <p:txBody>
-          <a:bodyPr wrap="square" lIns="0" tIns="0" rIns="0" bIns="0" rtlCol="0" anchor="t"/>
-          <a:lstStyle/>
-          <a:p>
-            <a:pPr indent="0" marL="0">
-              <a:lnSpc>
-                <a:spcPct val="138000"/>
-              </a:lnSpc>
-              <a:buNone/>
-            </a:pPr>
-            <a:r>
-              <a:rPr lang="en-US" sz="1000" dirty="0">
-                <a:solidFill>
-                  <a:srgbClr val="6E6B68"/>
-                </a:solidFill>
-                <a:latin typeface="Pretendard" pitchFamily="34" charset="0"/>
-                <a:ea typeface="Pretendard" pitchFamily="34" charset="-122"/>
-                <a:cs typeface="Pretendard" pitchFamily="34" charset="-120"/>
-              </a:rPr>
-              <a:t>됩니다. 독점 요구 없고 계약 기간도 없습니다. 이용권 손님은 가게에 직접 오므로 배달 주문과 겹치지 않습니다.</a:t>
-            </a:r>
-            <a:endParaRPr lang="en-US" sz="1000" dirty="0"/>
-          </a:p>
-        </p:txBody>
-      </p:sp>
-      <p:sp>
-        <p:nvSpPr>
-          <p:cNvPr id="21" name="Shape 18"/>
-          <p:cNvSpPr/>
-          <p:nvPr/>
-        </p:nvSpPr>
-        <p:spPr>
-          <a:xfrm>
-            <a:off x="4572000" y="4709160"/>
-            <a:ext cx="3657600" cy="1207008"/>
-          </a:xfrm>
-          <a:prstGeom prst="roundRect">
-            <a:avLst>
-              <a:gd name="adj" fmla="val 10606"/>
-            </a:avLst>
-          </a:prstGeom>
-          <a:solidFill>
-            <a:srgbClr val="FFFFFF"/>
-          </a:solidFill>
-          <a:ln w="12700">
-            <a:solidFill>
-              <a:srgbClr val="FFFFFF"/>
-            </a:solidFill>
-            <a:prstDash val="solid"/>
-          </a:ln>
-          <a:effectLst>
-            <a:outerShdw sx="100000" sy="100000" kx="0" ky="0" algn="bl" rotWithShape="0" blurRad="101600" dist="25400" dir="5400000">
-              <a:srgbClr val="1A2C42">
-                <a:alpha val="7000"/>
-              </a:srgbClr>
-            </a:outerShdw>
-          </a:effectLst>
-        </p:spPr>
-      </p:sp>
-      <p:sp>
-        <p:nvSpPr>
-          <p:cNvPr id="22" name="Text 19"/>
-          <p:cNvSpPr txBox="1"/>
-          <p:nvPr/>
-        </p:nvSpPr>
-        <p:spPr>
-          <a:xfrm>
-            <a:off x="4828032" y="4864608"/>
-            <a:ext cx="3145536" cy="274320"/>
-          </a:xfrm>
-          <a:prstGeom prst="rect">
-            <a:avLst/>
-          </a:prstGeom>
-          <a:noFill/>
-          <a:ln/>
-        </p:spPr>
-        <p:txBody>
-          <a:bodyPr wrap="square" lIns="0" tIns="0" rIns="0" bIns="0" rtlCol="0" anchor="ctr"/>
-          <a:lstStyle/>
-          <a:p>
-            <a:pPr indent="0" marL="0">
-              <a:buNone/>
-            </a:pPr>
-            <a:r>
-              <a:rPr lang="en-US" sz="1200" b="1" spc="-30" kern="0" dirty="0">
-                <a:solidFill>
-                  <a:srgbClr val="16181C"/>
-                </a:solidFill>
-                <a:latin typeface="Pretendard" pitchFamily="34" charset="0"/>
-                <a:ea typeface="Pretendard" pitchFamily="34" charset="-122"/>
-                <a:cs typeface="Pretendard" pitchFamily="34" charset="-120"/>
-              </a:rPr>
-              <a:t>너무 많이 팔리면요?</a:t>
-            </a:r>
-            <a:endParaRPr lang="en-US" sz="1200" dirty="0"/>
-          </a:p>
-        </p:txBody>
-      </p:sp>
-      <p:sp>
-        <p:nvSpPr>
-          <p:cNvPr id="23" name="Text 20"/>
-          <p:cNvSpPr txBox="1"/>
-          <p:nvPr/>
-        </p:nvSpPr>
-        <p:spPr>
-          <a:xfrm>
-            <a:off x="4828032" y="5166360"/>
-            <a:ext cx="3145536" cy="713232"/>
-          </a:xfrm>
-          <a:prstGeom prst="rect">
-            <a:avLst/>
-          </a:prstGeom>
-          <a:noFill/>
-          <a:ln/>
-        </p:spPr>
-        <p:txBody>
-          <a:bodyPr wrap="square" lIns="0" tIns="0" rIns="0" bIns="0" rtlCol="0" anchor="t"/>
-          <a:lstStyle/>
-          <a:p>
-            <a:pPr indent="0" marL="0">
-              <a:lnSpc>
-                <a:spcPct val="138000"/>
-              </a:lnSpc>
-              <a:buNone/>
-            </a:pPr>
-            <a:r>
-              <a:rPr lang="en-US" sz="1000" dirty="0">
-                <a:solidFill>
-                  <a:srgbClr val="6E6B68"/>
-                </a:solidFill>
-                <a:latin typeface="Pretendard" pitchFamily="34" charset="0"/>
-                <a:ea typeface="Pretendard" pitchFamily="34" charset="-122"/>
-                <a:cs typeface="Pretendard" pitchFamily="34" charset="-120"/>
-              </a:rPr>
-              <a:t>수량에 상한을 두면 그만큼만 팔립니다. 손님이 오는 날 쓰는 것이라 한 날에 몰리지도 않습니다.</a:t>
-            </a:r>
-            <a:endParaRPr lang="en-US" sz="1000" dirty="0"/>
-          </a:p>
-        </p:txBody>
+        </p:spPr>
       </p:sp>
       <p:pic>
         <p:nvPicPr>
-          <p:cNvPr id="24" name="Image 1" descr="preencoded.png">    </p:cNvPr>
+          <p:cNvPr id="7" name="Image 1" descr="preencoded.png">    </p:cNvPr>
           <p:cNvPicPr>
             <a:picLocks noChangeAspect="1"/>
           </p:cNvPicPr>
@@ -6841,7 +5725,632 @@
         </p:blipFill>
         <p:spPr>
           <a:xfrm>
-            <a:off x="8626773" y="717213"/>
+            <a:off x="795162" y="2075322"/>
+            <a:ext cx="201900" cy="201900"/>
+          </a:xfrm>
+          <a:prstGeom prst="rect">
+            <a:avLst/>
+          </a:prstGeom>
+        </p:spPr>
+      </p:pic>
+      <p:sp>
+        <p:nvSpPr>
+          <p:cNvPr id="8" name="Text 4"/>
+          <p:cNvSpPr txBox="1"/>
+          <p:nvPr/>
+        </p:nvSpPr>
+        <p:spPr>
+          <a:xfrm>
+            <a:off x="1280160" y="1965960"/>
+            <a:ext cx="7315200" cy="292608"/>
+          </a:xfrm>
+          <a:prstGeom prst="rect">
+            <a:avLst/>
+          </a:prstGeom>
+          <a:noFill/>
+          <a:ln/>
+        </p:spPr>
+        <p:txBody>
+          <a:bodyPr wrap="square" lIns="0" tIns="0" rIns="0" bIns="0" rtlCol="0" anchor="ctr"/>
+          <a:lstStyle/>
+          <a:p>
+            <a:pPr indent="0" marL="0">
+              <a:buNone/>
+            </a:pPr>
+            <a:r>
+              <a:rPr lang="en-US" sz="1400" b="1" spc="-30" kern="0" dirty="0">
+                <a:solidFill>
+                  <a:srgbClr val="16181C"/>
+                </a:solidFill>
+                <a:latin typeface="Pretendard" pitchFamily="34" charset="0"/>
+                <a:ea typeface="Pretendard" pitchFamily="34" charset="-122"/>
+                <a:cs typeface="Pretendard" pitchFamily="34" charset="-120"/>
+              </a:rPr>
+              <a:t>한가한 요일과 시간을 팝니다</a:t>
+            </a:r>
+            <a:endParaRPr lang="en-US" sz="1400" dirty="0"/>
+          </a:p>
+        </p:txBody>
+      </p:sp>
+      <p:sp>
+        <p:nvSpPr>
+          <p:cNvPr id="9" name="Text 5"/>
+          <p:cNvSpPr txBox="1"/>
+          <p:nvPr/>
+        </p:nvSpPr>
+        <p:spPr>
+          <a:xfrm>
+            <a:off x="1280160" y="2276856"/>
+            <a:ext cx="7315200" cy="548640"/>
+          </a:xfrm>
+          <a:prstGeom prst="rect">
+            <a:avLst/>
+          </a:prstGeom>
+          <a:noFill/>
+          <a:ln/>
+        </p:spPr>
+        <p:txBody>
+          <a:bodyPr wrap="square" lIns="0" tIns="0" rIns="0" bIns="0" rtlCol="0" anchor="t"/>
+          <a:lstStyle/>
+          <a:p>
+            <a:pPr indent="0" marL="0">
+              <a:lnSpc>
+                <a:spcPct val="142000"/>
+              </a:lnSpc>
+              <a:buNone/>
+            </a:pPr>
+            <a:r>
+              <a:rPr lang="en-US" sz="1050" dirty="0">
+                <a:solidFill>
+                  <a:srgbClr val="6E6B68"/>
+                </a:solidFill>
+                <a:latin typeface="Pretendard" pitchFamily="34" charset="0"/>
+                <a:ea typeface="Pretendard" pitchFamily="34" charset="-122"/>
+                <a:cs typeface="Pretendard" pitchFamily="34" charset="-120"/>
+              </a:rPr>
+              <a:t>"평일 점심에만 사용 가능" 조건을 걸 수 있습니다. 바쁜 주말 말고 비는 화요일 점심을 할인가로 채우는 겁니다. 빈 테이블은 어차피 0원이니, 할인해서 채우면 전부 더 번 돈입니다.</a:t>
+            </a:r>
+            <a:endParaRPr lang="en-US" sz="1050" dirty="0"/>
+          </a:p>
+        </p:txBody>
+      </p:sp>
+      <p:sp>
+        <p:nvSpPr>
+          <p:cNvPr id="10" name="Shape 6"/>
+          <p:cNvSpPr/>
+          <p:nvPr/>
+        </p:nvSpPr>
+        <p:spPr>
+          <a:xfrm>
+            <a:off x="685800" y="2816352"/>
+            <a:ext cx="420624" cy="420624"/>
+          </a:xfrm>
+          <a:prstGeom prst="ellipse">
+            <a:avLst/>
+          </a:prstGeom>
+          <a:solidFill>
+            <a:srgbClr val="E4EDFD"/>
+          </a:solidFill>
+          <a:ln w="12700">
+            <a:solidFill>
+              <a:srgbClr val="E4EDFD"/>
+            </a:solidFill>
+            <a:prstDash val="solid"/>
+          </a:ln>
+        </p:spPr>
+      </p:sp>
+      <p:pic>
+        <p:nvPicPr>
+          <p:cNvPr id="11" name="Image 2" descr="preencoded.png">    </p:cNvPr>
+          <p:cNvPicPr>
+            <a:picLocks noChangeAspect="1"/>
+          </p:cNvPicPr>
+          <p:nvPr/>
+        </p:nvPicPr>
+        <p:blipFill>
+          <a:blip r:embed="rId3"/>
+          <a:stretch>
+            <a:fillRect/>
+          </a:stretch>
+        </p:blipFill>
+        <p:spPr>
+          <a:xfrm>
+            <a:off x="795162" y="2925714"/>
+            <a:ext cx="201900" cy="201900"/>
+          </a:xfrm>
+          <a:prstGeom prst="rect">
+            <a:avLst/>
+          </a:prstGeom>
+        </p:spPr>
+      </p:pic>
+      <p:sp>
+        <p:nvSpPr>
+          <p:cNvPr id="12" name="Text 7"/>
+          <p:cNvSpPr txBox="1"/>
+          <p:nvPr/>
+        </p:nvSpPr>
+        <p:spPr>
+          <a:xfrm>
+            <a:off x="1280160" y="2816352"/>
+            <a:ext cx="7315200" cy="292608"/>
+          </a:xfrm>
+          <a:prstGeom prst="rect">
+            <a:avLst/>
+          </a:prstGeom>
+          <a:noFill/>
+          <a:ln/>
+        </p:spPr>
+        <p:txBody>
+          <a:bodyPr wrap="square" lIns="0" tIns="0" rIns="0" bIns="0" rtlCol="0" anchor="ctr"/>
+          <a:lstStyle/>
+          <a:p>
+            <a:pPr indent="0" marL="0">
+              <a:buNone/>
+            </a:pPr>
+            <a:r>
+              <a:rPr lang="en-US" sz="1400" b="1" spc="-30" kern="0" dirty="0">
+                <a:solidFill>
+                  <a:srgbClr val="16181C"/>
+                </a:solidFill>
+                <a:latin typeface="Pretendard" pitchFamily="34" charset="0"/>
+                <a:ea typeface="Pretendard" pitchFamily="34" charset="-122"/>
+                <a:cs typeface="Pretendard" pitchFamily="34" charset="-120"/>
+              </a:rPr>
+              <a:t>새 메뉴를 숫자로 테스트합니다</a:t>
+            </a:r>
+            <a:endParaRPr lang="en-US" sz="1400" dirty="0"/>
+          </a:p>
+        </p:txBody>
+      </p:sp>
+      <p:sp>
+        <p:nvSpPr>
+          <p:cNvPr id="13" name="Text 8"/>
+          <p:cNvSpPr txBox="1"/>
+          <p:nvPr/>
+        </p:nvSpPr>
+        <p:spPr>
+          <a:xfrm>
+            <a:off x="1280160" y="3127248"/>
+            <a:ext cx="7315200" cy="548640"/>
+          </a:xfrm>
+          <a:prstGeom prst="rect">
+            <a:avLst/>
+          </a:prstGeom>
+          <a:noFill/>
+          <a:ln/>
+        </p:spPr>
+        <p:txBody>
+          <a:bodyPr wrap="square" lIns="0" tIns="0" rIns="0" bIns="0" rtlCol="0" anchor="t"/>
+          <a:lstStyle/>
+          <a:p>
+            <a:pPr indent="0" marL="0">
+              <a:lnSpc>
+                <a:spcPct val="142000"/>
+              </a:lnSpc>
+              <a:buNone/>
+            </a:pPr>
+            <a:r>
+              <a:rPr lang="en-US" sz="1050" dirty="0">
+                <a:solidFill>
+                  <a:srgbClr val="6E6B68"/>
+                </a:solidFill>
+                <a:latin typeface="Pretendard" pitchFamily="34" charset="0"/>
+                <a:ea typeface="Pretendard" pitchFamily="34" charset="-122"/>
+                <a:cs typeface="Pretendard" pitchFamily="34" charset="-120"/>
+              </a:rPr>
+              <a:t>새 메뉴를 30장 한정으로 올려보세요. 팔리는 속도가 곧 반응입니다.</a:t>
+            </a:r>
+            <a:endParaRPr lang="en-US" sz="1050" dirty="0"/>
+          </a:p>
+        </p:txBody>
+      </p:sp>
+      <p:sp>
+        <p:nvSpPr>
+          <p:cNvPr id="14" name="Shape 9"/>
+          <p:cNvSpPr/>
+          <p:nvPr/>
+        </p:nvSpPr>
+        <p:spPr>
+          <a:xfrm>
+            <a:off x="685800" y="3666744"/>
+            <a:ext cx="420624" cy="420624"/>
+          </a:xfrm>
+          <a:prstGeom prst="ellipse">
+            <a:avLst/>
+          </a:prstGeom>
+          <a:solidFill>
+            <a:srgbClr val="E4EDFD"/>
+          </a:solidFill>
+          <a:ln w="12700">
+            <a:solidFill>
+              <a:srgbClr val="E4EDFD"/>
+            </a:solidFill>
+            <a:prstDash val="solid"/>
+          </a:ln>
+        </p:spPr>
+      </p:sp>
+      <p:pic>
+        <p:nvPicPr>
+          <p:cNvPr id="15" name="Image 3" descr="preencoded.png">    </p:cNvPr>
+          <p:cNvPicPr>
+            <a:picLocks noChangeAspect="1"/>
+          </p:cNvPicPr>
+          <p:nvPr/>
+        </p:nvPicPr>
+        <p:blipFill>
+          <a:blip r:embed="rId4"/>
+          <a:stretch>
+            <a:fillRect/>
+          </a:stretch>
+        </p:blipFill>
+        <p:spPr>
+          <a:xfrm>
+            <a:off x="795162" y="3776106"/>
+            <a:ext cx="201900" cy="201900"/>
+          </a:xfrm>
+          <a:prstGeom prst="rect">
+            <a:avLst/>
+          </a:prstGeom>
+        </p:spPr>
+      </p:pic>
+      <p:sp>
+        <p:nvSpPr>
+          <p:cNvPr id="16" name="Text 10"/>
+          <p:cNvSpPr txBox="1"/>
+          <p:nvPr/>
+        </p:nvSpPr>
+        <p:spPr>
+          <a:xfrm>
+            <a:off x="1280160" y="3666744"/>
+            <a:ext cx="7315200" cy="292608"/>
+          </a:xfrm>
+          <a:prstGeom prst="rect">
+            <a:avLst/>
+          </a:prstGeom>
+          <a:noFill/>
+          <a:ln/>
+        </p:spPr>
+        <p:txBody>
+          <a:bodyPr wrap="square" lIns="0" tIns="0" rIns="0" bIns="0" rtlCol="0" anchor="ctr"/>
+          <a:lstStyle/>
+          <a:p>
+            <a:pPr indent="0" marL="0">
+              <a:buNone/>
+            </a:pPr>
+            <a:r>
+              <a:rPr lang="en-US" sz="1400" b="1" spc="-30" kern="0" dirty="0">
+                <a:solidFill>
+                  <a:srgbClr val="16181C"/>
+                </a:solidFill>
+                <a:latin typeface="Pretendard" pitchFamily="34" charset="0"/>
+                <a:ea typeface="Pretendard" pitchFamily="34" charset="-122"/>
+                <a:cs typeface="Pretendard" pitchFamily="34" charset="-120"/>
+              </a:rPr>
+              <a:t>단골에게 먼저 팝니다</a:t>
+            </a:r>
+            <a:endParaRPr lang="en-US" sz="1400" dirty="0"/>
+          </a:p>
+        </p:txBody>
+      </p:sp>
+      <p:sp>
+        <p:nvSpPr>
+          <p:cNvPr id="17" name="Text 11"/>
+          <p:cNvSpPr txBox="1"/>
+          <p:nvPr/>
+        </p:nvSpPr>
+        <p:spPr>
+          <a:xfrm>
+            <a:off x="1280160" y="3977640"/>
+            <a:ext cx="7315200" cy="548640"/>
+          </a:xfrm>
+          <a:prstGeom prst="rect">
+            <a:avLst/>
+          </a:prstGeom>
+          <a:noFill/>
+          <a:ln/>
+        </p:spPr>
+        <p:txBody>
+          <a:bodyPr wrap="square" lIns="0" tIns="0" rIns="0" bIns="0" rtlCol="0" anchor="t"/>
+          <a:lstStyle/>
+          <a:p>
+            <a:pPr indent="0" marL="0">
+              <a:lnSpc>
+                <a:spcPct val="142000"/>
+              </a:lnSpc>
+              <a:buNone/>
+            </a:pPr>
+            <a:r>
+              <a:rPr lang="en-US" sz="1050" dirty="0">
+                <a:solidFill>
+                  <a:srgbClr val="6E6B68"/>
+                </a:solidFill>
+                <a:latin typeface="Pretendard" pitchFamily="34" charset="0"/>
+                <a:ea typeface="Pretendard" pitchFamily="34" charset="-122"/>
+                <a:cs typeface="Pretendard" pitchFamily="34" charset="-120"/>
+              </a:rPr>
+              <a:t>이용권마다 링크가 생깁니다. 단골 단톡방, 가게 인스타에 올리면 그게 광고비 0원짜리 내 판매 채널입니다.</a:t>
+            </a:r>
+            <a:endParaRPr lang="en-US" sz="1050" dirty="0"/>
+          </a:p>
+        </p:txBody>
+      </p:sp>
+      <p:sp>
+        <p:nvSpPr>
+          <p:cNvPr id="18" name="Shape 12"/>
+          <p:cNvSpPr/>
+          <p:nvPr/>
+        </p:nvSpPr>
+        <p:spPr>
+          <a:xfrm>
+            <a:off x="685800" y="4517136"/>
+            <a:ext cx="420624" cy="420624"/>
+          </a:xfrm>
+          <a:prstGeom prst="ellipse">
+            <a:avLst/>
+          </a:prstGeom>
+          <a:solidFill>
+            <a:srgbClr val="E4EDFD"/>
+          </a:solidFill>
+          <a:ln w="12700">
+            <a:solidFill>
+              <a:srgbClr val="E4EDFD"/>
+            </a:solidFill>
+            <a:prstDash val="solid"/>
+          </a:ln>
+        </p:spPr>
+      </p:sp>
+      <p:pic>
+        <p:nvPicPr>
+          <p:cNvPr id="19" name="Image 4" descr="preencoded.png">    </p:cNvPr>
+          <p:cNvPicPr>
+            <a:picLocks noChangeAspect="1"/>
+          </p:cNvPicPr>
+          <p:nvPr/>
+        </p:nvPicPr>
+        <p:blipFill>
+          <a:blip r:embed="rId5"/>
+          <a:stretch>
+            <a:fillRect/>
+          </a:stretch>
+        </p:blipFill>
+        <p:spPr>
+          <a:xfrm>
+            <a:off x="795162" y="4626498"/>
+            <a:ext cx="201900" cy="201900"/>
+          </a:xfrm>
+          <a:prstGeom prst="rect">
+            <a:avLst/>
+          </a:prstGeom>
+        </p:spPr>
+      </p:pic>
+      <p:sp>
+        <p:nvSpPr>
+          <p:cNvPr id="20" name="Text 13"/>
+          <p:cNvSpPr txBox="1"/>
+          <p:nvPr/>
+        </p:nvSpPr>
+        <p:spPr>
+          <a:xfrm>
+            <a:off x="1280160" y="4517136"/>
+            <a:ext cx="7315200" cy="292608"/>
+          </a:xfrm>
+          <a:prstGeom prst="rect">
+            <a:avLst/>
+          </a:prstGeom>
+          <a:noFill/>
+          <a:ln/>
+        </p:spPr>
+        <p:txBody>
+          <a:bodyPr wrap="square" lIns="0" tIns="0" rIns="0" bIns="0" rtlCol="0" anchor="ctr"/>
+          <a:lstStyle/>
+          <a:p>
+            <a:pPr indent="0" marL="0">
+              <a:buNone/>
+            </a:pPr>
+            <a:r>
+              <a:rPr lang="en-US" sz="1400" b="1" spc="-30" kern="0" dirty="0">
+                <a:solidFill>
+                  <a:srgbClr val="16181C"/>
+                </a:solidFill>
+                <a:latin typeface="Pretendard" pitchFamily="34" charset="0"/>
+                <a:ea typeface="Pretendard" pitchFamily="34" charset="-122"/>
+                <a:cs typeface="Pretendard" pitchFamily="34" charset="-120"/>
+              </a:rPr>
+              <a:t>지나가는 손님도 놓치지 않습니다</a:t>
+            </a:r>
+            <a:endParaRPr lang="en-US" sz="1400" dirty="0"/>
+          </a:p>
+        </p:txBody>
+      </p:sp>
+      <p:sp>
+        <p:nvSpPr>
+          <p:cNvPr id="21" name="Text 14"/>
+          <p:cNvSpPr txBox="1"/>
+          <p:nvPr/>
+        </p:nvSpPr>
+        <p:spPr>
+          <a:xfrm>
+            <a:off x="1280160" y="4828032"/>
+            <a:ext cx="7315200" cy="548640"/>
+          </a:xfrm>
+          <a:prstGeom prst="rect">
+            <a:avLst/>
+          </a:prstGeom>
+          <a:noFill/>
+          <a:ln/>
+        </p:spPr>
+        <p:txBody>
+          <a:bodyPr wrap="square" lIns="0" tIns="0" rIns="0" bIns="0" rtlCol="0" anchor="t"/>
+          <a:lstStyle/>
+          <a:p>
+            <a:pPr indent="0" marL="0">
+              <a:lnSpc>
+                <a:spcPct val="142000"/>
+              </a:lnSpc>
+              <a:buNone/>
+            </a:pPr>
+            <a:r>
+              <a:rPr lang="en-US" sz="1050" dirty="0">
+                <a:solidFill>
+                  <a:srgbClr val="6E6B68"/>
+                </a:solidFill>
+                <a:latin typeface="Pretendard" pitchFamily="34" charset="0"/>
+                <a:ea typeface="Pretendard" pitchFamily="34" charset="-122"/>
+                <a:cs typeface="Pretendard" pitchFamily="34" charset="-120"/>
+              </a:rPr>
+              <a:t>매장 페이지 주소를 QR 로 만들어 테이블과 간판에 붙입니다. "다음에 올게요" 하던 손님이 다음을 미리 결제하고 갑니다.</a:t>
+            </a:r>
+            <a:endParaRPr lang="en-US" sz="1050" dirty="0"/>
+          </a:p>
+        </p:txBody>
+      </p:sp>
+      <p:sp>
+        <p:nvSpPr>
+          <p:cNvPr id="22" name="Shape 15"/>
+          <p:cNvSpPr/>
+          <p:nvPr/>
+        </p:nvSpPr>
+        <p:spPr>
+          <a:xfrm>
+            <a:off x="685800" y="5367528"/>
+            <a:ext cx="420624" cy="420624"/>
+          </a:xfrm>
+          <a:prstGeom prst="ellipse">
+            <a:avLst/>
+          </a:prstGeom>
+          <a:solidFill>
+            <a:srgbClr val="E4EDFD"/>
+          </a:solidFill>
+          <a:ln w="12700">
+            <a:solidFill>
+              <a:srgbClr val="E4EDFD"/>
+            </a:solidFill>
+            <a:prstDash val="solid"/>
+          </a:ln>
+        </p:spPr>
+      </p:sp>
+      <p:pic>
+        <p:nvPicPr>
+          <p:cNvPr id="23" name="Image 5" descr="preencoded.png">    </p:cNvPr>
+          <p:cNvPicPr>
+            <a:picLocks noChangeAspect="1"/>
+          </p:cNvPicPr>
+          <p:nvPr/>
+        </p:nvPicPr>
+        <p:blipFill>
+          <a:blip r:embed="rId6"/>
+          <a:stretch>
+            <a:fillRect/>
+          </a:stretch>
+        </p:blipFill>
+        <p:spPr>
+          <a:xfrm>
+            <a:off x="795162" y="5476890"/>
+            <a:ext cx="201900" cy="201900"/>
+          </a:xfrm>
+          <a:prstGeom prst="rect">
+            <a:avLst/>
+          </a:prstGeom>
+        </p:spPr>
+      </p:pic>
+      <p:sp>
+        <p:nvSpPr>
+          <p:cNvPr id="24" name="Text 16"/>
+          <p:cNvSpPr txBox="1"/>
+          <p:nvPr/>
+        </p:nvSpPr>
+        <p:spPr>
+          <a:xfrm>
+            <a:off x="1280160" y="5367528"/>
+            <a:ext cx="7315200" cy="292608"/>
+          </a:xfrm>
+          <a:prstGeom prst="rect">
+            <a:avLst/>
+          </a:prstGeom>
+          <a:noFill/>
+          <a:ln/>
+        </p:spPr>
+        <p:txBody>
+          <a:bodyPr wrap="square" lIns="0" tIns="0" rIns="0" bIns="0" rtlCol="0" anchor="ctr"/>
+          <a:lstStyle/>
+          <a:p>
+            <a:pPr indent="0" marL="0">
+              <a:buNone/>
+            </a:pPr>
+            <a:r>
+              <a:rPr lang="en-US" sz="1400" b="1" spc="-30" kern="0" dirty="0">
+                <a:solidFill>
+                  <a:srgbClr val="16181C"/>
+                </a:solidFill>
+                <a:latin typeface="Pretendard" pitchFamily="34" charset="0"/>
+                <a:ea typeface="Pretendard" pitchFamily="34" charset="-122"/>
+                <a:cs typeface="Pretendard" pitchFamily="34" charset="-120"/>
+              </a:rPr>
+              <a:t>후기는 저절로 쌓입니다</a:t>
+            </a:r>
+            <a:endParaRPr lang="en-US" sz="1400" dirty="0"/>
+          </a:p>
+        </p:txBody>
+      </p:sp>
+      <p:sp>
+        <p:nvSpPr>
+          <p:cNvPr id="25" name="Text 17"/>
+          <p:cNvSpPr txBox="1"/>
+          <p:nvPr/>
+        </p:nvSpPr>
+        <p:spPr>
+          <a:xfrm>
+            <a:off x="1280160" y="5678424"/>
+            <a:ext cx="7315200" cy="548640"/>
+          </a:xfrm>
+          <a:prstGeom prst="rect">
+            <a:avLst/>
+          </a:prstGeom>
+          <a:noFill/>
+          <a:ln/>
+        </p:spPr>
+        <p:txBody>
+          <a:bodyPr wrap="square" lIns="0" tIns="0" rIns="0" bIns="0" rtlCol="0" anchor="t"/>
+          <a:lstStyle/>
+          <a:p>
+            <a:pPr indent="0" marL="0">
+              <a:lnSpc>
+                <a:spcPct val="142000"/>
+              </a:lnSpc>
+              <a:buNone/>
+            </a:pPr>
+            <a:r>
+              <a:rPr lang="en-US" sz="1050" dirty="0">
+                <a:solidFill>
+                  <a:srgbClr val="6E6B68"/>
+                </a:solidFill>
+                <a:latin typeface="Pretendard" pitchFamily="34" charset="0"/>
+                <a:ea typeface="Pretendard" pitchFamily="34" charset="-122"/>
+                <a:cs typeface="Pretendard" pitchFamily="34" charset="-120"/>
+              </a:rPr>
+              <a:t>첫 후기 손님에게 유어딜이 포인트를 드립니다. 사장님 돈이 아닙니다.</a:t>
+            </a:r>
+            <a:endParaRPr lang="en-US" sz="1050" dirty="0"/>
+          </a:p>
+        </p:txBody>
+      </p:sp>
+      <p:pic>
+        <p:nvPicPr>
+          <p:cNvPr id="26" name="Image 6" descr="preencoded.png">    </p:cNvPr>
+          <p:cNvPicPr>
+            <a:picLocks noChangeAspect="1"/>
+          </p:cNvPicPr>
+          <p:nvPr/>
+        </p:nvPicPr>
+        <p:blipFill>
+          <a:blip r:embed="rId7"/>
+          <a:stretch>
+            <a:fillRect/>
+          </a:stretch>
+        </p:blipFill>
+        <p:spPr>
+          <a:xfrm>
+            <a:off x="8901093" y="717213"/>
             <a:ext cx="2813205" cy="5377855"/>
           </a:xfrm>
           <a:prstGeom prst="rect">
@@ -6851,13 +6360,13 @@
       </p:pic>
       <p:sp>
         <p:nvSpPr>
-          <p:cNvPr id="25" name="Text 21"/>
-          <p:cNvSpPr txBox="1"/>
-          <p:nvPr/>
-        </p:nvSpPr>
-        <p:spPr>
-          <a:xfrm>
-            <a:off x="8503920" y="5998464"/>
+          <p:cNvPr id="27" name="Text 18"/>
+          <p:cNvSpPr txBox="1"/>
+          <p:nvPr/>
+        </p:nvSpPr>
+        <p:spPr>
+          <a:xfrm>
+            <a:off x="8778240" y="5998464"/>
             <a:ext cx="3058911" cy="274320"/>
           </a:xfrm>
           <a:prstGeom prst="rect">
@@ -6882,7 +6391,7 @@
                 <a:ea typeface="Pretendard" pitchFamily="34" charset="-122"/>
                 <a:cs typeface="Pretendard" pitchFamily="34" charset="-120"/>
               </a:rPr>
-              <a:t>손님이 보는 사용 안내와 환불 조건 (라이브 화면)</a:t>
+              <a:t>손님이 보는 이용권 (라이브 화면)</a:t>
             </a:r>
             <a:endParaRPr lang="en-US" sz="1050" dirty="0"/>
           </a:p>
@@ -7058,7 +6567,7 @@
                 <a:ea typeface="Pretendard" pitchFamily="34" charset="-122"/>
                 <a:cs typeface="Pretendard" pitchFamily="34" charset="-120"/>
               </a:rPr>
-              <a:t>등록은 10분. 막히면 저희가 대신 해드립니다.</a:t>
+              <a:t>자주 묻는 질문</a:t>
             </a:r>
             <a:endParaRPr lang="en-US" sz="2700" dirty="0"/>
           </a:p>
@@ -7066,70 +6575,76 @@
       </p:sp>
       <p:sp>
         <p:nvSpPr>
-          <p:cNvPr id="6" name="Text 3"/>
-          <p:cNvSpPr txBox="1"/>
-          <p:nvPr/>
-        </p:nvSpPr>
-        <p:spPr>
-          <a:xfrm>
-            <a:off x="685800" y="1828800"/>
-            <a:ext cx="5486400" cy="365760"/>
-          </a:xfrm>
-          <a:prstGeom prst="rect">
-            <a:avLst/>
-          </a:prstGeom>
-          <a:noFill/>
-          <a:ln/>
-        </p:spPr>
-        <p:txBody>
-          <a:bodyPr wrap="square" lIns="0" tIns="0" rIns="0" bIns="0" rtlCol="0" anchor="t"/>
-          <a:lstStyle/>
-          <a:p>
-            <a:pPr indent="0" marL="0">
-              <a:lnSpc>
-                <a:spcPct val="150000"/>
-              </a:lnSpc>
-              <a:buNone/>
-            </a:pPr>
-            <a:r>
-              <a:rPr lang="en-US" sz="1250" dirty="0">
-                <a:solidFill>
-                  <a:srgbClr val="6E6B68"/>
-                </a:solidFill>
-                <a:latin typeface="Pretendard" pitchFamily="34" charset="0"/>
-                <a:ea typeface="Pretendard" pitchFamily="34" charset="-122"/>
-                <a:cs typeface="Pretendard" pitchFamily="34" charset="-120"/>
-              </a:rPr>
-              <a:t>이게 전부입니다. 포스 연동도, 단말기도, 직원 교육도 필요 없습니다.</a:t>
-            </a:r>
-            <a:endParaRPr lang="en-US" sz="1250" dirty="0"/>
-          </a:p>
-        </p:txBody>
-      </p:sp>
-      <p:sp>
-        <p:nvSpPr>
-          <p:cNvPr id="7" name="Shape 4"/>
+          <p:cNvPr id="6" name="Shape 3"/>
           <p:cNvSpPr/>
           <p:nvPr/>
         </p:nvSpPr>
         <p:spPr>
           <a:xfrm>
-            <a:off x="685800" y="2487168"/>
-            <a:ext cx="347472" cy="347472"/>
-          </a:xfrm>
-          <a:prstGeom prst="ellipse">
-            <a:avLst/>
+            <a:off x="685800" y="1965960"/>
+            <a:ext cx="3657600" cy="1143000"/>
+          </a:xfrm>
+          <a:prstGeom prst="roundRect">
+            <a:avLst>
+              <a:gd name="adj" fmla="val 11200"/>
+            </a:avLst>
           </a:prstGeom>
           <a:solidFill>
-            <a:srgbClr val="1C69EF"/>
+            <a:srgbClr val="FFFFFF"/>
           </a:solidFill>
-          <a:ln w="15875">
+          <a:ln w="12700">
             <a:solidFill>
-              <a:srgbClr val="1C69EF"/>
+              <a:srgbClr val="FFFFFF"/>
             </a:solidFill>
             <a:prstDash val="solid"/>
           </a:ln>
-        </p:spPr>
+          <a:effectLst>
+            <a:outerShdw sx="100000" sy="100000" kx="0" ky="0" algn="bl" rotWithShape="0" blurRad="101600" dist="25400" dir="5400000">
+              <a:srgbClr val="1A2C42">
+                <a:alpha val="7000"/>
+              </a:srgbClr>
+            </a:outerShdw>
+          </a:effectLst>
+        </p:spPr>
+      </p:sp>
+      <p:sp>
+        <p:nvSpPr>
+          <p:cNvPr id="7" name="Text 4"/>
+          <p:cNvSpPr txBox="1"/>
+          <p:nvPr/>
+        </p:nvSpPr>
+        <p:spPr>
+          <a:xfrm>
+            <a:off x="941832" y="2130552"/>
+            <a:ext cx="3145536" cy="274320"/>
+          </a:xfrm>
+          <a:prstGeom prst="rect">
+            <a:avLst/>
+          </a:prstGeom>
+          <a:noFill/>
+          <a:ln/>
+        </p:spPr>
+        <p:txBody>
+          <a:bodyPr wrap="square" lIns="0" tIns="0" rIns="0" bIns="0" rtlCol="0" anchor="ctr"/>
+          <a:lstStyle/>
+          <a:p>
+            <a:pPr indent="0" marL="0">
+              <a:buNone/>
+            </a:pPr>
+            <a:r>
+              <a:rPr lang="en-US" sz="1250" b="1" spc="-30" kern="0" dirty="0">
+                <a:solidFill>
+                  <a:srgbClr val="16181C"/>
+                </a:solidFill>
+                <a:latin typeface="Pretendard" pitchFamily="34" charset="0"/>
+                <a:ea typeface="Pretendard" pitchFamily="34" charset="-122"/>
+                <a:cs typeface="Pretendard" pitchFamily="34" charset="-120"/>
+              </a:rPr>
+              <a:t>손님이 안 오면요?</a:t>
+            </a:r>
+            <a:endParaRPr lang="en-US" sz="1250" dirty="0"/>
+          </a:p>
+        </p:txBody>
       </p:sp>
       <p:sp>
         <p:nvSpPr>
@@ -7139,86 +6654,8 @@
         </p:nvSpPr>
         <p:spPr>
           <a:xfrm>
-            <a:off x="685800" y="2487168"/>
-            <a:ext cx="347472" cy="347472"/>
-          </a:xfrm>
-          <a:prstGeom prst="rect">
-            <a:avLst/>
-          </a:prstGeom>
-          <a:noFill/>
-          <a:ln/>
-        </p:spPr>
-        <p:txBody>
-          <a:bodyPr wrap="square" lIns="0" tIns="0" rIns="0" bIns="0" rtlCol="0" anchor="ctr"/>
-          <a:lstStyle/>
-          <a:p>
-            <a:pPr algn="ctr" indent="0" marL="0">
-              <a:buNone/>
-            </a:pPr>
-            <a:r>
-              <a:rPr lang="en-US" sz="1150" b="1" dirty="0">
-                <a:solidFill>
-                  <a:srgbClr val="FFFFFF"/>
-                </a:solidFill>
-                <a:latin typeface="Pretendard" pitchFamily="34" charset="0"/>
-                <a:ea typeface="Pretendard" pitchFamily="34" charset="-122"/>
-                <a:cs typeface="Pretendard" pitchFamily="34" charset="-120"/>
-              </a:rPr>
-              <a:t>1</a:t>
-            </a:r>
-            <a:endParaRPr lang="en-US" sz="1150" dirty="0"/>
-          </a:p>
-        </p:txBody>
-      </p:sp>
-      <p:sp>
-        <p:nvSpPr>
-          <p:cNvPr id="9" name="Text 6"/>
-          <p:cNvSpPr txBox="1"/>
-          <p:nvPr/>
-        </p:nvSpPr>
-        <p:spPr>
-          <a:xfrm>
-            <a:off x="1188720" y="2468880"/>
-            <a:ext cx="4937760" cy="292608"/>
-          </a:xfrm>
-          <a:prstGeom prst="rect">
-            <a:avLst/>
-          </a:prstGeom>
-          <a:noFill/>
-          <a:ln/>
-        </p:spPr>
-        <p:txBody>
-          <a:bodyPr wrap="square" lIns="0" tIns="0" rIns="0" bIns="0" rtlCol="0" anchor="ctr"/>
-          <a:lstStyle/>
-          <a:p>
-            <a:pPr indent="0" marL="0">
-              <a:buNone/>
-            </a:pPr>
-            <a:r>
-              <a:rPr lang="en-US" sz="1350" b="1" spc="-30" kern="0" dirty="0">
-                <a:solidFill>
-                  <a:srgbClr val="16181C"/>
-                </a:solidFill>
-                <a:latin typeface="Pretendard" pitchFamily="34" charset="0"/>
-                <a:ea typeface="Pretendard" pitchFamily="34" charset="-122"/>
-                <a:cs typeface="Pretendard" pitchFamily="34" charset="-120"/>
-              </a:rPr>
-              <a:t>urdeal.kr 에서 카카오 로그인</a:t>
-            </a:r>
-            <a:endParaRPr lang="en-US" sz="1350" dirty="0"/>
-          </a:p>
-        </p:txBody>
-      </p:sp>
-      <p:sp>
-        <p:nvSpPr>
-          <p:cNvPr id="10" name="Text 7"/>
-          <p:cNvSpPr txBox="1"/>
-          <p:nvPr/>
-        </p:nvSpPr>
-        <p:spPr>
-          <a:xfrm>
-            <a:off x="1188720" y="2779776"/>
-            <a:ext cx="4937760" cy="457200"/>
+            <a:off x="941832" y="2441448"/>
+            <a:ext cx="3145536" cy="621792"/>
           </a:xfrm>
           <a:prstGeom prst="rect">
             <a:avLst/>
@@ -7245,7 +6682,7 @@
                 <a:ea typeface="Pretendard" pitchFamily="34" charset="-122"/>
                 <a:cs typeface="Pretendard" pitchFamily="34" charset="-120"/>
               </a:rPr>
-              <a:t>별도 가입이 없습니다.</a:t>
+              <a:t>쓴 이용권만 정산하니까 손실이 없습니다. 예약이 아니라 재료를 미리 준비할 필요도 없습니다.</a:t>
             </a:r>
             <a:endParaRPr lang="en-US" sz="1050" dirty="0"/>
           </a:p>
@@ -7253,94 +6690,64 @@
       </p:sp>
       <p:sp>
         <p:nvSpPr>
-          <p:cNvPr id="11" name="Shape 8"/>
+          <p:cNvPr id="9" name="Shape 6"/>
           <p:cNvSpPr/>
           <p:nvPr/>
         </p:nvSpPr>
         <p:spPr>
           <a:xfrm>
-            <a:off x="685800" y="3236976"/>
-            <a:ext cx="347472" cy="347472"/>
-          </a:xfrm>
-          <a:prstGeom prst="ellipse">
-            <a:avLst/>
+            <a:off x="4572000" y="1965960"/>
+            <a:ext cx="3657600" cy="1143000"/>
+          </a:xfrm>
+          <a:prstGeom prst="roundRect">
+            <a:avLst>
+              <a:gd name="adj" fmla="val 11200"/>
+            </a:avLst>
           </a:prstGeom>
           <a:solidFill>
-            <a:srgbClr val="1C69EF"/>
+            <a:srgbClr val="FFFFFF"/>
           </a:solidFill>
-          <a:ln w="15875">
+          <a:ln w="12700">
             <a:solidFill>
-              <a:srgbClr val="1C69EF"/>
+              <a:srgbClr val="FFFFFF"/>
             </a:solidFill>
             <a:prstDash val="solid"/>
           </a:ln>
-        </p:spPr>
-      </p:sp>
-      <p:sp>
-        <p:nvSpPr>
-          <p:cNvPr id="12" name="Text 9"/>
-          <p:cNvSpPr txBox="1"/>
-          <p:nvPr/>
-        </p:nvSpPr>
-        <p:spPr>
-          <a:xfrm>
-            <a:off x="685800" y="3236976"/>
-            <a:ext cx="347472" cy="347472"/>
-          </a:xfrm>
-          <a:prstGeom prst="rect">
-            <a:avLst/>
-          </a:prstGeom>
-          <a:noFill/>
-          <a:ln/>
-        </p:spPr>
-        <p:txBody>
-          <a:bodyPr wrap="square" lIns="0" tIns="0" rIns="0" bIns="0" rtlCol="0" anchor="ctr"/>
-          <a:lstStyle/>
-          <a:p>
-            <a:pPr algn="ctr" indent="0" marL="0">
-              <a:buNone/>
-            </a:pPr>
-            <a:r>
-              <a:rPr lang="en-US" sz="1150" b="1" dirty="0">
-                <a:solidFill>
-                  <a:srgbClr val="FFFFFF"/>
-                </a:solidFill>
-                <a:latin typeface="Pretendard" pitchFamily="34" charset="0"/>
-                <a:ea typeface="Pretendard" pitchFamily="34" charset="-122"/>
-                <a:cs typeface="Pretendard" pitchFamily="34" charset="-120"/>
-              </a:rPr>
-              <a:t>2</a:t>
-            </a:r>
-            <a:endParaRPr lang="en-US" sz="1150" dirty="0"/>
-          </a:p>
-        </p:txBody>
-      </p:sp>
-      <p:sp>
-        <p:nvSpPr>
-          <p:cNvPr id="13" name="Text 10"/>
-          <p:cNvSpPr txBox="1"/>
-          <p:nvPr/>
-        </p:nvSpPr>
-        <p:spPr>
-          <a:xfrm>
-            <a:off x="1188720" y="3218688"/>
-            <a:ext cx="4937760" cy="292608"/>
-          </a:xfrm>
-          <a:prstGeom prst="rect">
-            <a:avLst/>
-          </a:prstGeom>
-          <a:noFill/>
-          <a:ln/>
-        </p:spPr>
-        <p:txBody>
-          <a:bodyPr wrap="square" lIns="0" tIns="0" rIns="0" bIns="0" rtlCol="0" anchor="ctr"/>
-          <a:lstStyle/>
-          <a:p>
-            <a:pPr indent="0" marL="0">
-              <a:buNone/>
-            </a:pPr>
-            <a:r>
-              <a:rPr lang="en-US" sz="1350" b="1" spc="-30" kern="0" dirty="0">
+          <a:effectLst>
+            <a:outerShdw sx="100000" sy="100000" kx="0" ky="0" algn="bl" rotWithShape="0" blurRad="101600" dist="25400" dir="5400000">
+              <a:srgbClr val="1A2C42">
+                <a:alpha val="7000"/>
+              </a:srgbClr>
+            </a:outerShdw>
+          </a:effectLst>
+        </p:spPr>
+      </p:sp>
+      <p:sp>
+        <p:nvSpPr>
+          <p:cNvPr id="10" name="Text 7"/>
+          <p:cNvSpPr txBox="1"/>
+          <p:nvPr/>
+        </p:nvSpPr>
+        <p:spPr>
+          <a:xfrm>
+            <a:off x="4828032" y="2130552"/>
+            <a:ext cx="3145536" cy="274320"/>
+          </a:xfrm>
+          <a:prstGeom prst="rect">
+            <a:avLst/>
+          </a:prstGeom>
+          <a:noFill/>
+          <a:ln/>
+        </p:spPr>
+        <p:txBody>
+          <a:bodyPr wrap="square" lIns="0" tIns="0" rIns="0" bIns="0" rtlCol="0" anchor="ctr"/>
+          <a:lstStyle/>
+          <a:p>
+            <a:pPr indent="0" marL="0">
+              <a:buNone/>
+            </a:pPr>
+            <a:r>
+              <a:rPr lang="en-US" sz="1250" b="1" spc="-30" kern="0" dirty="0">
                 <a:solidFill>
                   <a:srgbClr val="16181C"/>
                 </a:solidFill>
@@ -7348,22 +6755,22 @@
                 <a:ea typeface="Pretendard" pitchFamily="34" charset="-122"/>
                 <a:cs typeface="Pretendard" pitchFamily="34" charset="-120"/>
               </a:rPr>
-              <a:t>카카오맵에서 내 가게 찾기</a:t>
-            </a:r>
-            <a:endParaRPr lang="en-US" sz="1350" dirty="0"/>
-          </a:p>
-        </p:txBody>
-      </p:sp>
-      <p:sp>
-        <p:nvSpPr>
-          <p:cNvPr id="14" name="Text 11"/>
-          <p:cNvSpPr txBox="1"/>
-          <p:nvPr/>
-        </p:nvSpPr>
-        <p:spPr>
-          <a:xfrm>
-            <a:off x="1188720" y="3529584"/>
-            <a:ext cx="4937760" cy="457200"/>
+              <a:t>환불해 달라고 하면요?</a:t>
+            </a:r>
+            <a:endParaRPr lang="en-US" sz="1250" dirty="0"/>
+          </a:p>
+        </p:txBody>
+      </p:sp>
+      <p:sp>
+        <p:nvSpPr>
+          <p:cNvPr id="11" name="Text 8"/>
+          <p:cNvSpPr txBox="1"/>
+          <p:nvPr/>
+        </p:nvSpPr>
+        <p:spPr>
+          <a:xfrm>
+            <a:off x="4828032" y="2441448"/>
+            <a:ext cx="3145536" cy="621792"/>
           </a:xfrm>
           <a:prstGeom prst="rect">
             <a:avLst/>
@@ -7390,7 +6797,7 @@
                 <a:ea typeface="Pretendard" pitchFamily="34" charset="-122"/>
                 <a:cs typeface="Pretendard" pitchFamily="34" charset="-120"/>
               </a:rPr>
-              <a:t>주소와 전화번호가 자동으로 채워집니다.</a:t>
+              <a:t>환불은 유어딜과 토스가 처리합니다. 사장님은 그 사이에 서지 않습니다.</a:t>
             </a:r>
             <a:endParaRPr lang="en-US" sz="1050" dirty="0"/>
           </a:p>
@@ -7398,94 +6805,64 @@
       </p:sp>
       <p:sp>
         <p:nvSpPr>
-          <p:cNvPr id="15" name="Shape 12"/>
+          <p:cNvPr id="12" name="Shape 9"/>
           <p:cNvSpPr/>
           <p:nvPr/>
         </p:nvSpPr>
         <p:spPr>
           <a:xfrm>
-            <a:off x="685800" y="3986784"/>
-            <a:ext cx="347472" cy="347472"/>
-          </a:xfrm>
-          <a:prstGeom prst="ellipse">
-            <a:avLst/>
+            <a:off x="685800" y="3291840"/>
+            <a:ext cx="3657600" cy="1143000"/>
+          </a:xfrm>
+          <a:prstGeom prst="roundRect">
+            <a:avLst>
+              <a:gd name="adj" fmla="val 11200"/>
+            </a:avLst>
           </a:prstGeom>
           <a:solidFill>
-            <a:srgbClr val="1C69EF"/>
+            <a:srgbClr val="FFFFFF"/>
           </a:solidFill>
-          <a:ln w="15875">
+          <a:ln w="12700">
             <a:solidFill>
-              <a:srgbClr val="1C69EF"/>
+              <a:srgbClr val="FFFFFF"/>
             </a:solidFill>
             <a:prstDash val="solid"/>
           </a:ln>
-        </p:spPr>
-      </p:sp>
-      <p:sp>
-        <p:nvSpPr>
-          <p:cNvPr id="16" name="Text 13"/>
-          <p:cNvSpPr txBox="1"/>
-          <p:nvPr/>
-        </p:nvSpPr>
-        <p:spPr>
-          <a:xfrm>
-            <a:off x="685800" y="3986784"/>
-            <a:ext cx="347472" cy="347472"/>
-          </a:xfrm>
-          <a:prstGeom prst="rect">
-            <a:avLst/>
-          </a:prstGeom>
-          <a:noFill/>
-          <a:ln/>
-        </p:spPr>
-        <p:txBody>
-          <a:bodyPr wrap="square" lIns="0" tIns="0" rIns="0" bIns="0" rtlCol="0" anchor="ctr"/>
-          <a:lstStyle/>
-          <a:p>
-            <a:pPr algn="ctr" indent="0" marL="0">
-              <a:buNone/>
-            </a:pPr>
-            <a:r>
-              <a:rPr lang="en-US" sz="1150" b="1" dirty="0">
-                <a:solidFill>
-                  <a:srgbClr val="FFFFFF"/>
-                </a:solidFill>
-                <a:latin typeface="Pretendard" pitchFamily="34" charset="0"/>
-                <a:ea typeface="Pretendard" pitchFamily="34" charset="-122"/>
-                <a:cs typeface="Pretendard" pitchFamily="34" charset="-120"/>
-              </a:rPr>
-              <a:t>3</a:t>
-            </a:r>
-            <a:endParaRPr lang="en-US" sz="1150" dirty="0"/>
-          </a:p>
-        </p:txBody>
-      </p:sp>
-      <p:sp>
-        <p:nvSpPr>
-          <p:cNvPr id="17" name="Text 14"/>
-          <p:cNvSpPr txBox="1"/>
-          <p:nvPr/>
-        </p:nvSpPr>
-        <p:spPr>
-          <a:xfrm>
-            <a:off x="1188720" y="3968496"/>
-            <a:ext cx="4937760" cy="292608"/>
-          </a:xfrm>
-          <a:prstGeom prst="rect">
-            <a:avLst/>
-          </a:prstGeom>
-          <a:noFill/>
-          <a:ln/>
-        </p:spPr>
-        <p:txBody>
-          <a:bodyPr wrap="square" lIns="0" tIns="0" rIns="0" bIns="0" rtlCol="0" anchor="ctr"/>
-          <a:lstStyle/>
-          <a:p>
-            <a:pPr indent="0" marL="0">
-              <a:buNone/>
-            </a:pPr>
-            <a:r>
-              <a:rPr lang="en-US" sz="1350" b="1" spc="-30" kern="0" dirty="0">
+          <a:effectLst>
+            <a:outerShdw sx="100000" sy="100000" kx="0" ky="0" algn="bl" rotWithShape="0" blurRad="101600" dist="25400" dir="5400000">
+              <a:srgbClr val="1A2C42">
+                <a:alpha val="7000"/>
+              </a:srgbClr>
+            </a:outerShdw>
+          </a:effectLst>
+        </p:spPr>
+      </p:sp>
+      <p:sp>
+        <p:nvSpPr>
+          <p:cNvPr id="13" name="Text 10"/>
+          <p:cNvSpPr txBox="1"/>
+          <p:nvPr/>
+        </p:nvSpPr>
+        <p:spPr>
+          <a:xfrm>
+            <a:off x="941832" y="3456432"/>
+            <a:ext cx="3145536" cy="274320"/>
+          </a:xfrm>
+          <a:prstGeom prst="rect">
+            <a:avLst/>
+          </a:prstGeom>
+          <a:noFill/>
+          <a:ln/>
+        </p:spPr>
+        <p:txBody>
+          <a:bodyPr wrap="square" lIns="0" tIns="0" rIns="0" bIns="0" rtlCol="0" anchor="ctr"/>
+          <a:lstStyle/>
+          <a:p>
+            <a:pPr indent="0" marL="0">
+              <a:buNone/>
+            </a:pPr>
+            <a:r>
+              <a:rPr lang="en-US" sz="1250" b="1" spc="-30" kern="0" dirty="0">
                 <a:solidFill>
                   <a:srgbClr val="16181C"/>
                 </a:solidFill>
@@ -7493,22 +6870,22 @@
                 <a:ea typeface="Pretendard" pitchFamily="34" charset="-122"/>
                 <a:cs typeface="Pretendard" pitchFamily="34" charset="-120"/>
               </a:rPr>
-              <a:t>사업자등록증 사진 한 장</a:t>
-            </a:r>
-            <a:endParaRPr lang="en-US" sz="1350" dirty="0"/>
-          </a:p>
-        </p:txBody>
-      </p:sp>
-      <p:sp>
-        <p:nvSpPr>
-          <p:cNvPr id="18" name="Text 15"/>
-          <p:cNvSpPr txBox="1"/>
-          <p:nvPr/>
-        </p:nvSpPr>
-        <p:spPr>
-          <a:xfrm>
-            <a:off x="1188720" y="4279392"/>
-            <a:ext cx="4937760" cy="457200"/>
+              <a:t>유효기간 지난 건요?</a:t>
+            </a:r>
+            <a:endParaRPr lang="en-US" sz="1250" dirty="0"/>
+          </a:p>
+        </p:txBody>
+      </p:sp>
+      <p:sp>
+        <p:nvSpPr>
+          <p:cNvPr id="14" name="Text 11"/>
+          <p:cNvSpPr txBox="1"/>
+          <p:nvPr/>
+        </p:nvSpPr>
+        <p:spPr>
+          <a:xfrm>
+            <a:off x="941832" y="3767328"/>
+            <a:ext cx="3145536" cy="621792"/>
           </a:xfrm>
           <a:prstGeom prst="rect">
             <a:avLst/>
@@ -7535,7 +6912,7 @@
                 <a:ea typeface="Pretendard" pitchFamily="34" charset="-122"/>
                 <a:cs typeface="Pretendard" pitchFamily="34" charset="-120"/>
               </a:rPr>
-              <a:t>유어딜이 직접 확인하고 승인 문자를 드립니다. 그날부터 판매가 시작됩니다.</a:t>
+              <a:t>안 쓴 이용권은 유어딜이 손님에게 100% 환불합니다.</a:t>
             </a:r>
             <a:endParaRPr lang="en-US" sz="1050" dirty="0"/>
           </a:p>
@@ -7543,41 +6920,48 @@
       </p:sp>
       <p:sp>
         <p:nvSpPr>
-          <p:cNvPr id="19" name="Shape 16"/>
+          <p:cNvPr id="15" name="Shape 12"/>
           <p:cNvSpPr/>
           <p:nvPr/>
         </p:nvSpPr>
         <p:spPr>
           <a:xfrm>
-            <a:off x="685800" y="4809744"/>
-            <a:ext cx="5440680" cy="1417320"/>
+            <a:off x="4572000" y="3291840"/>
+            <a:ext cx="3657600" cy="1143000"/>
           </a:xfrm>
           <a:prstGeom prst="roundRect">
             <a:avLst>
-              <a:gd name="adj" fmla="val 9032"/>
+              <a:gd name="adj" fmla="val 11200"/>
             </a:avLst>
           </a:prstGeom>
           <a:solidFill>
-            <a:srgbClr val="EEF3FE"/>
+            <a:srgbClr val="FFFFFF"/>
           </a:solidFill>
           <a:ln w="12700">
             <a:solidFill>
-              <a:srgbClr val="EEF3FE"/>
+              <a:srgbClr val="FFFFFF"/>
             </a:solidFill>
             <a:prstDash val="solid"/>
           </a:ln>
-        </p:spPr>
-      </p:sp>
-      <p:sp>
-        <p:nvSpPr>
-          <p:cNvPr id="20" name="Text 17"/>
-          <p:cNvSpPr txBox="1"/>
-          <p:nvPr/>
-        </p:nvSpPr>
-        <p:spPr>
-          <a:xfrm>
-            <a:off x="960120" y="4946904"/>
-            <a:ext cx="4892040" cy="274320"/>
+          <a:effectLst>
+            <a:outerShdw sx="100000" sy="100000" kx="0" ky="0" algn="bl" rotWithShape="0" blurRad="101600" dist="25400" dir="5400000">
+              <a:srgbClr val="1A2C42">
+                <a:alpha val="7000"/>
+              </a:srgbClr>
+            </a:outerShdw>
+          </a:effectLst>
+        </p:spPr>
+      </p:sp>
+      <p:sp>
+        <p:nvSpPr>
+          <p:cNvPr id="16" name="Text 13"/>
+          <p:cNvSpPr txBox="1"/>
+          <p:nvPr/>
+        </p:nvSpPr>
+        <p:spPr>
+          <a:xfrm>
+            <a:off x="4828032" y="3456432"/>
+            <a:ext cx="3145536" cy="274320"/>
           </a:xfrm>
           <a:prstGeom prst="rect">
             <a:avLst/>
@@ -7601,7 +6985,7 @@
                 <a:ea typeface="Pretendard" pitchFamily="34" charset="-122"/>
                 <a:cs typeface="Pretendard" pitchFamily="34" charset="-120"/>
               </a:rPr>
-              <a:t>폰이 익숙하지 않으셔도 괜찮습니다</a:t>
+              <a:t>한 장으로 두 번 쓰려고 하면요?</a:t>
             </a:r>
             <a:endParaRPr lang="en-US" sz="1250" dirty="0"/>
           </a:p>
@@ -7609,14 +6993,14 @@
       </p:sp>
       <p:sp>
         <p:nvSpPr>
-          <p:cNvPr id="21" name="Text 18"/>
-          <p:cNvSpPr txBox="1"/>
-          <p:nvPr/>
-        </p:nvSpPr>
-        <p:spPr>
-          <a:xfrm>
-            <a:off x="960120" y="5248656"/>
-            <a:ext cx="4892040" cy="914400"/>
+          <p:cNvPr id="17" name="Text 14"/>
+          <p:cNvSpPr txBox="1"/>
+          <p:nvPr/>
+        </p:nvSpPr>
+        <p:spPr>
+          <a:xfrm>
+            <a:off x="4828032" y="3767328"/>
+            <a:ext cx="3145536" cy="621792"/>
           </a:xfrm>
           <a:prstGeom prst="rect">
             <a:avLst/>
@@ -7637,13 +7021,243 @@
             <a:r>
               <a:rPr lang="en-US" sz="1050" dirty="0">
                 <a:solidFill>
+                  <a:srgbClr val="6E6B68"/>
+                </a:solidFill>
+                <a:latin typeface="Pretendard" pitchFamily="34" charset="0"/>
+                <a:ea typeface="Pretendard" pitchFamily="34" charset="-122"/>
+                <a:cs typeface="Pretendard" pitchFamily="34" charset="-120"/>
+              </a:rPr>
+              <a:t>QR 은 한 번 찍히면 끝. 같은 코드가 두 번 통과하지 않습니다.</a:t>
+            </a:r>
+            <a:endParaRPr lang="en-US" sz="1050" dirty="0"/>
+          </a:p>
+        </p:txBody>
+      </p:sp>
+      <p:sp>
+        <p:nvSpPr>
+          <p:cNvPr id="18" name="Shape 15"/>
+          <p:cNvSpPr/>
+          <p:nvPr/>
+        </p:nvSpPr>
+        <p:spPr>
+          <a:xfrm>
+            <a:off x="685800" y="4617720"/>
+            <a:ext cx="3657600" cy="1143000"/>
+          </a:xfrm>
+          <a:prstGeom prst="roundRect">
+            <a:avLst>
+              <a:gd name="adj" fmla="val 11200"/>
+            </a:avLst>
+          </a:prstGeom>
+          <a:solidFill>
+            <a:srgbClr val="FFFFFF"/>
+          </a:solidFill>
+          <a:ln w="12700">
+            <a:solidFill>
+              <a:srgbClr val="FFFFFF"/>
+            </a:solidFill>
+            <a:prstDash val="solid"/>
+          </a:ln>
+          <a:effectLst>
+            <a:outerShdw sx="100000" sy="100000" kx="0" ky="0" algn="bl" rotWithShape="0" blurRad="101600" dist="25400" dir="5400000">
+              <a:srgbClr val="1A2C42">
+                <a:alpha val="7000"/>
+              </a:srgbClr>
+            </a:outerShdw>
+          </a:effectLst>
+        </p:spPr>
+      </p:sp>
+      <p:sp>
+        <p:nvSpPr>
+          <p:cNvPr id="19" name="Text 16"/>
+          <p:cNvSpPr txBox="1"/>
+          <p:nvPr/>
+        </p:nvSpPr>
+        <p:spPr>
+          <a:xfrm>
+            <a:off x="941832" y="4782312"/>
+            <a:ext cx="3145536" cy="274320"/>
+          </a:xfrm>
+          <a:prstGeom prst="rect">
+            <a:avLst/>
+          </a:prstGeom>
+          <a:noFill/>
+          <a:ln/>
+        </p:spPr>
+        <p:txBody>
+          <a:bodyPr wrap="square" lIns="0" tIns="0" rIns="0" bIns="0" rtlCol="0" anchor="ctr"/>
+          <a:lstStyle/>
+          <a:p>
+            <a:pPr indent="0" marL="0">
+              <a:buNone/>
+            </a:pPr>
+            <a:r>
+              <a:rPr lang="en-US" sz="1250" b="1" spc="-30" kern="0" dirty="0">
+                <a:solidFill>
                   <a:srgbClr val="16181C"/>
                 </a:solidFill>
                 <a:latin typeface="Pretendard" pitchFamily="34" charset="0"/>
                 <a:ea typeface="Pretendard" pitchFamily="34" charset="-122"/>
                 <a:cs typeface="Pretendard" pitchFamily="34" charset="-120"/>
               </a:rPr>
-              <a:t>카카오톡 채널로 말씀 주시면 등록부터 첫 이용권 올리는 것까지 전화로 같이 하거나, 저희가 대신 만들어 드립니다. 승인이 나면 문자로 알려드리고, 그날부터 판매가 시작됩니다.</a:t>
+              <a:t>배달앱이랑 같이 써도 되나요?</a:t>
+            </a:r>
+            <a:endParaRPr lang="en-US" sz="1250" dirty="0"/>
+          </a:p>
+        </p:txBody>
+      </p:sp>
+      <p:sp>
+        <p:nvSpPr>
+          <p:cNvPr id="20" name="Text 17"/>
+          <p:cNvSpPr txBox="1"/>
+          <p:nvPr/>
+        </p:nvSpPr>
+        <p:spPr>
+          <a:xfrm>
+            <a:off x="941832" y="5093208"/>
+            <a:ext cx="3145536" cy="621792"/>
+          </a:xfrm>
+          <a:prstGeom prst="rect">
+            <a:avLst/>
+          </a:prstGeom>
+          <a:noFill/>
+          <a:ln/>
+        </p:spPr>
+        <p:txBody>
+          <a:bodyPr wrap="square" lIns="0" tIns="0" rIns="0" bIns="0" rtlCol="0" anchor="t"/>
+          <a:lstStyle/>
+          <a:p>
+            <a:pPr indent="0" marL="0">
+              <a:lnSpc>
+                <a:spcPct val="140000"/>
+              </a:lnSpc>
+              <a:buNone/>
+            </a:pPr>
+            <a:r>
+              <a:rPr lang="en-US" sz="1050" dirty="0">
+                <a:solidFill>
+                  <a:srgbClr val="6E6B68"/>
+                </a:solidFill>
+                <a:latin typeface="Pretendard" pitchFamily="34" charset="0"/>
+                <a:ea typeface="Pretendard" pitchFamily="34" charset="-122"/>
+                <a:cs typeface="Pretendard" pitchFamily="34" charset="-120"/>
+              </a:rPr>
+              <a:t>됩니다. 독점 요구도 계약 기간도 없습니다.</a:t>
+            </a:r>
+            <a:endParaRPr lang="en-US" sz="1050" dirty="0"/>
+          </a:p>
+        </p:txBody>
+      </p:sp>
+      <p:sp>
+        <p:nvSpPr>
+          <p:cNvPr id="21" name="Shape 18"/>
+          <p:cNvSpPr/>
+          <p:nvPr/>
+        </p:nvSpPr>
+        <p:spPr>
+          <a:xfrm>
+            <a:off x="4572000" y="4617720"/>
+            <a:ext cx="3657600" cy="1143000"/>
+          </a:xfrm>
+          <a:prstGeom prst="roundRect">
+            <a:avLst>
+              <a:gd name="adj" fmla="val 11200"/>
+            </a:avLst>
+          </a:prstGeom>
+          <a:solidFill>
+            <a:srgbClr val="FFFFFF"/>
+          </a:solidFill>
+          <a:ln w="12700">
+            <a:solidFill>
+              <a:srgbClr val="FFFFFF"/>
+            </a:solidFill>
+            <a:prstDash val="solid"/>
+          </a:ln>
+          <a:effectLst>
+            <a:outerShdw sx="100000" sy="100000" kx="0" ky="0" algn="bl" rotWithShape="0" blurRad="101600" dist="25400" dir="5400000">
+              <a:srgbClr val="1A2C42">
+                <a:alpha val="7000"/>
+              </a:srgbClr>
+            </a:outerShdw>
+          </a:effectLst>
+        </p:spPr>
+      </p:sp>
+      <p:sp>
+        <p:nvSpPr>
+          <p:cNvPr id="22" name="Text 19"/>
+          <p:cNvSpPr txBox="1"/>
+          <p:nvPr/>
+        </p:nvSpPr>
+        <p:spPr>
+          <a:xfrm>
+            <a:off x="4828032" y="4782312"/>
+            <a:ext cx="3145536" cy="274320"/>
+          </a:xfrm>
+          <a:prstGeom prst="rect">
+            <a:avLst/>
+          </a:prstGeom>
+          <a:noFill/>
+          <a:ln/>
+        </p:spPr>
+        <p:txBody>
+          <a:bodyPr wrap="square" lIns="0" tIns="0" rIns="0" bIns="0" rtlCol="0" anchor="ctr"/>
+          <a:lstStyle/>
+          <a:p>
+            <a:pPr indent="0" marL="0">
+              <a:buNone/>
+            </a:pPr>
+            <a:r>
+              <a:rPr lang="en-US" sz="1250" b="1" spc="-30" kern="0" dirty="0">
+                <a:solidFill>
+                  <a:srgbClr val="16181C"/>
+                </a:solidFill>
+                <a:latin typeface="Pretendard" pitchFamily="34" charset="0"/>
+                <a:ea typeface="Pretendard" pitchFamily="34" charset="-122"/>
+                <a:cs typeface="Pretendard" pitchFamily="34" charset="-120"/>
+              </a:rPr>
+              <a:t>너무 많이 팔리면요?</a:t>
+            </a:r>
+            <a:endParaRPr lang="en-US" sz="1250" dirty="0"/>
+          </a:p>
+        </p:txBody>
+      </p:sp>
+      <p:sp>
+        <p:nvSpPr>
+          <p:cNvPr id="23" name="Text 20"/>
+          <p:cNvSpPr txBox="1"/>
+          <p:nvPr/>
+        </p:nvSpPr>
+        <p:spPr>
+          <a:xfrm>
+            <a:off x="4828032" y="5093208"/>
+            <a:ext cx="3145536" cy="621792"/>
+          </a:xfrm>
+          <a:prstGeom prst="rect">
+            <a:avLst/>
+          </a:prstGeom>
+          <a:noFill/>
+          <a:ln/>
+        </p:spPr>
+        <p:txBody>
+          <a:bodyPr wrap="square" lIns="0" tIns="0" rIns="0" bIns="0" rtlCol="0" anchor="t"/>
+          <a:lstStyle/>
+          <a:p>
+            <a:pPr indent="0" marL="0">
+              <a:lnSpc>
+                <a:spcPct val="140000"/>
+              </a:lnSpc>
+              <a:buNone/>
+            </a:pPr>
+            <a:r>
+              <a:rPr lang="en-US" sz="1050" dirty="0">
+                <a:solidFill>
+                  <a:srgbClr val="6E6B68"/>
+                </a:solidFill>
+                <a:latin typeface="Pretendard" pitchFamily="34" charset="0"/>
+                <a:ea typeface="Pretendard" pitchFamily="34" charset="-122"/>
+                <a:cs typeface="Pretendard" pitchFamily="34" charset="-120"/>
+              </a:rPr>
+              <a:t>수량 상한을 두면 그만큼만 팔립니다.</a:t>
             </a:r>
             <a:endParaRPr lang="en-US" sz="1050" dirty="0"/>
           </a:p>
@@ -7651,7 +7265,7 @@
       </p:sp>
       <p:pic>
         <p:nvPicPr>
-          <p:cNvPr id="22" name="Image 1" descr="preencoded.png">    </p:cNvPr>
+          <p:cNvPr id="24" name="Image 1" descr="preencoded.png">    </p:cNvPr>
           <p:cNvPicPr>
             <a:picLocks noChangeAspect="1"/>
           </p:cNvPicPr>
@@ -7665,8 +7279,8 @@
         </p:blipFill>
         <p:spPr>
           <a:xfrm>
-            <a:off x="6331375" y="1576495"/>
-            <a:ext cx="2392539" cy="4573689"/>
+            <a:off x="8626773" y="717213"/>
+            <a:ext cx="2813205" cy="5377855"/>
           </a:xfrm>
           <a:prstGeom prst="rect">
             <a:avLst/>
@@ -7675,14 +7289,14 @@
       </p:pic>
       <p:sp>
         <p:nvSpPr>
-          <p:cNvPr id="23" name="Text 19"/>
-          <p:cNvSpPr txBox="1"/>
-          <p:nvPr/>
-        </p:nvSpPr>
-        <p:spPr>
-          <a:xfrm>
-            <a:off x="6172200" y="6089904"/>
-            <a:ext cx="2710890" cy="274320"/>
+          <p:cNvPr id="25" name="Text 21"/>
+          <p:cNvSpPr txBox="1"/>
+          <p:nvPr/>
+        </p:nvSpPr>
+        <p:spPr>
+          <a:xfrm>
+            <a:off x="8503920" y="5998464"/>
+            <a:ext cx="3058911" cy="274320"/>
           </a:xfrm>
           <a:prstGeom prst="rect">
             <a:avLst/>
@@ -7706,70 +7320,7 @@
                 <a:ea typeface="Pretendard" pitchFamily="34" charset="-122"/>
                 <a:cs typeface="Pretendard" pitchFamily="34" charset="-120"/>
               </a:rPr>
-              <a:t>카카오맵에서 내 가게 찾기</a:t>
-            </a:r>
-            <a:endParaRPr lang="en-US" sz="1050" dirty="0"/>
-          </a:p>
-        </p:txBody>
-      </p:sp>
-      <p:pic>
-        <p:nvPicPr>
-          <p:cNvPr id="24" name="Image 2" descr="preencoded.png">    </p:cNvPr>
-          <p:cNvPicPr>
-            <a:picLocks noChangeAspect="1"/>
-          </p:cNvPicPr>
-          <p:nvPr/>
-        </p:nvPicPr>
-        <p:blipFill>
-          <a:blip r:embed="rId3"/>
-          <a:stretch>
-            <a:fillRect/>
-          </a:stretch>
-        </p:blipFill>
-        <p:spPr>
-          <a:xfrm>
-            <a:off x="8813665" y="1576495"/>
-            <a:ext cx="2392539" cy="4573689"/>
-          </a:xfrm>
-          <a:prstGeom prst="rect">
-            <a:avLst/>
-          </a:prstGeom>
-        </p:spPr>
-      </p:pic>
-      <p:sp>
-        <p:nvSpPr>
-          <p:cNvPr id="25" name="Text 20"/>
-          <p:cNvSpPr txBox="1"/>
-          <p:nvPr/>
-        </p:nvSpPr>
-        <p:spPr>
-          <a:xfrm>
-            <a:off x="8654490" y="6089904"/>
-            <a:ext cx="2710890" cy="274320"/>
-          </a:xfrm>
-          <a:prstGeom prst="rect">
-            <a:avLst/>
-          </a:prstGeom>
-          <a:noFill/>
-          <a:ln/>
-        </p:spPr>
-        <p:txBody>
-          <a:bodyPr wrap="square" lIns="0" tIns="0" rIns="0" bIns="0" rtlCol="0" anchor="ctr"/>
-          <a:lstStyle/>
-          <a:p>
-            <a:pPr algn="ctr" indent="0" marL="0">
-              <a:buNone/>
-            </a:pPr>
-            <a:r>
-              <a:rPr lang="en-US" sz="1050" dirty="0">
-                <a:solidFill>
-                  <a:srgbClr val="6E6B68"/>
-                </a:solidFill>
-                <a:latin typeface="Pretendard" pitchFamily="34" charset="0"/>
-                <a:ea typeface="Pretendard" pitchFamily="34" charset="-122"/>
-                <a:cs typeface="Pretendard" pitchFamily="34" charset="-120"/>
-              </a:rPr>
-              <a:t>"누가 운영하나요" 화면</a:t>
+              <a:t>손님이 보는 사용 안내와 환불 조건 (라이브 화면)</a:t>
             </a:r>
             <a:endParaRPr lang="en-US" sz="1050" dirty="0"/>
           </a:p>
@@ -7918,7 +7469,7 @@
         <p:spPr>
           <a:xfrm>
             <a:off x="685800" y="1051560"/>
-            <a:ext cx="8046720" cy="822960"/>
+            <a:ext cx="10820095" cy="822960"/>
           </a:xfrm>
           <a:prstGeom prst="rect">
             <a:avLst/>
@@ -7945,7 +7496,7 @@
                 <a:ea typeface="Pretendard" pitchFamily="34" charset="-122"/>
                 <a:cs typeface="Pretendard" pitchFamily="34" charset="-120"/>
               </a:rPr>
-              <a:t>사장님은 장사만 하세요. 나머지는 알아서 돌아갑니다.</a:t>
+              <a:t>등록은 10분. 막히면 저희가 대신 해드립니다.</a:t>
             </a:r>
             <a:endParaRPr lang="en-US" sz="2700" dirty="0"/>
           </a:p>
@@ -7959,34 +7510,37 @@
         </p:nvSpPr>
         <p:spPr>
           <a:xfrm>
-            <a:off x="685800" y="1965960"/>
-            <a:ext cx="3657600" cy="237744"/>
-          </a:xfrm>
-          <a:prstGeom prst="rect">
-            <a:avLst/>
-          </a:prstGeom>
-          <a:noFill/>
-          <a:ln/>
-        </p:spPr>
-        <p:txBody>
-          <a:bodyPr wrap="square" lIns="0" tIns="0" rIns="0" bIns="0" rtlCol="0" anchor="ctr"/>
-          <a:lstStyle/>
-          <a:p>
-            <a:pPr indent="0" marL="0">
-              <a:buNone/>
-            </a:pPr>
-            <a:r>
-              <a:rPr lang="en-US" sz="1000" b="1" spc="120" kern="0" dirty="0">
-                <a:solidFill>
-                  <a:srgbClr val="8A8580"/>
-                </a:solidFill>
-                <a:latin typeface="Pretendard" pitchFamily="34" charset="0"/>
-                <a:ea typeface="Pretendard" pitchFamily="34" charset="-122"/>
-                <a:cs typeface="Pretendard" pitchFamily="34" charset="-120"/>
-              </a:rPr>
-              <a:t>운영</a:t>
-            </a:r>
-            <a:endParaRPr lang="en-US" sz="1000" dirty="0"/>
+            <a:off x="685800" y="1828800"/>
+            <a:ext cx="5486400" cy="365760"/>
+          </a:xfrm>
+          <a:prstGeom prst="rect">
+            <a:avLst/>
+          </a:prstGeom>
+          <a:noFill/>
+          <a:ln/>
+        </p:spPr>
+        <p:txBody>
+          <a:bodyPr wrap="square" lIns="0" tIns="0" rIns="0" bIns="0" rtlCol="0" anchor="t"/>
+          <a:lstStyle/>
+          <a:p>
+            <a:pPr indent="0" marL="0">
+              <a:lnSpc>
+                <a:spcPct val="150000"/>
+              </a:lnSpc>
+              <a:buNone/>
+            </a:pPr>
+            <a:r>
+              <a:rPr lang="en-US" sz="1250" dirty="0">
+                <a:solidFill>
+                  <a:srgbClr val="6E6B68"/>
+                </a:solidFill>
+                <a:latin typeface="Pretendard" pitchFamily="34" charset="0"/>
+                <a:ea typeface="Pretendard" pitchFamily="34" charset="-122"/>
+                <a:cs typeface="Pretendard" pitchFamily="34" charset="-120"/>
+              </a:rPr>
+              <a:t>이게 전부입니다. 포스 연동도, 단말기도, 직원 교육도 필요 없습니다.</a:t>
+            </a:r>
+            <a:endParaRPr lang="en-US" sz="1250" dirty="0"/>
           </a:p>
         </p:txBody>
       </p:sp>
@@ -7998,57 +7552,72 @@
         </p:nvSpPr>
         <p:spPr>
           <a:xfrm>
-            <a:off x="685800" y="2286000"/>
-            <a:ext cx="420624" cy="420624"/>
+            <a:off x="685800" y="2487168"/>
+            <a:ext cx="347472" cy="347472"/>
           </a:xfrm>
           <a:prstGeom prst="ellipse">
             <a:avLst/>
           </a:prstGeom>
           <a:solidFill>
-            <a:srgbClr val="E4EDFD"/>
+            <a:srgbClr val="1C69EF"/>
           </a:solidFill>
-          <a:ln w="12700">
+          <a:ln w="15875">
             <a:solidFill>
-              <a:srgbClr val="E4EDFD"/>
+              <a:srgbClr val="1C69EF"/>
             </a:solidFill>
             <a:prstDash val="solid"/>
           </a:ln>
         </p:spPr>
       </p:sp>
-      <p:pic>
-        <p:nvPicPr>
-          <p:cNvPr id="8" name="Image 1" descr="preencoded.png">    </p:cNvPr>
-          <p:cNvPicPr>
-            <a:picLocks noChangeAspect="1"/>
-          </p:cNvPicPr>
-          <p:nvPr/>
-        </p:nvPicPr>
-        <p:blipFill>
-          <a:blip r:embed="rId2"/>
-          <a:stretch>
-            <a:fillRect/>
-          </a:stretch>
-        </p:blipFill>
-        <p:spPr>
-          <a:xfrm>
-            <a:off x="795162" y="2395362"/>
-            <a:ext cx="201900" cy="201900"/>
-          </a:xfrm>
-          <a:prstGeom prst="rect">
-            <a:avLst/>
-          </a:prstGeom>
-        </p:spPr>
-      </p:pic>
-      <p:sp>
-        <p:nvSpPr>
-          <p:cNvPr id="9" name="Text 5"/>
-          <p:cNvSpPr txBox="1"/>
-          <p:nvPr/>
-        </p:nvSpPr>
-        <p:spPr>
-          <a:xfrm>
-            <a:off x="1280160" y="2286000"/>
-            <a:ext cx="6675120" cy="292608"/>
+      <p:sp>
+        <p:nvSpPr>
+          <p:cNvPr id="8" name="Text 5"/>
+          <p:cNvSpPr txBox="1"/>
+          <p:nvPr/>
+        </p:nvSpPr>
+        <p:spPr>
+          <a:xfrm>
+            <a:off x="685800" y="2487168"/>
+            <a:ext cx="347472" cy="347472"/>
+          </a:xfrm>
+          <a:prstGeom prst="rect">
+            <a:avLst/>
+          </a:prstGeom>
+          <a:noFill/>
+          <a:ln/>
+        </p:spPr>
+        <p:txBody>
+          <a:bodyPr wrap="square" lIns="0" tIns="0" rIns="0" bIns="0" rtlCol="0" anchor="ctr"/>
+          <a:lstStyle/>
+          <a:p>
+            <a:pPr algn="ctr" indent="0" marL="0">
+              <a:buNone/>
+            </a:pPr>
+            <a:r>
+              <a:rPr lang="en-US" sz="1150" b="1" dirty="0">
+                <a:solidFill>
+                  <a:srgbClr val="FFFFFF"/>
+                </a:solidFill>
+                <a:latin typeface="Pretendard" pitchFamily="34" charset="0"/>
+                <a:ea typeface="Pretendard" pitchFamily="34" charset="-122"/>
+                <a:cs typeface="Pretendard" pitchFamily="34" charset="-120"/>
+              </a:rPr>
+              <a:t>1</a:t>
+            </a:r>
+            <a:endParaRPr lang="en-US" sz="1150" dirty="0"/>
+          </a:p>
+        </p:txBody>
+      </p:sp>
+      <p:sp>
+        <p:nvSpPr>
+          <p:cNvPr id="9" name="Text 6"/>
+          <p:cNvSpPr txBox="1"/>
+          <p:nvPr/>
+        </p:nvSpPr>
+        <p:spPr>
+          <a:xfrm>
+            <a:off x="1188720" y="2468880"/>
+            <a:ext cx="4937760" cy="292608"/>
           </a:xfrm>
           <a:prstGeom prst="rect">
             <a:avLst/>
@@ -8072,7 +7641,7 @@
                 <a:ea typeface="Pretendard" pitchFamily="34" charset="-122"/>
                 <a:cs typeface="Pretendard" pitchFamily="34" charset="-120"/>
               </a:rPr>
-              <a:t>손님이 오면 폰으로 QR 한 번 찍기</a:t>
+              <a:t>urdeal.kr 카카오 로그인</a:t>
             </a:r>
             <a:endParaRPr lang="en-US" sz="1350" dirty="0"/>
           </a:p>
@@ -8080,14 +7649,14 @@
       </p:sp>
       <p:sp>
         <p:nvSpPr>
-          <p:cNvPr id="10" name="Text 6"/>
-          <p:cNvSpPr txBox="1"/>
-          <p:nvPr/>
-        </p:nvSpPr>
-        <p:spPr>
-          <a:xfrm>
-            <a:off x="1280160" y="2606040"/>
-            <a:ext cx="6675120" cy="457200"/>
+          <p:cNvPr id="10" name="Text 7"/>
+          <p:cNvSpPr txBox="1"/>
+          <p:nvPr/>
+        </p:nvSpPr>
+        <p:spPr>
+          <a:xfrm>
+            <a:off x="1188720" y="2779776"/>
+            <a:ext cx="4937760" cy="457200"/>
           </a:xfrm>
           <a:prstGeom prst="rect">
             <a:avLst/>
@@ -8114,7 +7683,7 @@
                 <a:ea typeface="Pretendard" pitchFamily="34" charset="-122"/>
                 <a:cs typeface="Pretendard" pitchFamily="34" charset="-120"/>
               </a:rPr>
-              <a:t>사장님이 하실 일은 이게 전부입니다. 스캔이 어려우면 매장 확인코드 6자리를 알려 주면 손님이 직접 입력합니다.</a:t>
+              <a:t>별도 가입이 없습니다.</a:t>
             </a:r>
             <a:endParaRPr lang="en-US" sz="1050" dirty="0"/>
           </a:p>
@@ -8122,53 +7691,117 @@
       </p:sp>
       <p:sp>
         <p:nvSpPr>
-          <p:cNvPr id="11" name="Text 7"/>
-          <p:cNvSpPr txBox="1"/>
-          <p:nvPr/>
-        </p:nvSpPr>
-        <p:spPr>
-          <a:xfrm>
-            <a:off x="685800" y="3246120"/>
-            <a:ext cx="3657600" cy="237744"/>
-          </a:xfrm>
-          <a:prstGeom prst="rect">
-            <a:avLst/>
-          </a:prstGeom>
-          <a:noFill/>
-          <a:ln/>
-        </p:spPr>
-        <p:txBody>
-          <a:bodyPr wrap="square" lIns="0" tIns="0" rIns="0" bIns="0" rtlCol="0" anchor="ctr"/>
-          <a:lstStyle/>
-          <a:p>
-            <a:pPr indent="0" marL="0">
-              <a:buNone/>
-            </a:pPr>
-            <a:r>
-              <a:rPr lang="en-US" sz="1000" b="1" spc="120" kern="0" dirty="0">
-                <a:solidFill>
-                  <a:srgbClr val="8A8580"/>
-                </a:solidFill>
-                <a:latin typeface="Pretendard" pitchFamily="34" charset="0"/>
-                <a:ea typeface="Pretendard" pitchFamily="34" charset="-122"/>
-                <a:cs typeface="Pretendard" pitchFamily="34" charset="-120"/>
-              </a:rPr>
-              <a:t>정산</a:t>
-            </a:r>
-            <a:endParaRPr lang="en-US" sz="1000" dirty="0"/>
-          </a:p>
-        </p:txBody>
-      </p:sp>
-      <p:sp>
-        <p:nvSpPr>
-          <p:cNvPr id="12" name="Text 8"/>
-          <p:cNvSpPr txBox="1"/>
-          <p:nvPr/>
-        </p:nvSpPr>
-        <p:spPr>
-          <a:xfrm>
-            <a:off x="685800" y="3566160"/>
-            <a:ext cx="7315200" cy="822960"/>
+          <p:cNvPr id="11" name="Shape 8"/>
+          <p:cNvSpPr/>
+          <p:nvPr/>
+        </p:nvSpPr>
+        <p:spPr>
+          <a:xfrm>
+            <a:off x="685800" y="3236976"/>
+            <a:ext cx="347472" cy="347472"/>
+          </a:xfrm>
+          <a:prstGeom prst="ellipse">
+            <a:avLst/>
+          </a:prstGeom>
+          <a:solidFill>
+            <a:srgbClr val="1C69EF"/>
+          </a:solidFill>
+          <a:ln w="15875">
+            <a:solidFill>
+              <a:srgbClr val="1C69EF"/>
+            </a:solidFill>
+            <a:prstDash val="solid"/>
+          </a:ln>
+        </p:spPr>
+      </p:sp>
+      <p:sp>
+        <p:nvSpPr>
+          <p:cNvPr id="12" name="Text 9"/>
+          <p:cNvSpPr txBox="1"/>
+          <p:nvPr/>
+        </p:nvSpPr>
+        <p:spPr>
+          <a:xfrm>
+            <a:off x="685800" y="3236976"/>
+            <a:ext cx="347472" cy="347472"/>
+          </a:xfrm>
+          <a:prstGeom prst="rect">
+            <a:avLst/>
+          </a:prstGeom>
+          <a:noFill/>
+          <a:ln/>
+        </p:spPr>
+        <p:txBody>
+          <a:bodyPr wrap="square" lIns="0" tIns="0" rIns="0" bIns="0" rtlCol="0" anchor="ctr"/>
+          <a:lstStyle/>
+          <a:p>
+            <a:pPr algn="ctr" indent="0" marL="0">
+              <a:buNone/>
+            </a:pPr>
+            <a:r>
+              <a:rPr lang="en-US" sz="1150" b="1" dirty="0">
+                <a:solidFill>
+                  <a:srgbClr val="FFFFFF"/>
+                </a:solidFill>
+                <a:latin typeface="Pretendard" pitchFamily="34" charset="0"/>
+                <a:ea typeface="Pretendard" pitchFamily="34" charset="-122"/>
+                <a:cs typeface="Pretendard" pitchFamily="34" charset="-120"/>
+              </a:rPr>
+              <a:t>2</a:t>
+            </a:r>
+            <a:endParaRPr lang="en-US" sz="1150" dirty="0"/>
+          </a:p>
+        </p:txBody>
+      </p:sp>
+      <p:sp>
+        <p:nvSpPr>
+          <p:cNvPr id="13" name="Text 10"/>
+          <p:cNvSpPr txBox="1"/>
+          <p:nvPr/>
+        </p:nvSpPr>
+        <p:spPr>
+          <a:xfrm>
+            <a:off x="1188720" y="3218688"/>
+            <a:ext cx="4937760" cy="292608"/>
+          </a:xfrm>
+          <a:prstGeom prst="rect">
+            <a:avLst/>
+          </a:prstGeom>
+          <a:noFill/>
+          <a:ln/>
+        </p:spPr>
+        <p:txBody>
+          <a:bodyPr wrap="square" lIns="0" tIns="0" rIns="0" bIns="0" rtlCol="0" anchor="ctr"/>
+          <a:lstStyle/>
+          <a:p>
+            <a:pPr indent="0" marL="0">
+              <a:buNone/>
+            </a:pPr>
+            <a:r>
+              <a:rPr lang="en-US" sz="1350" b="1" spc="-30" kern="0" dirty="0">
+                <a:solidFill>
+                  <a:srgbClr val="16181C"/>
+                </a:solidFill>
+                <a:latin typeface="Pretendard" pitchFamily="34" charset="0"/>
+                <a:ea typeface="Pretendard" pitchFamily="34" charset="-122"/>
+                <a:cs typeface="Pretendard" pitchFamily="34" charset="-120"/>
+              </a:rPr>
+              <a:t>카카오맵에서 내 가게 찾기</a:t>
+            </a:r>
+            <a:endParaRPr lang="en-US" sz="1350" dirty="0"/>
+          </a:p>
+        </p:txBody>
+      </p:sp>
+      <p:sp>
+        <p:nvSpPr>
+          <p:cNvPr id="14" name="Text 11"/>
+          <p:cNvSpPr txBox="1"/>
+          <p:nvPr/>
+        </p:nvSpPr>
+        <p:spPr>
+          <a:xfrm>
+            <a:off x="1188720" y="3529584"/>
+            <a:ext cx="4937760" cy="457200"/>
           </a:xfrm>
           <a:prstGeom prst="rect">
             <a:avLst/>
@@ -8182,12 +7815,115 @@
           <a:p>
             <a:pPr indent="0" marL="0">
               <a:lnSpc>
-                <a:spcPct val="150000"/>
+                <a:spcPct val="140000"/>
               </a:lnSpc>
               <a:buNone/>
             </a:pPr>
             <a:r>
-              <a:rPr lang="en-US" sz="1150" dirty="0">
+              <a:rPr lang="en-US" sz="1050" dirty="0">
+                <a:solidFill>
+                  <a:srgbClr val="6E6B68"/>
+                </a:solidFill>
+                <a:latin typeface="Pretendard" pitchFamily="34" charset="0"/>
+                <a:ea typeface="Pretendard" pitchFamily="34" charset="-122"/>
+                <a:cs typeface="Pretendard" pitchFamily="34" charset="-120"/>
+              </a:rPr>
+              <a:t>주소와 전화번호가 자동으로 채워집니다.</a:t>
+            </a:r>
+            <a:endParaRPr lang="en-US" sz="1050" dirty="0"/>
+          </a:p>
+        </p:txBody>
+      </p:sp>
+      <p:sp>
+        <p:nvSpPr>
+          <p:cNvPr id="15" name="Shape 12"/>
+          <p:cNvSpPr/>
+          <p:nvPr/>
+        </p:nvSpPr>
+        <p:spPr>
+          <a:xfrm>
+            <a:off x="685800" y="3986784"/>
+            <a:ext cx="347472" cy="347472"/>
+          </a:xfrm>
+          <a:prstGeom prst="ellipse">
+            <a:avLst/>
+          </a:prstGeom>
+          <a:solidFill>
+            <a:srgbClr val="1C69EF"/>
+          </a:solidFill>
+          <a:ln w="15875">
+            <a:solidFill>
+              <a:srgbClr val="1C69EF"/>
+            </a:solidFill>
+            <a:prstDash val="solid"/>
+          </a:ln>
+        </p:spPr>
+      </p:sp>
+      <p:sp>
+        <p:nvSpPr>
+          <p:cNvPr id="16" name="Text 13"/>
+          <p:cNvSpPr txBox="1"/>
+          <p:nvPr/>
+        </p:nvSpPr>
+        <p:spPr>
+          <a:xfrm>
+            <a:off x="685800" y="3986784"/>
+            <a:ext cx="347472" cy="347472"/>
+          </a:xfrm>
+          <a:prstGeom prst="rect">
+            <a:avLst/>
+          </a:prstGeom>
+          <a:noFill/>
+          <a:ln/>
+        </p:spPr>
+        <p:txBody>
+          <a:bodyPr wrap="square" lIns="0" tIns="0" rIns="0" bIns="0" rtlCol="0" anchor="ctr"/>
+          <a:lstStyle/>
+          <a:p>
+            <a:pPr algn="ctr" indent="0" marL="0">
+              <a:buNone/>
+            </a:pPr>
+            <a:r>
+              <a:rPr lang="en-US" sz="1150" b="1" dirty="0">
+                <a:solidFill>
+                  <a:srgbClr val="FFFFFF"/>
+                </a:solidFill>
+                <a:latin typeface="Pretendard" pitchFamily="34" charset="0"/>
+                <a:ea typeface="Pretendard" pitchFamily="34" charset="-122"/>
+                <a:cs typeface="Pretendard" pitchFamily="34" charset="-120"/>
+              </a:rPr>
+              <a:t>3</a:t>
+            </a:r>
+            <a:endParaRPr lang="en-US" sz="1150" dirty="0"/>
+          </a:p>
+        </p:txBody>
+      </p:sp>
+      <p:sp>
+        <p:nvSpPr>
+          <p:cNvPr id="17" name="Text 14"/>
+          <p:cNvSpPr txBox="1"/>
+          <p:nvPr/>
+        </p:nvSpPr>
+        <p:spPr>
+          <a:xfrm>
+            <a:off x="1188720" y="3968496"/>
+            <a:ext cx="4937760" cy="292608"/>
+          </a:xfrm>
+          <a:prstGeom prst="rect">
+            <a:avLst/>
+          </a:prstGeom>
+          <a:noFill/>
+          <a:ln/>
+        </p:spPr>
+        <p:txBody>
+          <a:bodyPr wrap="square" lIns="0" tIns="0" rIns="0" bIns="0" rtlCol="0" anchor="ctr"/>
+          <a:lstStyle/>
+          <a:p>
+            <a:pPr indent="0" marL="0">
+              <a:buNone/>
+            </a:pPr>
+            <a:r>
+              <a:rPr lang="en-US" sz="1350" b="1" spc="-30" kern="0" dirty="0">
                 <a:solidFill>
                   <a:srgbClr val="16181C"/>
                 </a:solidFill>
@@ -8195,61 +7931,22 @@
                 <a:ea typeface="Pretendard" pitchFamily="34" charset="-122"/>
                 <a:cs typeface="Pretendard" pitchFamily="34" charset="-120"/>
               </a:rPr>
-              <a:t>손님이 실제로 쓴 이용권만 모아 매주 등록 계좌로 들어옵니다. 얼마 팔렸고, 얼마 들어올지는 매장 화면에 항상 떠 있어서 궁금해서 전화하실 일이 없습니다. 별도 정산 수수료도 없습니다.</a:t>
-            </a:r>
-            <a:endParaRPr lang="en-US" sz="1150" dirty="0"/>
-          </a:p>
-        </p:txBody>
-      </p:sp>
-      <p:sp>
-        <p:nvSpPr>
-          <p:cNvPr id="13" name="Text 9"/>
-          <p:cNvSpPr txBox="1"/>
-          <p:nvPr/>
-        </p:nvSpPr>
-        <p:spPr>
-          <a:xfrm>
-            <a:off x="685800" y="4526280"/>
-            <a:ext cx="3657600" cy="237744"/>
-          </a:xfrm>
-          <a:prstGeom prst="rect">
-            <a:avLst/>
-          </a:prstGeom>
-          <a:noFill/>
-          <a:ln/>
-        </p:spPr>
-        <p:txBody>
-          <a:bodyPr wrap="square" lIns="0" tIns="0" rIns="0" bIns="0" rtlCol="0" anchor="ctr"/>
-          <a:lstStyle/>
-          <a:p>
-            <a:pPr indent="0" marL="0">
-              <a:buNone/>
-            </a:pPr>
-            <a:r>
-              <a:rPr lang="en-US" sz="1000" b="1" spc="120" kern="0" dirty="0">
-                <a:solidFill>
-                  <a:srgbClr val="8A8580"/>
-                </a:solidFill>
-                <a:latin typeface="Pretendard" pitchFamily="34" charset="0"/>
-                <a:ea typeface="Pretendard" pitchFamily="34" charset="-122"/>
-                <a:cs typeface="Pretendard" pitchFamily="34" charset="-120"/>
-              </a:rPr>
-              <a:t>바꾸고 싶을 때</a:t>
-            </a:r>
-            <a:endParaRPr lang="en-US" sz="1000" dirty="0"/>
-          </a:p>
-        </p:txBody>
-      </p:sp>
-      <p:sp>
-        <p:nvSpPr>
-          <p:cNvPr id="14" name="Text 10"/>
-          <p:cNvSpPr txBox="1"/>
-          <p:nvPr/>
-        </p:nvSpPr>
-        <p:spPr>
-          <a:xfrm>
-            <a:off x="685800" y="4846320"/>
-            <a:ext cx="7315200" cy="640080"/>
+              <a:t>사업자등록증 사진 한 장</a:t>
+            </a:r>
+            <a:endParaRPr lang="en-US" sz="1350" dirty="0"/>
+          </a:p>
+        </p:txBody>
+      </p:sp>
+      <p:sp>
+        <p:nvSpPr>
+          <p:cNvPr id="18" name="Text 15"/>
+          <p:cNvSpPr txBox="1"/>
+          <p:nvPr/>
+        </p:nvSpPr>
+        <p:spPr>
+          <a:xfrm>
+            <a:off x="1188720" y="4279392"/>
+            <a:ext cx="4937760" cy="457200"/>
           </a:xfrm>
           <a:prstGeom prst="rect">
             <a:avLst/>
@@ -8263,39 +7960,39 @@
           <a:p>
             <a:pPr indent="0" marL="0">
               <a:lnSpc>
-                <a:spcPct val="150000"/>
+                <a:spcPct val="140000"/>
               </a:lnSpc>
               <a:buNone/>
             </a:pPr>
             <a:r>
-              <a:rPr lang="en-US" sz="1150" dirty="0">
-                <a:solidFill>
-                  <a:srgbClr val="16181C"/>
-                </a:solidFill>
-                <a:latin typeface="Pretendard" pitchFamily="34" charset="0"/>
-                <a:ea typeface="Pretendard" pitchFamily="34" charset="-122"/>
-                <a:cs typeface="Pretendard" pitchFamily="34" charset="-120"/>
-              </a:rPr>
-              <a:t>가격, 수량, 유효기간은 언제든 바꾸고, 바쁘면 판매를 잠시 멈추면 됩니다. 계약 기간이 없으니 그만두는 것도 사장님 마음입니다.</a:t>
-            </a:r>
-            <a:endParaRPr lang="en-US" sz="1150" dirty="0"/>
-          </a:p>
-        </p:txBody>
-      </p:sp>
-      <p:sp>
-        <p:nvSpPr>
-          <p:cNvPr id="15" name="Shape 11"/>
+              <a:rPr lang="en-US" sz="1050" dirty="0">
+                <a:solidFill>
+                  <a:srgbClr val="6E6B68"/>
+                </a:solidFill>
+                <a:latin typeface="Pretendard" pitchFamily="34" charset="0"/>
+                <a:ea typeface="Pretendard" pitchFamily="34" charset="-122"/>
+                <a:cs typeface="Pretendard" pitchFamily="34" charset="-120"/>
+              </a:rPr>
+              <a:t>유어딜이 직접 확인하고 승인 문자를 드립니다. 그날부터 판매가 시작됩니다.</a:t>
+            </a:r>
+            <a:endParaRPr lang="en-US" sz="1050" dirty="0"/>
+          </a:p>
+        </p:txBody>
+      </p:sp>
+      <p:sp>
+        <p:nvSpPr>
+          <p:cNvPr id="19" name="Shape 16"/>
           <p:cNvSpPr/>
           <p:nvPr/>
         </p:nvSpPr>
         <p:spPr>
           <a:xfrm>
-            <a:off x="685800" y="5486400"/>
-            <a:ext cx="7315200" cy="685800"/>
+            <a:off x="685800" y="4809744"/>
+            <a:ext cx="5440680" cy="1417320"/>
           </a:xfrm>
           <a:prstGeom prst="roundRect">
             <a:avLst>
-              <a:gd name="adj" fmla="val 18667"/>
+              <a:gd name="adj" fmla="val 9032"/>
             </a:avLst>
           </a:prstGeom>
           <a:solidFill>
@@ -8311,30 +8008,30 @@
       </p:sp>
       <p:sp>
         <p:nvSpPr>
-          <p:cNvPr id="16" name="Text 12"/>
-          <p:cNvSpPr txBox="1"/>
-          <p:nvPr/>
-        </p:nvSpPr>
-        <p:spPr>
-          <a:xfrm>
-            <a:off x="960120" y="5486400"/>
-            <a:ext cx="6766560" cy="685800"/>
-          </a:xfrm>
-          <a:prstGeom prst="rect">
-            <a:avLst/>
-          </a:prstGeom>
-          <a:noFill/>
-          <a:ln/>
-        </p:spPr>
-        <p:txBody>
-          <a:bodyPr wrap="square" lIns="0" tIns="0" rIns="0" bIns="0" rtlCol="0" anchor="ctr"/>
-          <a:lstStyle/>
-          <a:p>
-            <a:pPr indent="0" marL="0">
-              <a:buNone/>
-            </a:pPr>
-            <a:r>
-              <a:rPr lang="en-US" sz="1200" b="1" dirty="0">
+          <p:cNvPr id="20" name="Text 17"/>
+          <p:cNvSpPr txBox="1"/>
+          <p:nvPr/>
+        </p:nvSpPr>
+        <p:spPr>
+          <a:xfrm>
+            <a:off x="960120" y="4946904"/>
+            <a:ext cx="4892040" cy="274320"/>
+          </a:xfrm>
+          <a:prstGeom prst="rect">
+            <a:avLst/>
+          </a:prstGeom>
+          <a:noFill/>
+          <a:ln/>
+        </p:spPr>
+        <p:txBody>
+          <a:bodyPr wrap="square" lIns="0" tIns="0" rIns="0" bIns="0" rtlCol="0" anchor="ctr"/>
+          <a:lstStyle/>
+          <a:p>
+            <a:pPr indent="0" marL="0">
+              <a:buNone/>
+            </a:pPr>
+            <a:r>
+              <a:rPr lang="en-US" sz="1250" b="1" spc="-30" kern="0" dirty="0">
                 <a:solidFill>
                   <a:srgbClr val="16181C"/>
                 </a:solidFill>
@@ -8342,29 +8039,120 @@
                 <a:ea typeface="Pretendard" pitchFamily="34" charset="-122"/>
                 <a:cs typeface="Pretendard" pitchFamily="34" charset="-120"/>
               </a:rPr>
-              <a:t>정산 계좌는 사장님 본인만 바꿀 수 있습니다. </a:t>
-            </a:r>
-            <a:pPr indent="0" marL="0">
-              <a:buNone/>
-            </a:pPr>
-            <a:r>
-              <a:rPr lang="en-US" sz="1200" dirty="0">
-                <a:solidFill>
-                  <a:srgbClr val="6E6B68"/>
-                </a:solidFill>
-                <a:latin typeface="Pretendard" pitchFamily="34" charset="0"/>
-                <a:ea typeface="Pretendard" pitchFamily="34" charset="-122"/>
-                <a:cs typeface="Pretendard" pitchFamily="34" charset="-120"/>
-              </a:rPr>
-              <a:t>운영을 누구에게 맡겨도.</a:t>
-            </a:r>
-            <a:endParaRPr lang="en-US" sz="1200" dirty="0"/>
+              <a:t>폰이 익숙하지 않으셔도 괜찮습니다</a:t>
+            </a:r>
+            <a:endParaRPr lang="en-US" sz="1250" dirty="0"/>
+          </a:p>
+        </p:txBody>
+      </p:sp>
+      <p:sp>
+        <p:nvSpPr>
+          <p:cNvPr id="21" name="Text 18"/>
+          <p:cNvSpPr txBox="1"/>
+          <p:nvPr/>
+        </p:nvSpPr>
+        <p:spPr>
+          <a:xfrm>
+            <a:off x="960120" y="5248656"/>
+            <a:ext cx="4892040" cy="822960"/>
+          </a:xfrm>
+          <a:prstGeom prst="rect">
+            <a:avLst/>
+          </a:prstGeom>
+          <a:noFill/>
+          <a:ln/>
+        </p:spPr>
+        <p:txBody>
+          <a:bodyPr wrap="square" lIns="0" tIns="0" rIns="0" bIns="0" rtlCol="0" anchor="t"/>
+          <a:lstStyle/>
+          <a:p>
+            <a:pPr indent="0" marL="0">
+              <a:lnSpc>
+                <a:spcPct val="140000"/>
+              </a:lnSpc>
+              <a:buNone/>
+            </a:pPr>
+            <a:r>
+              <a:rPr lang="en-US" sz="1050" dirty="0">
+                <a:solidFill>
+                  <a:srgbClr val="16181C"/>
+                </a:solidFill>
+                <a:latin typeface="Pretendard" pitchFamily="34" charset="0"/>
+                <a:ea typeface="Pretendard" pitchFamily="34" charset="-122"/>
+                <a:cs typeface="Pretendard" pitchFamily="34" charset="-120"/>
+              </a:rPr>
+              <a:t>카카오톡 채널로 말씀 주시면 등록부터 첫 이용권 올리는 것까지 전화로 같이 하거나, 저희가 대신 만들어 드립니다.</a:t>
+            </a:r>
+            <a:endParaRPr lang="en-US" sz="1050" dirty="0"/>
           </a:p>
         </p:txBody>
       </p:sp>
       <p:pic>
         <p:nvPicPr>
-          <p:cNvPr id="17" name="Image 2" descr="preencoded.png">    </p:cNvPr>
+          <p:cNvPr id="22" name="Image 1" descr="preencoded.png">    </p:cNvPr>
+          <p:cNvPicPr>
+            <a:picLocks noChangeAspect="1"/>
+          </p:cNvPicPr>
+          <p:nvPr/>
+        </p:nvPicPr>
+        <p:blipFill>
+          <a:blip r:embed="rId2"/>
+          <a:stretch>
+            <a:fillRect/>
+          </a:stretch>
+        </p:blipFill>
+        <p:spPr>
+          <a:xfrm>
+            <a:off x="6331375" y="1576495"/>
+            <a:ext cx="2392539" cy="4573689"/>
+          </a:xfrm>
+          <a:prstGeom prst="rect">
+            <a:avLst/>
+          </a:prstGeom>
+        </p:spPr>
+      </p:pic>
+      <p:sp>
+        <p:nvSpPr>
+          <p:cNvPr id="23" name="Text 19"/>
+          <p:cNvSpPr txBox="1"/>
+          <p:nvPr/>
+        </p:nvSpPr>
+        <p:spPr>
+          <a:xfrm>
+            <a:off x="6172200" y="6089904"/>
+            <a:ext cx="2710890" cy="274320"/>
+          </a:xfrm>
+          <a:prstGeom prst="rect">
+            <a:avLst/>
+          </a:prstGeom>
+          <a:noFill/>
+          <a:ln/>
+        </p:spPr>
+        <p:txBody>
+          <a:bodyPr wrap="square" lIns="0" tIns="0" rIns="0" bIns="0" rtlCol="0" anchor="ctr"/>
+          <a:lstStyle/>
+          <a:p>
+            <a:pPr algn="ctr" indent="0" marL="0">
+              <a:buNone/>
+            </a:pPr>
+            <a:r>
+              <a:rPr lang="en-US" sz="1050" dirty="0">
+                <a:solidFill>
+                  <a:srgbClr val="6E6B68"/>
+                </a:solidFill>
+                <a:latin typeface="Pretendard" pitchFamily="34" charset="0"/>
+                <a:ea typeface="Pretendard" pitchFamily="34" charset="-122"/>
+                <a:cs typeface="Pretendard" pitchFamily="34" charset="-120"/>
+              </a:rPr>
+              <a:t>카카오맵에서 내 가게 찾기</a:t>
+            </a:r>
+            <a:endParaRPr lang="en-US" sz="1050" dirty="0"/>
+          </a:p>
+        </p:txBody>
+      </p:sp>
+      <p:pic>
+        <p:nvPicPr>
+          <p:cNvPr id="24" name="Image 2" descr="preencoded.png">    </p:cNvPr>
           <p:cNvPicPr>
             <a:picLocks noChangeAspect="1"/>
           </p:cNvPicPr>
@@ -8378,8 +8166,8 @@
         </p:blipFill>
         <p:spPr>
           <a:xfrm>
-            <a:off x="8901093" y="717213"/>
-            <a:ext cx="2813205" cy="5377855"/>
+            <a:off x="8813665" y="1576495"/>
+            <a:ext cx="2392539" cy="4573689"/>
           </a:xfrm>
           <a:prstGeom prst="rect">
             <a:avLst/>
@@ -8388,14 +8176,14 @@
       </p:pic>
       <p:sp>
         <p:nvSpPr>
-          <p:cNvPr id="18" name="Text 13"/>
-          <p:cNvSpPr txBox="1"/>
-          <p:nvPr/>
-        </p:nvSpPr>
-        <p:spPr>
-          <a:xfrm>
-            <a:off x="8778240" y="5998464"/>
-            <a:ext cx="3058911" cy="274320"/>
+          <p:cNvPr id="25" name="Text 20"/>
+          <p:cNvSpPr txBox="1"/>
+          <p:nvPr/>
+        </p:nvSpPr>
+        <p:spPr>
+          <a:xfrm>
+            <a:off x="8654490" y="6089904"/>
+            <a:ext cx="2710890" cy="274320"/>
           </a:xfrm>
           <a:prstGeom prst="rect">
             <a:avLst/>
@@ -8419,7 +8207,7 @@
                 <a:ea typeface="Pretendard" pitchFamily="34" charset="-122"/>
                 <a:cs typeface="Pretendard" pitchFamily="34" charset="-120"/>
               </a:rPr>
-              <a:t>정산 화면 (예시 데이터)</a:t>
+              <a:t>"누가 운영하나요" 화면</a:t>
             </a:r>
             <a:endParaRPr lang="en-US" sz="1050" dirty="0"/>
           </a:p>
@@ -8568,7 +8356,7 @@
         <p:spPr>
           <a:xfrm>
             <a:off x="685800" y="1051560"/>
-            <a:ext cx="10820095" cy="822960"/>
+            <a:ext cx="8046720" cy="822960"/>
           </a:xfrm>
           <a:prstGeom prst="rect">
             <a:avLst/>
@@ -8595,7 +8383,7 @@
                 <a:ea typeface="Pretendard" pitchFamily="34" charset="-122"/>
                 <a:cs typeface="Pretendard" pitchFamily="34" charset="-120"/>
               </a:rPr>
-              <a:t>일단 메뉴 하나만 올려보세요.</a:t>
+              <a:t>사장님은 장사만 하세요. 나머지는 알아서 돌아갑니다.</a:t>
             </a:r>
             <a:endParaRPr lang="en-US" sz="2700" dirty="0"/>
           </a:p>
@@ -8603,18 +8391,349 @@
       </p:sp>
       <p:sp>
         <p:nvSpPr>
-          <p:cNvPr id="6" name="Shape 3"/>
+          <p:cNvPr id="6" name="Text 3"/>
+          <p:cNvSpPr txBox="1"/>
+          <p:nvPr/>
+        </p:nvSpPr>
+        <p:spPr>
+          <a:xfrm>
+            <a:off x="685800" y="1965960"/>
+            <a:ext cx="3657600" cy="237744"/>
+          </a:xfrm>
+          <a:prstGeom prst="rect">
+            <a:avLst/>
+          </a:prstGeom>
+          <a:noFill/>
+          <a:ln/>
+        </p:spPr>
+        <p:txBody>
+          <a:bodyPr wrap="square" lIns="0" tIns="0" rIns="0" bIns="0" rtlCol="0" anchor="ctr"/>
+          <a:lstStyle/>
+          <a:p>
+            <a:pPr indent="0" marL="0">
+              <a:buNone/>
+            </a:pPr>
+            <a:r>
+              <a:rPr lang="en-US" sz="1000" b="1" spc="120" kern="0" dirty="0">
+                <a:solidFill>
+                  <a:srgbClr val="8A8580"/>
+                </a:solidFill>
+                <a:latin typeface="Pretendard" pitchFamily="34" charset="0"/>
+                <a:ea typeface="Pretendard" pitchFamily="34" charset="-122"/>
+                <a:cs typeface="Pretendard" pitchFamily="34" charset="-120"/>
+              </a:rPr>
+              <a:t>운영</a:t>
+            </a:r>
+            <a:endParaRPr lang="en-US" sz="1000" dirty="0"/>
+          </a:p>
+        </p:txBody>
+      </p:sp>
+      <p:sp>
+        <p:nvSpPr>
+          <p:cNvPr id="7" name="Shape 4"/>
           <p:cNvSpPr/>
           <p:nvPr/>
         </p:nvSpPr>
         <p:spPr>
           <a:xfrm>
-            <a:off x="685800" y="1965960"/>
-            <a:ext cx="6949440" cy="1783080"/>
+            <a:off x="685800" y="2286000"/>
+            <a:ext cx="420624" cy="420624"/>
+          </a:xfrm>
+          <a:prstGeom prst="ellipse">
+            <a:avLst/>
+          </a:prstGeom>
+          <a:solidFill>
+            <a:srgbClr val="E4EDFD"/>
+          </a:solidFill>
+          <a:ln w="12700">
+            <a:solidFill>
+              <a:srgbClr val="E4EDFD"/>
+            </a:solidFill>
+            <a:prstDash val="solid"/>
+          </a:ln>
+        </p:spPr>
+      </p:sp>
+      <p:pic>
+        <p:nvPicPr>
+          <p:cNvPr id="8" name="Image 1" descr="preencoded.png">    </p:cNvPr>
+          <p:cNvPicPr>
+            <a:picLocks noChangeAspect="1"/>
+          </p:cNvPicPr>
+          <p:nvPr/>
+        </p:nvPicPr>
+        <p:blipFill>
+          <a:blip r:embed="rId2"/>
+          <a:stretch>
+            <a:fillRect/>
+          </a:stretch>
+        </p:blipFill>
+        <p:spPr>
+          <a:xfrm>
+            <a:off x="795162" y="2395362"/>
+            <a:ext cx="201900" cy="201900"/>
+          </a:xfrm>
+          <a:prstGeom prst="rect">
+            <a:avLst/>
+          </a:prstGeom>
+        </p:spPr>
+      </p:pic>
+      <p:sp>
+        <p:nvSpPr>
+          <p:cNvPr id="9" name="Text 5"/>
+          <p:cNvSpPr txBox="1"/>
+          <p:nvPr/>
+        </p:nvSpPr>
+        <p:spPr>
+          <a:xfrm>
+            <a:off x="1280160" y="2286000"/>
+            <a:ext cx="6675120" cy="292608"/>
+          </a:xfrm>
+          <a:prstGeom prst="rect">
+            <a:avLst/>
+          </a:prstGeom>
+          <a:noFill/>
+          <a:ln/>
+        </p:spPr>
+        <p:txBody>
+          <a:bodyPr wrap="square" lIns="0" tIns="0" rIns="0" bIns="0" rtlCol="0" anchor="ctr"/>
+          <a:lstStyle/>
+          <a:p>
+            <a:pPr indent="0" marL="0">
+              <a:buNone/>
+            </a:pPr>
+            <a:r>
+              <a:rPr lang="en-US" sz="1350" b="1" spc="-30" kern="0" dirty="0">
+                <a:solidFill>
+                  <a:srgbClr val="16181C"/>
+                </a:solidFill>
+                <a:latin typeface="Pretendard" pitchFamily="34" charset="0"/>
+                <a:ea typeface="Pretendard" pitchFamily="34" charset="-122"/>
+                <a:cs typeface="Pretendard" pitchFamily="34" charset="-120"/>
+              </a:rPr>
+              <a:t>손님이 오면 폰으로 QR 한 번 찍기</a:t>
+            </a:r>
+            <a:endParaRPr lang="en-US" sz="1350" dirty="0"/>
+          </a:p>
+        </p:txBody>
+      </p:sp>
+      <p:sp>
+        <p:nvSpPr>
+          <p:cNvPr id="10" name="Text 6"/>
+          <p:cNvSpPr txBox="1"/>
+          <p:nvPr/>
+        </p:nvSpPr>
+        <p:spPr>
+          <a:xfrm>
+            <a:off x="1280160" y="2606040"/>
+            <a:ext cx="6675120" cy="320040"/>
+          </a:xfrm>
+          <a:prstGeom prst="rect">
+            <a:avLst/>
+          </a:prstGeom>
+          <a:noFill/>
+          <a:ln/>
+        </p:spPr>
+        <p:txBody>
+          <a:bodyPr wrap="square" lIns="0" tIns="0" rIns="0" bIns="0" rtlCol="0" anchor="t"/>
+          <a:lstStyle/>
+          <a:p>
+            <a:pPr indent="0" marL="0">
+              <a:lnSpc>
+                <a:spcPct val="140000"/>
+              </a:lnSpc>
+              <a:buNone/>
+            </a:pPr>
+            <a:r>
+              <a:rPr lang="en-US" sz="1050" dirty="0">
+                <a:solidFill>
+                  <a:srgbClr val="6E6B68"/>
+                </a:solidFill>
+                <a:latin typeface="Pretendard" pitchFamily="34" charset="0"/>
+                <a:ea typeface="Pretendard" pitchFamily="34" charset="-122"/>
+                <a:cs typeface="Pretendard" pitchFamily="34" charset="-120"/>
+              </a:rPr>
+              <a:t>하실 일은 이게 전부입니다.</a:t>
+            </a:r>
+            <a:endParaRPr lang="en-US" sz="1050" dirty="0"/>
+          </a:p>
+        </p:txBody>
+      </p:sp>
+      <p:sp>
+        <p:nvSpPr>
+          <p:cNvPr id="11" name="Text 7"/>
+          <p:cNvSpPr txBox="1"/>
+          <p:nvPr/>
+        </p:nvSpPr>
+        <p:spPr>
+          <a:xfrm>
+            <a:off x="685800" y="3108960"/>
+            <a:ext cx="3657600" cy="237744"/>
+          </a:xfrm>
+          <a:prstGeom prst="rect">
+            <a:avLst/>
+          </a:prstGeom>
+          <a:noFill/>
+          <a:ln/>
+        </p:spPr>
+        <p:txBody>
+          <a:bodyPr wrap="square" lIns="0" tIns="0" rIns="0" bIns="0" rtlCol="0" anchor="ctr"/>
+          <a:lstStyle/>
+          <a:p>
+            <a:pPr indent="0" marL="0">
+              <a:buNone/>
+            </a:pPr>
+            <a:r>
+              <a:rPr lang="en-US" sz="1000" b="1" spc="120" kern="0" dirty="0">
+                <a:solidFill>
+                  <a:srgbClr val="8A8580"/>
+                </a:solidFill>
+                <a:latin typeface="Pretendard" pitchFamily="34" charset="0"/>
+                <a:ea typeface="Pretendard" pitchFamily="34" charset="-122"/>
+                <a:cs typeface="Pretendard" pitchFamily="34" charset="-120"/>
+              </a:rPr>
+              <a:t>정산</a:t>
+            </a:r>
+            <a:endParaRPr lang="en-US" sz="1000" dirty="0"/>
+          </a:p>
+        </p:txBody>
+      </p:sp>
+      <p:sp>
+        <p:nvSpPr>
+          <p:cNvPr id="12" name="Text 8"/>
+          <p:cNvSpPr txBox="1"/>
+          <p:nvPr/>
+        </p:nvSpPr>
+        <p:spPr>
+          <a:xfrm>
+            <a:off x="685800" y="3429000"/>
+            <a:ext cx="7315200" cy="1143000"/>
+          </a:xfrm>
+          <a:prstGeom prst="rect">
+            <a:avLst/>
+          </a:prstGeom>
+          <a:noFill/>
+          <a:ln/>
+        </p:spPr>
+        <p:txBody>
+          <a:bodyPr wrap="square" lIns="0" tIns="0" rIns="0" bIns="0" rtlCol="0" anchor="t"/>
+          <a:lstStyle/>
+          <a:p>
+            <a:pPr indent="0" marL="0">
+              <a:lnSpc>
+                <a:spcPct val="150000"/>
+              </a:lnSpc>
+              <a:buNone/>
+            </a:pPr>
+            <a:r>
+              <a:rPr lang="en-US" sz="1150" dirty="0">
+                <a:solidFill>
+                  <a:srgbClr val="16181C"/>
+                </a:solidFill>
+                <a:latin typeface="Pretendard" pitchFamily="34" charset="0"/>
+                <a:ea typeface="Pretendard" pitchFamily="34" charset="-122"/>
+                <a:cs typeface="Pretendard" pitchFamily="34" charset="-120"/>
+              </a:rPr>
+              <a:t>손님이 실제로 쓴 이용권만 모아 매주 등록 계좌로 들어옵니다. 수수료 뗀 금액 그대로, 별도 정산 수수료 없이. 얼마 팔렸고 얼마 들어올지는 매장 화면에 항상 떠 있어서 궁금해서 전화하실 일이 없습니다. 어떤 이용권이 언제 많이 팔리는지도 보입니다. 다음 이용권을 뭘로 올릴지, 숫자가 알려줍니다.</a:t>
+            </a:r>
+            <a:endParaRPr lang="en-US" sz="1150" dirty="0"/>
+          </a:p>
+        </p:txBody>
+      </p:sp>
+      <p:sp>
+        <p:nvSpPr>
+          <p:cNvPr id="13" name="Text 9"/>
+          <p:cNvSpPr txBox="1"/>
+          <p:nvPr/>
+        </p:nvSpPr>
+        <p:spPr>
+          <a:xfrm>
+            <a:off x="685800" y="4617720"/>
+            <a:ext cx="3657600" cy="237744"/>
+          </a:xfrm>
+          <a:prstGeom prst="rect">
+            <a:avLst/>
+          </a:prstGeom>
+          <a:noFill/>
+          <a:ln/>
+        </p:spPr>
+        <p:txBody>
+          <a:bodyPr wrap="square" lIns="0" tIns="0" rIns="0" bIns="0" rtlCol="0" anchor="ctr"/>
+          <a:lstStyle/>
+          <a:p>
+            <a:pPr indent="0" marL="0">
+              <a:buNone/>
+            </a:pPr>
+            <a:r>
+              <a:rPr lang="en-US" sz="1000" b="1" spc="120" kern="0" dirty="0">
+                <a:solidFill>
+                  <a:srgbClr val="8A8580"/>
+                </a:solidFill>
+                <a:latin typeface="Pretendard" pitchFamily="34" charset="0"/>
+                <a:ea typeface="Pretendard" pitchFamily="34" charset="-122"/>
+                <a:cs typeface="Pretendard" pitchFamily="34" charset="-120"/>
+              </a:rPr>
+              <a:t>바꾸고 싶을 때</a:t>
+            </a:r>
+            <a:endParaRPr lang="en-US" sz="1000" dirty="0"/>
+          </a:p>
+        </p:txBody>
+      </p:sp>
+      <p:sp>
+        <p:nvSpPr>
+          <p:cNvPr id="14" name="Text 10"/>
+          <p:cNvSpPr txBox="1"/>
+          <p:nvPr/>
+        </p:nvSpPr>
+        <p:spPr>
+          <a:xfrm>
+            <a:off x="685800" y="4937760"/>
+            <a:ext cx="7315200" cy="502920"/>
+          </a:xfrm>
+          <a:prstGeom prst="rect">
+            <a:avLst/>
+          </a:prstGeom>
+          <a:noFill/>
+          <a:ln/>
+        </p:spPr>
+        <p:txBody>
+          <a:bodyPr wrap="square" lIns="0" tIns="0" rIns="0" bIns="0" rtlCol="0" anchor="t"/>
+          <a:lstStyle/>
+          <a:p>
+            <a:pPr indent="0" marL="0">
+              <a:lnSpc>
+                <a:spcPct val="150000"/>
+              </a:lnSpc>
+              <a:buNone/>
+            </a:pPr>
+            <a:r>
+              <a:rPr lang="en-US" sz="1150" dirty="0">
+                <a:solidFill>
+                  <a:srgbClr val="16181C"/>
+                </a:solidFill>
+                <a:latin typeface="Pretendard" pitchFamily="34" charset="0"/>
+                <a:ea typeface="Pretendard" pitchFamily="34" charset="-122"/>
+                <a:cs typeface="Pretendard" pitchFamily="34" charset="-120"/>
+              </a:rPr>
+              <a:t>가격, 수량, 유효기간은 언제든 수정, 바쁘면 판매 중지. 계약 기간이 없으니 그만두는 것도 사장님 마음입니다.</a:t>
+            </a:r>
+            <a:endParaRPr lang="en-US" sz="1150" dirty="0"/>
+          </a:p>
+        </p:txBody>
+      </p:sp>
+      <p:sp>
+        <p:nvSpPr>
+          <p:cNvPr id="15" name="Shape 11"/>
+          <p:cNvSpPr/>
+          <p:nvPr/>
+        </p:nvSpPr>
+        <p:spPr>
+          <a:xfrm>
+            <a:off x="685800" y="5486400"/>
+            <a:ext cx="7315200" cy="685800"/>
           </a:xfrm>
           <a:prstGeom prst="roundRect">
             <a:avLst>
-              <a:gd name="adj" fmla="val 7179"/>
+              <a:gd name="adj" fmla="val 18667"/>
             </a:avLst>
           </a:prstGeom>
           <a:solidFill>
@@ -8630,6 +8749,325 @@
       </p:sp>
       <p:sp>
         <p:nvSpPr>
+          <p:cNvPr id="16" name="Text 12"/>
+          <p:cNvSpPr txBox="1"/>
+          <p:nvPr/>
+        </p:nvSpPr>
+        <p:spPr>
+          <a:xfrm>
+            <a:off x="960120" y="5486400"/>
+            <a:ext cx="6766560" cy="685800"/>
+          </a:xfrm>
+          <a:prstGeom prst="rect">
+            <a:avLst/>
+          </a:prstGeom>
+          <a:noFill/>
+          <a:ln/>
+        </p:spPr>
+        <p:txBody>
+          <a:bodyPr wrap="square" lIns="0" tIns="0" rIns="0" bIns="0" rtlCol="0" anchor="ctr"/>
+          <a:lstStyle/>
+          <a:p>
+            <a:pPr indent="0" marL="0">
+              <a:buNone/>
+            </a:pPr>
+            <a:r>
+              <a:rPr lang="en-US" sz="1200" b="1" dirty="0">
+                <a:solidFill>
+                  <a:srgbClr val="16181C"/>
+                </a:solidFill>
+                <a:latin typeface="Pretendard" pitchFamily="34" charset="0"/>
+                <a:ea typeface="Pretendard" pitchFamily="34" charset="-122"/>
+                <a:cs typeface="Pretendard" pitchFamily="34" charset="-120"/>
+              </a:rPr>
+              <a:t>정산 계좌는 사장님 본인만 바꿀 수 있습니다. </a:t>
+            </a:r>
+            <a:pPr indent="0" marL="0">
+              <a:buNone/>
+            </a:pPr>
+            <a:r>
+              <a:rPr lang="en-US" sz="1200" dirty="0">
+                <a:solidFill>
+                  <a:srgbClr val="6E6B68"/>
+                </a:solidFill>
+                <a:latin typeface="Pretendard" pitchFamily="34" charset="0"/>
+                <a:ea typeface="Pretendard" pitchFamily="34" charset="-122"/>
+                <a:cs typeface="Pretendard" pitchFamily="34" charset="-120"/>
+              </a:rPr>
+              <a:t>운영을 누구에게 맡겨도.</a:t>
+            </a:r>
+            <a:endParaRPr lang="en-US" sz="1200" dirty="0"/>
+          </a:p>
+        </p:txBody>
+      </p:sp>
+      <p:pic>
+        <p:nvPicPr>
+          <p:cNvPr id="17" name="Image 2" descr="preencoded.png">    </p:cNvPr>
+          <p:cNvPicPr>
+            <a:picLocks noChangeAspect="1"/>
+          </p:cNvPicPr>
+          <p:nvPr/>
+        </p:nvPicPr>
+        <p:blipFill>
+          <a:blip r:embed="rId3"/>
+          <a:stretch>
+            <a:fillRect/>
+          </a:stretch>
+        </p:blipFill>
+        <p:spPr>
+          <a:xfrm>
+            <a:off x="8901093" y="717213"/>
+            <a:ext cx="2813205" cy="5377855"/>
+          </a:xfrm>
+          <a:prstGeom prst="rect">
+            <a:avLst/>
+          </a:prstGeom>
+        </p:spPr>
+      </p:pic>
+      <p:sp>
+        <p:nvSpPr>
+          <p:cNvPr id="18" name="Text 13"/>
+          <p:cNvSpPr txBox="1"/>
+          <p:nvPr/>
+        </p:nvSpPr>
+        <p:spPr>
+          <a:xfrm>
+            <a:off x="8778240" y="5998464"/>
+            <a:ext cx="3058911" cy="274320"/>
+          </a:xfrm>
+          <a:prstGeom prst="rect">
+            <a:avLst/>
+          </a:prstGeom>
+          <a:noFill/>
+          <a:ln/>
+        </p:spPr>
+        <p:txBody>
+          <a:bodyPr wrap="square" lIns="0" tIns="0" rIns="0" bIns="0" rtlCol="0" anchor="ctr"/>
+          <a:lstStyle/>
+          <a:p>
+            <a:pPr algn="ctr" indent="0" marL="0">
+              <a:buNone/>
+            </a:pPr>
+            <a:r>
+              <a:rPr lang="en-US" sz="1050" dirty="0">
+                <a:solidFill>
+                  <a:srgbClr val="6E6B68"/>
+                </a:solidFill>
+                <a:latin typeface="Pretendard" pitchFamily="34" charset="0"/>
+                <a:ea typeface="Pretendard" pitchFamily="34" charset="-122"/>
+                <a:cs typeface="Pretendard" pitchFamily="34" charset="-120"/>
+              </a:rPr>
+              <a:t>정산 화면 (예시 데이터)</a:t>
+            </a:r>
+            <a:endParaRPr lang="en-US" sz="1050" dirty="0"/>
+          </a:p>
+        </p:txBody>
+      </p:sp>
+    </p:spTree>
+  </p:cSld>
+  <p:clrMapOvr>
+    <a:masterClrMapping/>
+  </p:clrMapOvr>
+</p:sld>
+</file>
+
+<file path=ppt/slides/slide9.xml><?xml version="1.0" encoding="utf-8"?>
+<p:sld xmlns:a="http://schemas.openxmlformats.org/drawingml/2006/main" xmlns:r="http://schemas.openxmlformats.org/officeDocument/2006/relationships" xmlns:p="http://schemas.openxmlformats.org/presentationml/2006/main">
+  <p:cSld name="Slide 9">
+    <p:bg>
+      <p:bgPr>
+        <a:solidFill>
+          <a:srgbClr val="F8F7FC"/>
+        </a:solidFill>
+      </p:bgPr>
+    </p:bg>
+    <p:spTree>
+      <p:nvGrpSpPr>
+        <p:cNvPr id="1" name=""/>
+        <p:cNvGrpSpPr/>
+        <p:nvPr/>
+      </p:nvGrpSpPr>
+      <p:grpSpPr>
+        <a:xfrm>
+          <a:off x="0" y="0"/>
+          <a:ext cx="0" cy="0"/>
+          <a:chOff x="0" y="0"/>
+          <a:chExt cx="0" cy="0"/>
+        </a:xfrm>
+      </p:grpSpPr>
+      <p:pic>
+        <p:nvPicPr>
+          <p:cNvPr id="2" name="Image 0" descr="preencoded.png">    </p:cNvPr>
+          <p:cNvPicPr>
+            <a:picLocks noChangeAspect="1"/>
+          </p:cNvPicPr>
+          <p:nvPr/>
+        </p:nvPicPr>
+        <p:blipFill>
+          <a:blip r:embed="rId1"/>
+          <a:stretch>
+            <a:fillRect/>
+          </a:stretch>
+        </p:blipFill>
+        <p:spPr>
+          <a:xfrm>
+            <a:off x="685800" y="457200"/>
+            <a:ext cx="867066" cy="237744"/>
+          </a:xfrm>
+          <a:prstGeom prst="rect">
+            <a:avLst/>
+          </a:prstGeom>
+        </p:spPr>
+      </p:pic>
+      <p:sp>
+        <p:nvSpPr>
+          <p:cNvPr id="3" name="Text 0"/>
+          <p:cNvSpPr txBox="1"/>
+          <p:nvPr/>
+        </p:nvSpPr>
+        <p:spPr>
+          <a:xfrm>
+            <a:off x="685800" y="6291072"/>
+            <a:ext cx="5486400" cy="228600"/>
+          </a:xfrm>
+          <a:prstGeom prst="rect">
+            <a:avLst/>
+          </a:prstGeom>
+          <a:noFill/>
+          <a:ln/>
+        </p:spPr>
+        <p:txBody>
+          <a:bodyPr wrap="square" lIns="0" tIns="0" rIns="0" bIns="0" rtlCol="0" anchor="ctr"/>
+          <a:lstStyle/>
+          <a:p>
+            <a:pPr indent="0" marL="0">
+              <a:buNone/>
+            </a:pPr>
+            <a:r>
+              <a:rPr lang="en-US" sz="900" spc="50" kern="0" dirty="0">
+                <a:solidFill>
+                  <a:srgbClr val="8A8580"/>
+                </a:solidFill>
+                <a:latin typeface="Pretendard" pitchFamily="34" charset="0"/>
+                <a:ea typeface="Pretendard" pitchFamily="34" charset="-122"/>
+                <a:cs typeface="Pretendard" pitchFamily="34" charset="-120"/>
+              </a:rPr>
+              <a:t>유어딜 매장 사장님 소개</a:t>
+            </a:r>
+            <a:endParaRPr lang="en-US" sz="900" dirty="0"/>
+          </a:p>
+        </p:txBody>
+      </p:sp>
+      <p:sp>
+        <p:nvSpPr>
+          <p:cNvPr id="4" name="Text 1"/>
+          <p:cNvSpPr txBox="1"/>
+          <p:nvPr/>
+        </p:nvSpPr>
+        <p:spPr>
+          <a:xfrm>
+            <a:off x="10774375" y="6291072"/>
+            <a:ext cx="731520" cy="228600"/>
+          </a:xfrm>
+          <a:prstGeom prst="rect">
+            <a:avLst/>
+          </a:prstGeom>
+          <a:noFill/>
+          <a:ln/>
+        </p:spPr>
+        <p:txBody>
+          <a:bodyPr wrap="square" lIns="0" tIns="0" rIns="0" bIns="0" rtlCol="0" anchor="ctr"/>
+          <a:lstStyle/>
+          <a:p>
+            <a:pPr algn="r" indent="0" marL="0">
+              <a:buNone/>
+            </a:pPr>
+            <a:r>
+              <a:rPr lang="en-US" sz="950" b="1" dirty="0">
+                <a:solidFill>
+                  <a:srgbClr val="16181C"/>
+                </a:solidFill>
+                <a:latin typeface="Pretendard" pitchFamily="34" charset="0"/>
+                <a:ea typeface="Pretendard" pitchFamily="34" charset="-122"/>
+                <a:cs typeface="Pretendard" pitchFamily="34" charset="-120"/>
+              </a:rPr>
+              <a:t>09</a:t>
+            </a:r>
+            <a:endParaRPr lang="en-US" sz="950" dirty="0"/>
+          </a:p>
+        </p:txBody>
+      </p:sp>
+      <p:sp>
+        <p:nvSpPr>
+          <p:cNvPr id="5" name="Text 2"/>
+          <p:cNvSpPr txBox="1"/>
+          <p:nvPr/>
+        </p:nvSpPr>
+        <p:spPr>
+          <a:xfrm>
+            <a:off x="685800" y="1051560"/>
+            <a:ext cx="10820095" cy="822960"/>
+          </a:xfrm>
+          <a:prstGeom prst="rect">
+            <a:avLst/>
+          </a:prstGeom>
+          <a:noFill/>
+          <a:ln/>
+        </p:spPr>
+        <p:txBody>
+          <a:bodyPr wrap="square" lIns="0" tIns="0" rIns="0" bIns="0" rtlCol="0" anchor="t"/>
+          <a:lstStyle/>
+          <a:p>
+            <a:pPr indent="0" marL="0">
+              <a:lnSpc>
+                <a:spcPct val="115000"/>
+              </a:lnSpc>
+              <a:buNone/>
+            </a:pPr>
+            <a:r>
+              <a:rPr lang="en-US" sz="2700" b="1" spc="-60" kern="0" dirty="0">
+                <a:solidFill>
+                  <a:srgbClr val="16181C"/>
+                </a:solidFill>
+                <a:latin typeface="Pretendard" pitchFamily="34" charset="0"/>
+                <a:ea typeface="Pretendard" pitchFamily="34" charset="-122"/>
+                <a:cs typeface="Pretendard" pitchFamily="34" charset="-120"/>
+              </a:rPr>
+              <a:t>일단 메뉴 하나만 올려보세요.</a:t>
+            </a:r>
+            <a:endParaRPr lang="en-US" sz="2700" dirty="0"/>
+          </a:p>
+        </p:txBody>
+      </p:sp>
+      <p:sp>
+        <p:nvSpPr>
+          <p:cNvPr id="6" name="Shape 3"/>
+          <p:cNvSpPr/>
+          <p:nvPr/>
+        </p:nvSpPr>
+        <p:spPr>
+          <a:xfrm>
+            <a:off x="685800" y="1965960"/>
+            <a:ext cx="6949440" cy="1783080"/>
+          </a:xfrm>
+          <a:prstGeom prst="roundRect">
+            <a:avLst>
+              <a:gd name="adj" fmla="val 7179"/>
+            </a:avLst>
+          </a:prstGeom>
+          <a:solidFill>
+            <a:srgbClr val="EEF3FE"/>
+          </a:solidFill>
+          <a:ln w="12700">
+            <a:solidFill>
+              <a:srgbClr val="EEF3FE"/>
+            </a:solidFill>
+            <a:prstDash val="solid"/>
+          </a:ln>
+        </p:spPr>
+      </p:sp>
+      <p:sp>
+        <p:nvSpPr>
           <p:cNvPr id="7" name="Text 4"/>
           <p:cNvSpPr txBox="1"/>
           <p:nvPr/>
@@ -8637,7 +9075,7 @@
         <p:spPr>
           <a:xfrm>
             <a:off x="960120" y="2057400"/>
-            <a:ext cx="6400800" cy="1005840"/>
+            <a:ext cx="6400800" cy="914400"/>
           </a:xfrm>
           <a:prstGeom prst="rect">
             <a:avLst/>
@@ -8664,7 +9102,7 @@
                 <a:ea typeface="Pretendard" pitchFamily="34" charset="-122"/>
                 <a:cs typeface="Pretendard" pitchFamily="34" charset="-120"/>
               </a:rPr>
-              <a:t>가입비도 없고, 계약 기간도 없고, 안 팔리면 나가는 돈도 없습니다. 제일 자신 있는 메뉴 하나로 시작해서, 맞는다 싶으면 늘리고 아니면 내리면 됩니다. 그만두실 때 위약금도, 눈치 볼 사람도 없습니다.</a:t>
+              <a:t>가입비도 없고, 계약 기간도 없고, 안 팔리면 나가는 돈도 없습니다. 제일 자신 있는 메뉴 하나로 시작해서, 맞는다 싶으면 늘리고 아니면 내리면 됩니다.</a:t>
             </a:r>
             <a:endParaRPr lang="en-US" sz="1200" dirty="0"/>
           </a:p>
@@ -8678,8 +9116,8 @@
         </p:nvSpPr>
         <p:spPr>
           <a:xfrm>
-            <a:off x="960120" y="3108960"/>
-            <a:ext cx="6400800" cy="548640"/>
+            <a:off x="960120" y="3017520"/>
+            <a:ext cx="6400800" cy="640080"/>
           </a:xfrm>
           <a:prstGeom prst="rect">
             <a:avLst/>
@@ -8887,7 +9325,7 @@
                 <a:ea typeface="Pretendard" pitchFamily="34" charset="-122"/>
                 <a:cs typeface="Pretendard" pitchFamily="34" charset="-120"/>
               </a:rPr>
-              <a:t>urdeal.kr 에서 카카오로 로그인합니다. 별도 가입이 없습니다.</a:t>
+              <a:t>urdeal.kr 에서 카카오로 로그인합니다.</a:t>
             </a:r>
             <a:endParaRPr lang="en-US" sz="1050" dirty="0"/>
           </a:p>

--- a/docs/business/proposals/urdeal-store-owner-deck.pptx
+++ b/docs/business/proposals/urdeal-store-owner-deck.pptx
@@ -774,7 +774,7 @@
           <a:p>
             <a:r>
               <a:rPr lang="en-US" dirty="0"/>
-              <a:t>노출 4곳: 홈 섹션/지도(/map)/검색·카톡 OG/유어쇼츠(/videos). 크리에이터 풀: /api/admin/ads/influencer-pool/stats 2026-09-13 실측 youtube 18,170 / naver_blog 172,755 (전체 201,471, 연락 가능 46,220). 소개비: 매장 제안 %·매장 부담·상한 없음.</a:t>
+              <a:t>노출 4곳: 홈 섹션/지도(/map)/검색·카톡 OG/유어쇼츠(/videos). 크리에이터 풀: /api/admin/ads/influencer-pool/stats 2026-09-13 실측 youtube 18,170 / naver_blog 172,755. 오른쪽은 /admin/influencer-pool 데스크톱 캡처(capture-admin-shots.mjs — 이메일·IG·TT 블러, 아바타는 외부 CDN 차단이라 중립 원). 소개비: 매장 제안 %·매장 부담.</a:t>
             </a:r>
             <a:endParaRPr lang="en-US" dirty="0"/>
           </a:p>
@@ -4638,8 +4638,8 @@
         </p:nvSpPr>
         <p:spPr>
           <a:xfrm>
-            <a:off x="685800" y="1828800"/>
-            <a:ext cx="10820095" cy="548640"/>
+            <a:off x="685800" y="1783080"/>
+            <a:ext cx="10820095" cy="960120"/>
           </a:xfrm>
           <a:prstGeom prst="rect">
             <a:avLst/>
@@ -4658,7 +4658,7 @@
               <a:buNone/>
             </a:pPr>
             <a:r>
-              <a:rPr lang="en-US" sz="1250" dirty="0">
+              <a:rPr lang="en-US" sz="1200" dirty="0">
                 <a:solidFill>
                   <a:srgbClr val="6E6B68"/>
                 </a:solidFill>
@@ -4666,26 +4666,713 @@
                 <a:ea typeface="Pretendard" pitchFamily="34" charset="-122"/>
                 <a:cs typeface="Pretendard" pitchFamily="34" charset="-120"/>
               </a:rPr>
-              <a:t>등록만 하면 유어딜 홈 인기 목록, 지도의 내 주변 이용권, 검색과 카카오톡 공유 카드, 영상 아래 구매 버튼, 네 곳에 자동으로 뜹니다.</a:t>
-            </a:r>
-            <a:endParaRPr lang="en-US" sz="1250" dirty="0"/>
-          </a:p>
-        </p:txBody>
-      </p:sp>
-      <p:sp>
-        <p:nvSpPr>
-          <p:cNvPr id="7" name="Shape 4"/>
+              <a:t>등록만 하면 유어딜 홈 인기 목록, 지도의 내 주변 이용권, 검색과 카카오톡 공유 카드, 영상 아래 구매 버튼, 네 곳에 자동으로 뜹니다. 그리고 저희에겐 파는 사람들이 있습니다. 유어딜이 확보한 크리에이터 풀, 유튜버 18,170명과 네이버 블로거 172,755명(2026년 9월 기준)에게 사장님의 이용권 판매를 제안합니다. 그 링크로 팔린 것에만 소개비가 나가고, 미리 주는 돈은 없습니다.</a:t>
+            </a:r>
+            <a:endParaRPr lang="en-US" sz="1200" dirty="0"/>
+          </a:p>
+        </p:txBody>
+      </p:sp>
+      <p:sp>
+        <p:nvSpPr>
+          <p:cNvPr id="7" name="Text 4"/>
+          <p:cNvSpPr txBox="1"/>
+          <p:nvPr/>
+        </p:nvSpPr>
+        <p:spPr>
+          <a:xfrm>
+            <a:off x="685800" y="2816352"/>
+            <a:ext cx="3611880" cy="237744"/>
+          </a:xfrm>
+          <a:prstGeom prst="rect">
+            <a:avLst/>
+          </a:prstGeom>
+          <a:noFill/>
+          <a:ln/>
+        </p:spPr>
+        <p:txBody>
+          <a:bodyPr wrap="square" lIns="0" tIns="0" rIns="0" bIns="0" rtlCol="0" anchor="ctr"/>
+          <a:lstStyle/>
+          <a:p>
+            <a:pPr indent="0" marL="0">
+              <a:buNone/>
+            </a:pPr>
+            <a:r>
+              <a:rPr lang="en-US" sz="1000" b="1" spc="120" kern="0" dirty="0">
+                <a:solidFill>
+                  <a:srgbClr val="8A8580"/>
+                </a:solidFill>
+                <a:latin typeface="Pretendard" pitchFamily="34" charset="0"/>
+                <a:ea typeface="Pretendard" pitchFamily="34" charset="-122"/>
+                <a:cs typeface="Pretendard" pitchFamily="34" charset="-120"/>
+              </a:rPr>
+              <a:t>자동 노출</a:t>
+            </a:r>
+            <a:endParaRPr lang="en-US" sz="1000" dirty="0"/>
+          </a:p>
+        </p:txBody>
+      </p:sp>
+      <p:sp>
+        <p:nvSpPr>
+          <p:cNvPr id="8" name="Shape 5"/>
           <p:cNvSpPr/>
           <p:nvPr/>
         </p:nvSpPr>
         <p:spPr>
           <a:xfrm>
-            <a:off x="685800" y="2514600"/>
-            <a:ext cx="3977640" cy="3657600"/>
+            <a:off x="685800" y="3090672"/>
+            <a:ext cx="347472" cy="347472"/>
+          </a:xfrm>
+          <a:prstGeom prst="ellipse">
+            <a:avLst/>
+          </a:prstGeom>
+          <a:solidFill>
+            <a:srgbClr val="E4EDFD"/>
+          </a:solidFill>
+          <a:ln w="12700">
+            <a:solidFill>
+              <a:srgbClr val="E4EDFD"/>
+            </a:solidFill>
+            <a:prstDash val="solid"/>
+          </a:ln>
+        </p:spPr>
+      </p:sp>
+      <p:pic>
+        <p:nvPicPr>
+          <p:cNvPr id="9" name="Image 1" descr="preencoded.png">    </p:cNvPr>
+          <p:cNvPicPr>
+            <a:picLocks noChangeAspect="1"/>
+          </p:cNvPicPr>
+          <p:nvPr/>
+        </p:nvPicPr>
+        <p:blipFill>
+          <a:blip r:embed="rId2"/>
+          <a:stretch>
+            <a:fillRect/>
+          </a:stretch>
+        </p:blipFill>
+        <p:spPr>
+          <a:xfrm>
+            <a:off x="776143" y="3181015"/>
+            <a:ext cx="166787" cy="166787"/>
+          </a:xfrm>
+          <a:prstGeom prst="rect">
+            <a:avLst/>
+          </a:prstGeom>
+        </p:spPr>
+      </p:pic>
+      <p:sp>
+        <p:nvSpPr>
+          <p:cNvPr id="10" name="Text 6"/>
+          <p:cNvSpPr txBox="1"/>
+          <p:nvPr/>
+        </p:nvSpPr>
+        <p:spPr>
+          <a:xfrm>
+            <a:off x="1161288" y="3090672"/>
+            <a:ext cx="3136392" cy="347472"/>
+          </a:xfrm>
+          <a:prstGeom prst="rect">
+            <a:avLst/>
+          </a:prstGeom>
+          <a:noFill/>
+          <a:ln/>
+        </p:spPr>
+        <p:txBody>
+          <a:bodyPr wrap="square" lIns="0" tIns="0" rIns="0" bIns="0" rtlCol="0" anchor="ctr"/>
+          <a:lstStyle/>
+          <a:p>
+            <a:pPr indent="0" marL="0">
+              <a:buNone/>
+            </a:pPr>
+            <a:r>
+              <a:rPr lang="en-US" sz="1200" b="1" spc="-30" kern="0" dirty="0">
+                <a:solidFill>
+                  <a:srgbClr val="16181C"/>
+                </a:solidFill>
+                <a:latin typeface="Pretendard" pitchFamily="34" charset="0"/>
+                <a:ea typeface="Pretendard" pitchFamily="34" charset="-122"/>
+                <a:cs typeface="Pretendard" pitchFamily="34" charset="-120"/>
+              </a:rPr>
+              <a:t>유어딜 홈 인기 목록</a:t>
+            </a:r>
+            <a:endParaRPr lang="en-US" sz="1200" dirty="0"/>
+          </a:p>
+        </p:txBody>
+      </p:sp>
+      <p:sp>
+        <p:nvSpPr>
+          <p:cNvPr id="11" name="Shape 7"/>
+          <p:cNvSpPr/>
+          <p:nvPr/>
+        </p:nvSpPr>
+        <p:spPr>
+          <a:xfrm>
+            <a:off x="685800" y="3547872"/>
+            <a:ext cx="347472" cy="347472"/>
+          </a:xfrm>
+          <a:prstGeom prst="ellipse">
+            <a:avLst/>
+          </a:prstGeom>
+          <a:solidFill>
+            <a:srgbClr val="E4EDFD"/>
+          </a:solidFill>
+          <a:ln w="12700">
+            <a:solidFill>
+              <a:srgbClr val="E4EDFD"/>
+            </a:solidFill>
+            <a:prstDash val="solid"/>
+          </a:ln>
+        </p:spPr>
+      </p:sp>
+      <p:pic>
+        <p:nvPicPr>
+          <p:cNvPr id="12" name="Image 2" descr="preencoded.png">    </p:cNvPr>
+          <p:cNvPicPr>
+            <a:picLocks noChangeAspect="1"/>
+          </p:cNvPicPr>
+          <p:nvPr/>
+        </p:nvPicPr>
+        <p:blipFill>
+          <a:blip r:embed="rId3"/>
+          <a:stretch>
+            <a:fillRect/>
+          </a:stretch>
+        </p:blipFill>
+        <p:spPr>
+          <a:xfrm>
+            <a:off x="776143" y="3638215"/>
+            <a:ext cx="166787" cy="166787"/>
+          </a:xfrm>
+          <a:prstGeom prst="rect">
+            <a:avLst/>
+          </a:prstGeom>
+        </p:spPr>
+      </p:pic>
+      <p:sp>
+        <p:nvSpPr>
+          <p:cNvPr id="13" name="Text 8"/>
+          <p:cNvSpPr txBox="1"/>
+          <p:nvPr/>
+        </p:nvSpPr>
+        <p:spPr>
+          <a:xfrm>
+            <a:off x="1161288" y="3547872"/>
+            <a:ext cx="3136392" cy="347472"/>
+          </a:xfrm>
+          <a:prstGeom prst="rect">
+            <a:avLst/>
+          </a:prstGeom>
+          <a:noFill/>
+          <a:ln/>
+        </p:spPr>
+        <p:txBody>
+          <a:bodyPr wrap="square" lIns="0" tIns="0" rIns="0" bIns="0" rtlCol="0" anchor="ctr"/>
+          <a:lstStyle/>
+          <a:p>
+            <a:pPr indent="0" marL="0">
+              <a:buNone/>
+            </a:pPr>
+            <a:r>
+              <a:rPr lang="en-US" sz="1200" b="1" spc="-30" kern="0" dirty="0">
+                <a:solidFill>
+                  <a:srgbClr val="16181C"/>
+                </a:solidFill>
+                <a:latin typeface="Pretendard" pitchFamily="34" charset="0"/>
+                <a:ea typeface="Pretendard" pitchFamily="34" charset="-122"/>
+                <a:cs typeface="Pretendard" pitchFamily="34" charset="-120"/>
+              </a:rPr>
+              <a:t>지도의 내 주변 이용권</a:t>
+            </a:r>
+            <a:endParaRPr lang="en-US" sz="1200" dirty="0"/>
+          </a:p>
+        </p:txBody>
+      </p:sp>
+      <p:sp>
+        <p:nvSpPr>
+          <p:cNvPr id="14" name="Shape 9"/>
+          <p:cNvSpPr/>
+          <p:nvPr/>
+        </p:nvSpPr>
+        <p:spPr>
+          <a:xfrm>
+            <a:off x="685800" y="4005072"/>
+            <a:ext cx="347472" cy="347472"/>
+          </a:xfrm>
+          <a:prstGeom prst="ellipse">
+            <a:avLst/>
+          </a:prstGeom>
+          <a:solidFill>
+            <a:srgbClr val="E4EDFD"/>
+          </a:solidFill>
+          <a:ln w="12700">
+            <a:solidFill>
+              <a:srgbClr val="E4EDFD"/>
+            </a:solidFill>
+            <a:prstDash val="solid"/>
+          </a:ln>
+        </p:spPr>
+      </p:sp>
+      <p:pic>
+        <p:nvPicPr>
+          <p:cNvPr id="15" name="Image 3" descr="preencoded.png">    </p:cNvPr>
+          <p:cNvPicPr>
+            <a:picLocks noChangeAspect="1"/>
+          </p:cNvPicPr>
+          <p:nvPr/>
+        </p:nvPicPr>
+        <p:blipFill>
+          <a:blip r:embed="rId4"/>
+          <a:stretch>
+            <a:fillRect/>
+          </a:stretch>
+        </p:blipFill>
+        <p:spPr>
+          <a:xfrm>
+            <a:off x="776143" y="4095415"/>
+            <a:ext cx="166787" cy="166787"/>
+          </a:xfrm>
+          <a:prstGeom prst="rect">
+            <a:avLst/>
+          </a:prstGeom>
+        </p:spPr>
+      </p:pic>
+      <p:sp>
+        <p:nvSpPr>
+          <p:cNvPr id="16" name="Text 10"/>
+          <p:cNvSpPr txBox="1"/>
+          <p:nvPr/>
+        </p:nvSpPr>
+        <p:spPr>
+          <a:xfrm>
+            <a:off x="1161288" y="4005072"/>
+            <a:ext cx="3136392" cy="347472"/>
+          </a:xfrm>
+          <a:prstGeom prst="rect">
+            <a:avLst/>
+          </a:prstGeom>
+          <a:noFill/>
+          <a:ln/>
+        </p:spPr>
+        <p:txBody>
+          <a:bodyPr wrap="square" lIns="0" tIns="0" rIns="0" bIns="0" rtlCol="0" anchor="ctr"/>
+          <a:lstStyle/>
+          <a:p>
+            <a:pPr indent="0" marL="0">
+              <a:buNone/>
+            </a:pPr>
+            <a:r>
+              <a:rPr lang="en-US" sz="1200" b="1" spc="-30" kern="0" dirty="0">
+                <a:solidFill>
+                  <a:srgbClr val="16181C"/>
+                </a:solidFill>
+                <a:latin typeface="Pretendard" pitchFamily="34" charset="0"/>
+                <a:ea typeface="Pretendard" pitchFamily="34" charset="-122"/>
+                <a:cs typeface="Pretendard" pitchFamily="34" charset="-120"/>
+              </a:rPr>
+              <a:t>검색과 카카오톡 공유 카드</a:t>
+            </a:r>
+            <a:endParaRPr lang="en-US" sz="1200" dirty="0"/>
+          </a:p>
+        </p:txBody>
+      </p:sp>
+      <p:sp>
+        <p:nvSpPr>
+          <p:cNvPr id="17" name="Shape 11"/>
+          <p:cNvSpPr/>
+          <p:nvPr/>
+        </p:nvSpPr>
+        <p:spPr>
+          <a:xfrm>
+            <a:off x="685800" y="4462272"/>
+            <a:ext cx="347472" cy="347472"/>
+          </a:xfrm>
+          <a:prstGeom prst="ellipse">
+            <a:avLst/>
+          </a:prstGeom>
+          <a:solidFill>
+            <a:srgbClr val="E4EDFD"/>
+          </a:solidFill>
+          <a:ln w="12700">
+            <a:solidFill>
+              <a:srgbClr val="E4EDFD"/>
+            </a:solidFill>
+            <a:prstDash val="solid"/>
+          </a:ln>
+        </p:spPr>
+      </p:sp>
+      <p:pic>
+        <p:nvPicPr>
+          <p:cNvPr id="18" name="Image 4" descr="preencoded.png">    </p:cNvPr>
+          <p:cNvPicPr>
+            <a:picLocks noChangeAspect="1"/>
+          </p:cNvPicPr>
+          <p:nvPr/>
+        </p:nvPicPr>
+        <p:blipFill>
+          <a:blip r:embed="rId5"/>
+          <a:stretch>
+            <a:fillRect/>
+          </a:stretch>
+        </p:blipFill>
+        <p:spPr>
+          <a:xfrm>
+            <a:off x="776143" y="4552615"/>
+            <a:ext cx="166787" cy="166787"/>
+          </a:xfrm>
+          <a:prstGeom prst="rect">
+            <a:avLst/>
+          </a:prstGeom>
+        </p:spPr>
+      </p:pic>
+      <p:sp>
+        <p:nvSpPr>
+          <p:cNvPr id="19" name="Text 12"/>
+          <p:cNvSpPr txBox="1"/>
+          <p:nvPr/>
+        </p:nvSpPr>
+        <p:spPr>
+          <a:xfrm>
+            <a:off x="1161288" y="4462272"/>
+            <a:ext cx="3136392" cy="347472"/>
+          </a:xfrm>
+          <a:prstGeom prst="rect">
+            <a:avLst/>
+          </a:prstGeom>
+          <a:noFill/>
+          <a:ln/>
+        </p:spPr>
+        <p:txBody>
+          <a:bodyPr wrap="square" lIns="0" tIns="0" rIns="0" bIns="0" rtlCol="0" anchor="ctr"/>
+          <a:lstStyle/>
+          <a:p>
+            <a:pPr indent="0" marL="0">
+              <a:buNone/>
+            </a:pPr>
+            <a:r>
+              <a:rPr lang="en-US" sz="1200" b="1" spc="-30" kern="0" dirty="0">
+                <a:solidFill>
+                  <a:srgbClr val="16181C"/>
+                </a:solidFill>
+                <a:latin typeface="Pretendard" pitchFamily="34" charset="0"/>
+                <a:ea typeface="Pretendard" pitchFamily="34" charset="-122"/>
+                <a:cs typeface="Pretendard" pitchFamily="34" charset="-120"/>
+              </a:rPr>
+              <a:t>영상 아래 구매 버튼</a:t>
+            </a:r>
+            <a:endParaRPr lang="en-US" sz="1200" dirty="0"/>
+          </a:p>
+        </p:txBody>
+      </p:sp>
+      <p:sp>
+        <p:nvSpPr>
+          <p:cNvPr id="20" name="Text 13"/>
+          <p:cNvSpPr txBox="1"/>
+          <p:nvPr/>
+        </p:nvSpPr>
+        <p:spPr>
+          <a:xfrm>
+            <a:off x="685800" y="4974336"/>
+            <a:ext cx="3611880" cy="237744"/>
+          </a:xfrm>
+          <a:prstGeom prst="rect">
+            <a:avLst/>
+          </a:prstGeom>
+          <a:noFill/>
+          <a:ln/>
+        </p:spPr>
+        <p:txBody>
+          <a:bodyPr wrap="square" lIns="0" tIns="0" rIns="0" bIns="0" rtlCol="0" anchor="ctr"/>
+          <a:lstStyle/>
+          <a:p>
+            <a:pPr indent="0" marL="0">
+              <a:buNone/>
+            </a:pPr>
+            <a:r>
+              <a:rPr lang="en-US" sz="1000" b="1" spc="120" kern="0" dirty="0">
+                <a:solidFill>
+                  <a:srgbClr val="8A8580"/>
+                </a:solidFill>
+                <a:latin typeface="Pretendard" pitchFamily="34" charset="0"/>
+                <a:ea typeface="Pretendard" pitchFamily="34" charset="-122"/>
+                <a:cs typeface="Pretendard" pitchFamily="34" charset="-120"/>
+              </a:rPr>
+              <a:t>파는 사람들</a:t>
+            </a:r>
+            <a:endParaRPr lang="en-US" sz="1000" dirty="0"/>
+          </a:p>
+        </p:txBody>
+      </p:sp>
+      <p:sp>
+        <p:nvSpPr>
+          <p:cNvPr id="21" name="Text 14"/>
+          <p:cNvSpPr txBox="1"/>
+          <p:nvPr/>
+        </p:nvSpPr>
+        <p:spPr>
+          <a:xfrm>
+            <a:off x="685800" y="5248656"/>
+            <a:ext cx="2311603" cy="219456"/>
+          </a:xfrm>
+          <a:prstGeom prst="rect">
+            <a:avLst/>
+          </a:prstGeom>
+          <a:noFill/>
+          <a:ln/>
+        </p:spPr>
+        <p:txBody>
+          <a:bodyPr wrap="square" lIns="0" tIns="0" rIns="0" bIns="0" rtlCol="0" anchor="ctr"/>
+          <a:lstStyle/>
+          <a:p>
+            <a:pPr indent="0" marL="0">
+              <a:buNone/>
+            </a:pPr>
+            <a:r>
+              <a:rPr lang="en-US" sz="1150" b="1" dirty="0">
+                <a:solidFill>
+                  <a:srgbClr val="16181C"/>
+                </a:solidFill>
+                <a:latin typeface="Pretendard" pitchFamily="34" charset="0"/>
+                <a:ea typeface="Pretendard" pitchFamily="34" charset="-122"/>
+                <a:cs typeface="Pretendard" pitchFamily="34" charset="-120"/>
+              </a:rPr>
+              <a:t>유튜버</a:t>
+            </a:r>
+            <a:endParaRPr lang="en-US" sz="1150" dirty="0"/>
+          </a:p>
+        </p:txBody>
+      </p:sp>
+      <p:sp>
+        <p:nvSpPr>
+          <p:cNvPr id="22" name="Text 15"/>
+          <p:cNvSpPr txBox="1"/>
+          <p:nvPr/>
+        </p:nvSpPr>
+        <p:spPr>
+          <a:xfrm>
+            <a:off x="2672334" y="5248656"/>
+            <a:ext cx="1625346" cy="219456"/>
+          </a:xfrm>
+          <a:prstGeom prst="rect">
+            <a:avLst/>
+          </a:prstGeom>
+          <a:noFill/>
+          <a:ln/>
+        </p:spPr>
+        <p:txBody>
+          <a:bodyPr wrap="square" lIns="0" tIns="0" rIns="0" bIns="0" rtlCol="0" anchor="ctr"/>
+          <a:lstStyle/>
+          <a:p>
+            <a:pPr algn="r" indent="0" marL="0">
+              <a:buNone/>
+            </a:pPr>
+            <a:r>
+              <a:rPr lang="en-US" sz="1200" b="1" dirty="0">
+                <a:solidFill>
+                  <a:srgbClr val="16181C"/>
+                </a:solidFill>
+                <a:latin typeface="Pretendard" pitchFamily="34" charset="0"/>
+                <a:ea typeface="Pretendard" pitchFamily="34" charset="-122"/>
+                <a:cs typeface="Pretendard" pitchFamily="34" charset="-120"/>
+              </a:rPr>
+              <a:t>18,170명</a:t>
+            </a:r>
+            <a:endParaRPr lang="en-US" sz="1200" dirty="0"/>
+          </a:p>
+        </p:txBody>
+      </p:sp>
+      <p:sp>
+        <p:nvSpPr>
+          <p:cNvPr id="23" name="Text 16"/>
+          <p:cNvSpPr txBox="1"/>
+          <p:nvPr/>
+        </p:nvSpPr>
+        <p:spPr>
+          <a:xfrm>
+            <a:off x="685800" y="5541264"/>
+            <a:ext cx="2311603" cy="219456"/>
+          </a:xfrm>
+          <a:prstGeom prst="rect">
+            <a:avLst/>
+          </a:prstGeom>
+          <a:noFill/>
+          <a:ln/>
+        </p:spPr>
+        <p:txBody>
+          <a:bodyPr wrap="square" lIns="0" tIns="0" rIns="0" bIns="0" rtlCol="0" anchor="ctr"/>
+          <a:lstStyle/>
+          <a:p>
+            <a:pPr indent="0" marL="0">
+              <a:buNone/>
+            </a:pPr>
+            <a:r>
+              <a:rPr lang="en-US" sz="1150" b="1" dirty="0">
+                <a:solidFill>
+                  <a:srgbClr val="16181C"/>
+                </a:solidFill>
+                <a:latin typeface="Pretendard" pitchFamily="34" charset="0"/>
+                <a:ea typeface="Pretendard" pitchFamily="34" charset="-122"/>
+                <a:cs typeface="Pretendard" pitchFamily="34" charset="-120"/>
+              </a:rPr>
+              <a:t>네이버 블로거</a:t>
+            </a:r>
+            <a:endParaRPr lang="en-US" sz="1150" dirty="0"/>
+          </a:p>
+        </p:txBody>
+      </p:sp>
+      <p:sp>
+        <p:nvSpPr>
+          <p:cNvPr id="24" name="Text 17"/>
+          <p:cNvSpPr txBox="1"/>
+          <p:nvPr/>
+        </p:nvSpPr>
+        <p:spPr>
+          <a:xfrm>
+            <a:off x="2672334" y="5541264"/>
+            <a:ext cx="1625346" cy="219456"/>
+          </a:xfrm>
+          <a:prstGeom prst="rect">
+            <a:avLst/>
+          </a:prstGeom>
+          <a:noFill/>
+          <a:ln/>
+        </p:spPr>
+        <p:txBody>
+          <a:bodyPr wrap="square" lIns="0" tIns="0" rIns="0" bIns="0" rtlCol="0" anchor="ctr"/>
+          <a:lstStyle/>
+          <a:p>
+            <a:pPr algn="r" indent="0" marL="0">
+              <a:buNone/>
+            </a:pPr>
+            <a:r>
+              <a:rPr lang="en-US" sz="1200" b="1" dirty="0">
+                <a:solidFill>
+                  <a:srgbClr val="16181C"/>
+                </a:solidFill>
+                <a:latin typeface="Pretendard" pitchFamily="34" charset="0"/>
+                <a:ea typeface="Pretendard" pitchFamily="34" charset="-122"/>
+                <a:cs typeface="Pretendard" pitchFamily="34" charset="-120"/>
+              </a:rPr>
+              <a:t>172,755명</a:t>
+            </a:r>
+            <a:endParaRPr lang="en-US" sz="1200" dirty="0"/>
+          </a:p>
+        </p:txBody>
+      </p:sp>
+      <p:sp>
+        <p:nvSpPr>
+          <p:cNvPr id="25" name="Shape 18"/>
+          <p:cNvSpPr/>
+          <p:nvPr/>
+        </p:nvSpPr>
+        <p:spPr>
+          <a:xfrm>
+            <a:off x="685800" y="5806440"/>
+            <a:ext cx="3611880" cy="0"/>
+          </a:xfrm>
+          <a:prstGeom prst="line">
+            <a:avLst/>
+          </a:prstGeom>
+          <a:noFill/>
+          <a:ln w="9525">
+            <a:solidFill>
+              <a:srgbClr val="E6E2DE"/>
+            </a:solidFill>
+            <a:prstDash val="solid"/>
+          </a:ln>
+        </p:spPr>
+      </p:sp>
+      <p:sp>
+        <p:nvSpPr>
+          <p:cNvPr id="26" name="Text 19"/>
+          <p:cNvSpPr txBox="1"/>
+          <p:nvPr/>
+        </p:nvSpPr>
+        <p:spPr>
+          <a:xfrm>
+            <a:off x="685800" y="5833872"/>
+            <a:ext cx="2311603" cy="219456"/>
+          </a:xfrm>
+          <a:prstGeom prst="rect">
+            <a:avLst/>
+          </a:prstGeom>
+          <a:noFill/>
+          <a:ln/>
+        </p:spPr>
+        <p:txBody>
+          <a:bodyPr wrap="square" lIns="0" tIns="0" rIns="0" bIns="0" rtlCol="0" anchor="ctr"/>
+          <a:lstStyle/>
+          <a:p>
+            <a:pPr indent="0" marL="0">
+              <a:buNone/>
+            </a:pPr>
+            <a:r>
+              <a:rPr lang="en-US" sz="1150" b="1" dirty="0">
+                <a:solidFill>
+                  <a:srgbClr val="16181C"/>
+                </a:solidFill>
+                <a:latin typeface="Pretendard" pitchFamily="34" charset="0"/>
+                <a:ea typeface="Pretendard" pitchFamily="34" charset="-122"/>
+                <a:cs typeface="Pretendard" pitchFamily="34" charset="-120"/>
+              </a:rPr>
+              <a:t>미리 나가는 홍보비</a:t>
+            </a:r>
+            <a:endParaRPr lang="en-US" sz="1150" dirty="0"/>
+          </a:p>
+        </p:txBody>
+      </p:sp>
+      <p:sp>
+        <p:nvSpPr>
+          <p:cNvPr id="27" name="Text 20"/>
+          <p:cNvSpPr txBox="1"/>
+          <p:nvPr/>
+        </p:nvSpPr>
+        <p:spPr>
+          <a:xfrm>
+            <a:off x="2672334" y="5833872"/>
+            <a:ext cx="1625346" cy="219456"/>
+          </a:xfrm>
+          <a:prstGeom prst="rect">
+            <a:avLst/>
+          </a:prstGeom>
+          <a:noFill/>
+          <a:ln/>
+        </p:spPr>
+        <p:txBody>
+          <a:bodyPr wrap="square" lIns="0" tIns="0" rIns="0" bIns="0" rtlCol="0" anchor="ctr"/>
+          <a:lstStyle/>
+          <a:p>
+            <a:pPr algn="r" indent="0" marL="0">
+              <a:buNone/>
+            </a:pPr>
+            <a:r>
+              <a:rPr lang="en-US" sz="1200" b="1" dirty="0">
+                <a:solidFill>
+                  <a:srgbClr val="1C69EF"/>
+                </a:solidFill>
+                <a:latin typeface="Pretendard" pitchFamily="34" charset="0"/>
+                <a:ea typeface="Pretendard" pitchFamily="34" charset="-122"/>
+                <a:cs typeface="Pretendard" pitchFamily="34" charset="-120"/>
+              </a:rPr>
+              <a:t>0원</a:t>
+            </a:r>
+            <a:endParaRPr lang="en-US" sz="1200" dirty="0"/>
+          </a:p>
+        </p:txBody>
+      </p:sp>
+      <p:sp>
+        <p:nvSpPr>
+          <p:cNvPr id="28" name="Shape 21"/>
+          <p:cNvSpPr/>
+          <p:nvPr/>
+        </p:nvSpPr>
+        <p:spPr>
+          <a:xfrm>
+            <a:off x="4636008" y="2761488"/>
+            <a:ext cx="6943039" cy="3162288"/>
           </a:xfrm>
           <a:prstGeom prst="roundRect">
             <a:avLst>
-              <a:gd name="adj" fmla="val 3500"/>
+              <a:gd name="adj" fmla="val 4048"/>
             </a:avLst>
           </a:prstGeom>
           <a:solidFill>
@@ -4706,88 +5393,24 @@
           </a:effectLst>
         </p:spPr>
       </p:sp>
-      <p:sp>
-        <p:nvSpPr>
-          <p:cNvPr id="8" name="Text 5"/>
-          <p:cNvSpPr txBox="1"/>
-          <p:nvPr/>
-        </p:nvSpPr>
-        <p:spPr>
-          <a:xfrm>
-            <a:off x="960120" y="2679192"/>
-            <a:ext cx="3429000" cy="237744"/>
-          </a:xfrm>
-          <a:prstGeom prst="rect">
-            <a:avLst/>
-          </a:prstGeom>
-          <a:noFill/>
-          <a:ln/>
-        </p:spPr>
-        <p:txBody>
-          <a:bodyPr wrap="square" lIns="0" tIns="0" rIns="0" bIns="0" rtlCol="0" anchor="ctr"/>
-          <a:lstStyle/>
-          <a:p>
-            <a:pPr indent="0" marL="0">
-              <a:buNone/>
-            </a:pPr>
-            <a:r>
-              <a:rPr lang="en-US" sz="1000" b="1" spc="120" kern="0" dirty="0">
-                <a:solidFill>
-                  <a:srgbClr val="8A8580"/>
-                </a:solidFill>
-                <a:latin typeface="Pretendard" pitchFamily="34" charset="0"/>
-                <a:ea typeface="Pretendard" pitchFamily="34" charset="-122"/>
-                <a:cs typeface="Pretendard" pitchFamily="34" charset="-120"/>
-              </a:rPr>
-              <a:t>자동 노출</a:t>
-            </a:r>
-            <a:endParaRPr lang="en-US" sz="1000" dirty="0"/>
-          </a:p>
-        </p:txBody>
-      </p:sp>
-      <p:sp>
-        <p:nvSpPr>
-          <p:cNvPr id="9" name="Shape 6"/>
-          <p:cNvSpPr/>
-          <p:nvPr/>
-        </p:nvSpPr>
-        <p:spPr>
-          <a:xfrm>
-            <a:off x="960120" y="3017520"/>
-            <a:ext cx="420624" cy="420624"/>
-          </a:xfrm>
-          <a:prstGeom prst="ellipse">
-            <a:avLst/>
-          </a:prstGeom>
-          <a:solidFill>
-            <a:srgbClr val="E4EDFD"/>
-          </a:solidFill>
-          <a:ln w="12700">
-            <a:solidFill>
-              <a:srgbClr val="E4EDFD"/>
-            </a:solidFill>
-            <a:prstDash val="solid"/>
-          </a:ln>
-        </p:spPr>
-      </p:sp>
       <p:pic>
         <p:nvPicPr>
-          <p:cNvPr id="10" name="Image 1" descr="preencoded.png">    </p:cNvPr>
+          <p:cNvPr id="29" name="Image 5" descr="preencoded.png">    </p:cNvPr>
           <p:cNvPicPr>
             <a:picLocks noChangeAspect="1"/>
           </p:cNvPicPr>
           <p:nvPr/>
         </p:nvPicPr>
         <p:blipFill>
-          <a:blip r:embed="rId2"/>
+          <a:blip r:embed="rId6"/>
           <a:stretch>
             <a:fillRect/>
           </a:stretch>
         </p:blipFill>
         <p:spPr>
           <a:xfrm>
-            <a:off x="1069482" y="3126882"/>
-            <a:ext cx="201900" cy="201900"/>
+            <a:off x="4709160" y="2834640"/>
+            <a:ext cx="6796735" cy="3015984"/>
           </a:xfrm>
           <a:prstGeom prst="rect">
             <a:avLst/>
@@ -4796,409 +5419,30 @@
       </p:pic>
       <p:sp>
         <p:nvSpPr>
-          <p:cNvPr id="11" name="Text 7"/>
-          <p:cNvSpPr txBox="1"/>
-          <p:nvPr/>
-        </p:nvSpPr>
-        <p:spPr>
-          <a:xfrm>
-            <a:off x="1554480" y="3017520"/>
-            <a:ext cx="2880360" cy="420624"/>
-          </a:xfrm>
-          <a:prstGeom prst="rect">
-            <a:avLst/>
-          </a:prstGeom>
-          <a:noFill/>
-          <a:ln/>
-        </p:spPr>
-        <p:txBody>
-          <a:bodyPr wrap="square" lIns="0" tIns="0" rIns="0" bIns="0" rtlCol="0" anchor="ctr"/>
-          <a:lstStyle/>
-          <a:p>
-            <a:pPr indent="0" marL="0">
-              <a:buNone/>
-            </a:pPr>
-            <a:r>
-              <a:rPr lang="en-US" sz="1250" b="1" spc="-30" kern="0" dirty="0">
-                <a:solidFill>
-                  <a:srgbClr val="16181C"/>
-                </a:solidFill>
-                <a:latin typeface="Pretendard" pitchFamily="34" charset="0"/>
-                <a:ea typeface="Pretendard" pitchFamily="34" charset="-122"/>
-                <a:cs typeface="Pretendard" pitchFamily="34" charset="-120"/>
-              </a:rPr>
-              <a:t>유어딜 홈 인기 목록</a:t>
-            </a:r>
-            <a:endParaRPr lang="en-US" sz="1250" dirty="0"/>
-          </a:p>
-        </p:txBody>
-      </p:sp>
-      <p:sp>
-        <p:nvSpPr>
-          <p:cNvPr id="12" name="Shape 8"/>
-          <p:cNvSpPr/>
-          <p:nvPr/>
-        </p:nvSpPr>
-        <p:spPr>
-          <a:xfrm>
-            <a:off x="960120" y="3749040"/>
-            <a:ext cx="420624" cy="420624"/>
-          </a:xfrm>
-          <a:prstGeom prst="ellipse">
-            <a:avLst/>
-          </a:prstGeom>
-          <a:solidFill>
-            <a:srgbClr val="E4EDFD"/>
-          </a:solidFill>
-          <a:ln w="12700">
-            <a:solidFill>
-              <a:srgbClr val="E4EDFD"/>
-            </a:solidFill>
-            <a:prstDash val="solid"/>
-          </a:ln>
-        </p:spPr>
-      </p:sp>
-      <p:pic>
-        <p:nvPicPr>
-          <p:cNvPr id="13" name="Image 2" descr="preencoded.png">    </p:cNvPr>
-          <p:cNvPicPr>
-            <a:picLocks noChangeAspect="1"/>
-          </p:cNvPicPr>
-          <p:nvPr/>
-        </p:nvPicPr>
-        <p:blipFill>
-          <a:blip r:embed="rId3"/>
-          <a:stretch>
-            <a:fillRect/>
-          </a:stretch>
-        </p:blipFill>
-        <p:spPr>
-          <a:xfrm>
-            <a:off x="1069482" y="3858402"/>
-            <a:ext cx="201900" cy="201900"/>
-          </a:xfrm>
-          <a:prstGeom prst="rect">
-            <a:avLst/>
-          </a:prstGeom>
-        </p:spPr>
-      </p:pic>
-      <p:sp>
-        <p:nvSpPr>
-          <p:cNvPr id="14" name="Text 9"/>
-          <p:cNvSpPr txBox="1"/>
-          <p:nvPr/>
-        </p:nvSpPr>
-        <p:spPr>
-          <a:xfrm>
-            <a:off x="1554480" y="3749040"/>
-            <a:ext cx="2880360" cy="420624"/>
-          </a:xfrm>
-          <a:prstGeom prst="rect">
-            <a:avLst/>
-          </a:prstGeom>
-          <a:noFill/>
-          <a:ln/>
-        </p:spPr>
-        <p:txBody>
-          <a:bodyPr wrap="square" lIns="0" tIns="0" rIns="0" bIns="0" rtlCol="0" anchor="ctr"/>
-          <a:lstStyle/>
-          <a:p>
-            <a:pPr indent="0" marL="0">
-              <a:buNone/>
-            </a:pPr>
-            <a:r>
-              <a:rPr lang="en-US" sz="1250" b="1" spc="-30" kern="0" dirty="0">
-                <a:solidFill>
-                  <a:srgbClr val="16181C"/>
-                </a:solidFill>
-                <a:latin typeface="Pretendard" pitchFamily="34" charset="0"/>
-                <a:ea typeface="Pretendard" pitchFamily="34" charset="-122"/>
-                <a:cs typeface="Pretendard" pitchFamily="34" charset="-120"/>
-              </a:rPr>
-              <a:t>지도의 내 주변 이용권</a:t>
-            </a:r>
-            <a:endParaRPr lang="en-US" sz="1250" dirty="0"/>
-          </a:p>
-        </p:txBody>
-      </p:sp>
-      <p:sp>
-        <p:nvSpPr>
-          <p:cNvPr id="15" name="Shape 10"/>
-          <p:cNvSpPr/>
-          <p:nvPr/>
-        </p:nvSpPr>
-        <p:spPr>
-          <a:xfrm>
-            <a:off x="960120" y="4480560"/>
-            <a:ext cx="420624" cy="420624"/>
-          </a:xfrm>
-          <a:prstGeom prst="ellipse">
-            <a:avLst/>
-          </a:prstGeom>
-          <a:solidFill>
-            <a:srgbClr val="E4EDFD"/>
-          </a:solidFill>
-          <a:ln w="12700">
-            <a:solidFill>
-              <a:srgbClr val="E4EDFD"/>
-            </a:solidFill>
-            <a:prstDash val="solid"/>
-          </a:ln>
-        </p:spPr>
-      </p:sp>
-      <p:pic>
-        <p:nvPicPr>
-          <p:cNvPr id="16" name="Image 3" descr="preencoded.png">    </p:cNvPr>
-          <p:cNvPicPr>
-            <a:picLocks noChangeAspect="1"/>
-          </p:cNvPicPr>
-          <p:nvPr/>
-        </p:nvPicPr>
-        <p:blipFill>
-          <a:blip r:embed="rId4"/>
-          <a:stretch>
-            <a:fillRect/>
-          </a:stretch>
-        </p:blipFill>
-        <p:spPr>
-          <a:xfrm>
-            <a:off x="1069482" y="4589922"/>
-            <a:ext cx="201900" cy="201900"/>
-          </a:xfrm>
-          <a:prstGeom prst="rect">
-            <a:avLst/>
-          </a:prstGeom>
-        </p:spPr>
-      </p:pic>
-      <p:sp>
-        <p:nvSpPr>
-          <p:cNvPr id="17" name="Text 11"/>
-          <p:cNvSpPr txBox="1"/>
-          <p:nvPr/>
-        </p:nvSpPr>
-        <p:spPr>
-          <a:xfrm>
-            <a:off x="1554480" y="4480560"/>
-            <a:ext cx="2880360" cy="420624"/>
-          </a:xfrm>
-          <a:prstGeom prst="rect">
-            <a:avLst/>
-          </a:prstGeom>
-          <a:noFill/>
-          <a:ln/>
-        </p:spPr>
-        <p:txBody>
-          <a:bodyPr wrap="square" lIns="0" tIns="0" rIns="0" bIns="0" rtlCol="0" anchor="ctr"/>
-          <a:lstStyle/>
-          <a:p>
-            <a:pPr indent="0" marL="0">
-              <a:buNone/>
-            </a:pPr>
-            <a:r>
-              <a:rPr lang="en-US" sz="1250" b="1" spc="-30" kern="0" dirty="0">
-                <a:solidFill>
-                  <a:srgbClr val="16181C"/>
-                </a:solidFill>
-                <a:latin typeface="Pretendard" pitchFamily="34" charset="0"/>
-                <a:ea typeface="Pretendard" pitchFamily="34" charset="-122"/>
-                <a:cs typeface="Pretendard" pitchFamily="34" charset="-120"/>
-              </a:rPr>
-              <a:t>검색과 카카오톡 공유 카드</a:t>
-            </a:r>
-            <a:endParaRPr lang="en-US" sz="1250" dirty="0"/>
-          </a:p>
-        </p:txBody>
-      </p:sp>
-      <p:sp>
-        <p:nvSpPr>
-          <p:cNvPr id="18" name="Shape 12"/>
-          <p:cNvSpPr/>
-          <p:nvPr/>
-        </p:nvSpPr>
-        <p:spPr>
-          <a:xfrm>
-            <a:off x="960120" y="5212080"/>
-            <a:ext cx="420624" cy="420624"/>
-          </a:xfrm>
-          <a:prstGeom prst="ellipse">
-            <a:avLst/>
-          </a:prstGeom>
-          <a:solidFill>
-            <a:srgbClr val="E4EDFD"/>
-          </a:solidFill>
-          <a:ln w="12700">
-            <a:solidFill>
-              <a:srgbClr val="E4EDFD"/>
-            </a:solidFill>
-            <a:prstDash val="solid"/>
-          </a:ln>
-        </p:spPr>
-      </p:sp>
-      <p:pic>
-        <p:nvPicPr>
-          <p:cNvPr id="19" name="Image 4" descr="preencoded.png">    </p:cNvPr>
-          <p:cNvPicPr>
-            <a:picLocks noChangeAspect="1"/>
-          </p:cNvPicPr>
-          <p:nvPr/>
-        </p:nvPicPr>
-        <p:blipFill>
-          <a:blip r:embed="rId5"/>
-          <a:stretch>
-            <a:fillRect/>
-          </a:stretch>
-        </p:blipFill>
-        <p:spPr>
-          <a:xfrm>
-            <a:off x="1069482" y="5321442"/>
-            <a:ext cx="201900" cy="201900"/>
-          </a:xfrm>
-          <a:prstGeom prst="rect">
-            <a:avLst/>
-          </a:prstGeom>
-        </p:spPr>
-      </p:pic>
-      <p:sp>
-        <p:nvSpPr>
-          <p:cNvPr id="20" name="Text 13"/>
-          <p:cNvSpPr txBox="1"/>
-          <p:nvPr/>
-        </p:nvSpPr>
-        <p:spPr>
-          <a:xfrm>
-            <a:off x="1554480" y="5212080"/>
-            <a:ext cx="2880360" cy="420624"/>
-          </a:xfrm>
-          <a:prstGeom prst="rect">
-            <a:avLst/>
-          </a:prstGeom>
-          <a:noFill/>
-          <a:ln/>
-        </p:spPr>
-        <p:txBody>
-          <a:bodyPr wrap="square" lIns="0" tIns="0" rIns="0" bIns="0" rtlCol="0" anchor="ctr"/>
-          <a:lstStyle/>
-          <a:p>
-            <a:pPr indent="0" marL="0">
-              <a:buNone/>
-            </a:pPr>
-            <a:r>
-              <a:rPr lang="en-US" sz="1250" b="1" spc="-30" kern="0" dirty="0">
-                <a:solidFill>
-                  <a:srgbClr val="16181C"/>
-                </a:solidFill>
-                <a:latin typeface="Pretendard" pitchFamily="34" charset="0"/>
-                <a:ea typeface="Pretendard" pitchFamily="34" charset="-122"/>
-                <a:cs typeface="Pretendard" pitchFamily="34" charset="-120"/>
-              </a:rPr>
-              <a:t>영상 아래 구매 버튼</a:t>
-            </a:r>
-            <a:endParaRPr lang="en-US" sz="1250" dirty="0"/>
-          </a:p>
-        </p:txBody>
-      </p:sp>
-      <p:sp>
-        <p:nvSpPr>
-          <p:cNvPr id="21" name="Shape 14"/>
-          <p:cNvSpPr/>
-          <p:nvPr/>
-        </p:nvSpPr>
-        <p:spPr>
-          <a:xfrm>
-            <a:off x="4983480" y="2514600"/>
-            <a:ext cx="6522415" cy="3657600"/>
-          </a:xfrm>
-          <a:prstGeom prst="roundRect">
-            <a:avLst>
-              <a:gd name="adj" fmla="val 3500"/>
-            </a:avLst>
-          </a:prstGeom>
-          <a:solidFill>
-            <a:srgbClr val="FFFFFF"/>
-          </a:solidFill>
-          <a:ln w="12700">
-            <a:solidFill>
-              <a:srgbClr val="FFFFFF"/>
-            </a:solidFill>
-            <a:prstDash val="solid"/>
-          </a:ln>
-          <a:effectLst>
-            <a:outerShdw sx="100000" sy="100000" kx="0" ky="0" algn="bl" rotWithShape="0" blurRad="101600" dist="25400" dir="5400000">
-              <a:srgbClr val="1A2C42">
-                <a:alpha val="7000"/>
-              </a:srgbClr>
-            </a:outerShdw>
-          </a:effectLst>
-        </p:spPr>
-      </p:sp>
-      <p:sp>
-        <p:nvSpPr>
-          <p:cNvPr id="22" name="Text 15"/>
-          <p:cNvSpPr txBox="1"/>
-          <p:nvPr/>
-        </p:nvSpPr>
-        <p:spPr>
-          <a:xfrm>
-            <a:off x="5303520" y="2697480"/>
-            <a:ext cx="5882335" cy="329184"/>
-          </a:xfrm>
-          <a:prstGeom prst="rect">
-            <a:avLst/>
-          </a:prstGeom>
-          <a:noFill/>
-          <a:ln/>
-        </p:spPr>
-        <p:txBody>
-          <a:bodyPr wrap="square" lIns="0" tIns="0" rIns="0" bIns="0" rtlCol="0" anchor="ctr"/>
-          <a:lstStyle/>
-          <a:p>
-            <a:pPr indent="0" marL="0">
-              <a:buNone/>
-            </a:pPr>
-            <a:r>
-              <a:rPr lang="en-US" sz="1500" b="1" spc="-40" kern="0" dirty="0">
-                <a:solidFill>
-                  <a:srgbClr val="16181C"/>
-                </a:solidFill>
-                <a:latin typeface="Pretendard" pitchFamily="34" charset="0"/>
-                <a:ea typeface="Pretendard" pitchFamily="34" charset="-122"/>
-                <a:cs typeface="Pretendard" pitchFamily="34" charset="-120"/>
-              </a:rPr>
-              <a:t>그리고 저희에겐 파는 사람들이 있습니다.</a:t>
-            </a:r>
-            <a:endParaRPr lang="en-US" sz="1500" dirty="0"/>
-          </a:p>
-        </p:txBody>
-      </p:sp>
-      <p:sp>
-        <p:nvSpPr>
-          <p:cNvPr id="23" name="Text 16"/>
-          <p:cNvSpPr txBox="1"/>
-          <p:nvPr/>
-        </p:nvSpPr>
-        <p:spPr>
-          <a:xfrm>
-            <a:off x="5303520" y="3090672"/>
-            <a:ext cx="5882335" cy="1325880"/>
-          </a:xfrm>
-          <a:prstGeom prst="rect">
-            <a:avLst/>
-          </a:prstGeom>
-          <a:noFill/>
-          <a:ln/>
-        </p:spPr>
-        <p:txBody>
-          <a:bodyPr wrap="square" lIns="0" tIns="0" rIns="0" bIns="0" rtlCol="0" anchor="t"/>
-          <a:lstStyle/>
-          <a:p>
-            <a:pPr indent="0" marL="0">
-              <a:lnSpc>
-                <a:spcPct val="148000"/>
-              </a:lnSpc>
-              <a:buNone/>
-            </a:pPr>
-            <a:r>
-              <a:rPr lang="en-US" sz="1100" dirty="0">
+          <p:cNvPr id="30" name="Text 22"/>
+          <p:cNvSpPr txBox="1"/>
+          <p:nvPr/>
+        </p:nvSpPr>
+        <p:spPr>
+          <a:xfrm>
+            <a:off x="4709160" y="6051792"/>
+            <a:ext cx="6796735" cy="256032"/>
+          </a:xfrm>
+          <a:prstGeom prst="rect">
+            <a:avLst/>
+          </a:prstGeom>
+          <a:noFill/>
+          <a:ln/>
+        </p:spPr>
+        <p:txBody>
+          <a:bodyPr wrap="square" lIns="0" tIns="0" rIns="0" bIns="0" rtlCol="0" anchor="ctr"/>
+          <a:lstStyle/>
+          <a:p>
+            <a:pPr algn="ctr" indent="0" marL="0">
+              <a:buNone/>
+            </a:pPr>
+            <a:r>
+              <a:rPr lang="en-US" sz="1000" dirty="0">
                 <a:solidFill>
                   <a:srgbClr val="6E6B68"/>
                 </a:solidFill>
@@ -5206,305 +5450,9 @@
                 <a:ea typeface="Pretendard" pitchFamily="34" charset="-122"/>
                 <a:cs typeface="Pretendard" pitchFamily="34" charset="-120"/>
               </a:rPr>
-              <a:t>유어딜이 확보한 크리에이터 풀, 유튜버 18,170명과 네이버 블로거 172,755명(2026년 9월 기준)에게 사장님의 이용권 판매를 제안합니다. 맛집, 뷰티, 동네 콘텐츠를 만드는 사람들이 자기 채널에서 이용권을 소개하고, 그 링크로 팔린 것에만 소개비가 나갑니다. 여기서도 미리 주는 돈은 없습니다.</a:t>
-            </a:r>
-            <a:endParaRPr lang="en-US" sz="1100" dirty="0"/>
-          </a:p>
-        </p:txBody>
-      </p:sp>
-      <p:sp>
-        <p:nvSpPr>
-          <p:cNvPr id="24" name="Shape 17"/>
-          <p:cNvSpPr/>
-          <p:nvPr/>
-        </p:nvSpPr>
-        <p:spPr>
-          <a:xfrm>
-            <a:off x="5303520" y="4526280"/>
-            <a:ext cx="5882335" cy="0"/>
-          </a:xfrm>
-          <a:prstGeom prst="line">
-            <a:avLst/>
-          </a:prstGeom>
-          <a:noFill/>
-          <a:ln w="9525">
-            <a:solidFill>
-              <a:srgbClr val="E6E2DE"/>
-            </a:solidFill>
-            <a:prstDash val="solid"/>
-          </a:ln>
-        </p:spPr>
-      </p:sp>
-      <p:sp>
-        <p:nvSpPr>
-          <p:cNvPr id="25" name="Text 18"/>
-          <p:cNvSpPr txBox="1"/>
-          <p:nvPr/>
-        </p:nvSpPr>
-        <p:spPr>
-          <a:xfrm>
-            <a:off x="5303520" y="4709160"/>
-            <a:ext cx="1960778" cy="548640"/>
-          </a:xfrm>
-          <a:prstGeom prst="rect">
-            <a:avLst/>
-          </a:prstGeom>
-          <a:noFill/>
-          <a:ln/>
-        </p:spPr>
-        <p:txBody>
-          <a:bodyPr wrap="square" lIns="0" tIns="0" rIns="0" bIns="0" rtlCol="0" anchor="ctr"/>
-          <a:lstStyle/>
-          <a:p>
-            <a:pPr indent="0" marL="0">
-              <a:buNone/>
-            </a:pPr>
-            <a:r>
-              <a:rPr lang="en-US" sz="2400" b="1" spc="-100" kern="0" dirty="0">
-                <a:solidFill>
-                  <a:srgbClr val="16181C"/>
-                </a:solidFill>
-                <a:latin typeface="Pretendard" pitchFamily="34" charset="0"/>
-                <a:ea typeface="Pretendard" pitchFamily="34" charset="-122"/>
-                <a:cs typeface="Pretendard" pitchFamily="34" charset="-120"/>
-              </a:rPr>
-              <a:t>18,170명</a:t>
-            </a:r>
-            <a:endParaRPr lang="en-US" sz="2400" dirty="0"/>
-          </a:p>
-        </p:txBody>
-      </p:sp>
-      <p:sp>
-        <p:nvSpPr>
-          <p:cNvPr id="26" name="Text 19"/>
-          <p:cNvSpPr txBox="1"/>
-          <p:nvPr/>
-        </p:nvSpPr>
-        <p:spPr>
-          <a:xfrm>
-            <a:off x="5303520" y="5285232"/>
-            <a:ext cx="1960778" cy="274320"/>
-          </a:xfrm>
-          <a:prstGeom prst="rect">
-            <a:avLst/>
-          </a:prstGeom>
-          <a:noFill/>
-          <a:ln/>
-        </p:spPr>
-        <p:txBody>
-          <a:bodyPr wrap="square" lIns="0" tIns="0" rIns="0" bIns="0" rtlCol="0" anchor="ctr"/>
-          <a:lstStyle/>
-          <a:p>
-            <a:pPr indent="0" marL="0">
-              <a:buNone/>
-            </a:pPr>
-            <a:r>
-              <a:rPr lang="en-US" sz="1050" dirty="0">
-                <a:solidFill>
-                  <a:srgbClr val="6E6B68"/>
-                </a:solidFill>
-                <a:latin typeface="Pretendard" pitchFamily="34" charset="0"/>
-                <a:ea typeface="Pretendard" pitchFamily="34" charset="-122"/>
-                <a:cs typeface="Pretendard" pitchFamily="34" charset="-120"/>
-              </a:rPr>
-              <a:t>유튜버</a:t>
-            </a:r>
-            <a:endParaRPr lang="en-US" sz="1050" dirty="0"/>
-          </a:p>
-        </p:txBody>
-      </p:sp>
-      <p:sp>
-        <p:nvSpPr>
-          <p:cNvPr id="27" name="Text 20"/>
-          <p:cNvSpPr txBox="1"/>
-          <p:nvPr/>
-        </p:nvSpPr>
-        <p:spPr>
-          <a:xfrm>
-            <a:off x="7264298" y="4709160"/>
-            <a:ext cx="1960778" cy="548640"/>
-          </a:xfrm>
-          <a:prstGeom prst="rect">
-            <a:avLst/>
-          </a:prstGeom>
-          <a:noFill/>
-          <a:ln/>
-        </p:spPr>
-        <p:txBody>
-          <a:bodyPr wrap="square" lIns="0" tIns="0" rIns="0" bIns="0" rtlCol="0" anchor="ctr"/>
-          <a:lstStyle/>
-          <a:p>
-            <a:pPr indent="0" marL="0">
-              <a:buNone/>
-            </a:pPr>
-            <a:r>
-              <a:rPr lang="en-US" sz="2400" b="1" spc="-100" kern="0" dirty="0">
-                <a:solidFill>
-                  <a:srgbClr val="16181C"/>
-                </a:solidFill>
-                <a:latin typeface="Pretendard" pitchFamily="34" charset="0"/>
-                <a:ea typeface="Pretendard" pitchFamily="34" charset="-122"/>
-                <a:cs typeface="Pretendard" pitchFamily="34" charset="-120"/>
-              </a:rPr>
-              <a:t>172,755명</a:t>
-            </a:r>
-            <a:endParaRPr lang="en-US" sz="2400" dirty="0"/>
-          </a:p>
-        </p:txBody>
-      </p:sp>
-      <p:sp>
-        <p:nvSpPr>
-          <p:cNvPr id="28" name="Text 21"/>
-          <p:cNvSpPr txBox="1"/>
-          <p:nvPr/>
-        </p:nvSpPr>
-        <p:spPr>
-          <a:xfrm>
-            <a:off x="7264298" y="5285232"/>
-            <a:ext cx="1960778" cy="274320"/>
-          </a:xfrm>
-          <a:prstGeom prst="rect">
-            <a:avLst/>
-          </a:prstGeom>
-          <a:noFill/>
-          <a:ln/>
-        </p:spPr>
-        <p:txBody>
-          <a:bodyPr wrap="square" lIns="0" tIns="0" rIns="0" bIns="0" rtlCol="0" anchor="ctr"/>
-          <a:lstStyle/>
-          <a:p>
-            <a:pPr indent="0" marL="0">
-              <a:buNone/>
-            </a:pPr>
-            <a:r>
-              <a:rPr lang="en-US" sz="1050" dirty="0">
-                <a:solidFill>
-                  <a:srgbClr val="6E6B68"/>
-                </a:solidFill>
-                <a:latin typeface="Pretendard" pitchFamily="34" charset="0"/>
-                <a:ea typeface="Pretendard" pitchFamily="34" charset="-122"/>
-                <a:cs typeface="Pretendard" pitchFamily="34" charset="-120"/>
-              </a:rPr>
-              <a:t>네이버 블로거</a:t>
-            </a:r>
-            <a:endParaRPr lang="en-US" sz="1050" dirty="0"/>
-          </a:p>
-        </p:txBody>
-      </p:sp>
-      <p:sp>
-        <p:nvSpPr>
-          <p:cNvPr id="29" name="Text 22"/>
-          <p:cNvSpPr txBox="1"/>
-          <p:nvPr/>
-        </p:nvSpPr>
-        <p:spPr>
-          <a:xfrm>
-            <a:off x="9225077" y="4709160"/>
-            <a:ext cx="1960778" cy="548640"/>
-          </a:xfrm>
-          <a:prstGeom prst="rect">
-            <a:avLst/>
-          </a:prstGeom>
-          <a:noFill/>
-          <a:ln/>
-        </p:spPr>
-        <p:txBody>
-          <a:bodyPr wrap="square" lIns="0" tIns="0" rIns="0" bIns="0" rtlCol="0" anchor="ctr"/>
-          <a:lstStyle/>
-          <a:p>
-            <a:pPr indent="0" marL="0">
-              <a:buNone/>
-            </a:pPr>
-            <a:r>
-              <a:rPr lang="en-US" sz="2400" b="1" spc="-100" kern="0" dirty="0">
-                <a:solidFill>
-                  <a:srgbClr val="1C69EF"/>
-                </a:solidFill>
-                <a:latin typeface="Pretendard" pitchFamily="34" charset="0"/>
-                <a:ea typeface="Pretendard" pitchFamily="34" charset="-122"/>
-                <a:cs typeface="Pretendard" pitchFamily="34" charset="-120"/>
-              </a:rPr>
-              <a:t>0원</a:t>
-            </a:r>
-            <a:endParaRPr lang="en-US" sz="2400" dirty="0"/>
-          </a:p>
-        </p:txBody>
-      </p:sp>
-      <p:sp>
-        <p:nvSpPr>
-          <p:cNvPr id="30" name="Text 23"/>
-          <p:cNvSpPr txBox="1"/>
-          <p:nvPr/>
-        </p:nvSpPr>
-        <p:spPr>
-          <a:xfrm>
-            <a:off x="9225077" y="5285232"/>
-            <a:ext cx="1960778" cy="274320"/>
-          </a:xfrm>
-          <a:prstGeom prst="rect">
-            <a:avLst/>
-          </a:prstGeom>
-          <a:noFill/>
-          <a:ln/>
-        </p:spPr>
-        <p:txBody>
-          <a:bodyPr wrap="square" lIns="0" tIns="0" rIns="0" bIns="0" rtlCol="0" anchor="ctr"/>
-          <a:lstStyle/>
-          <a:p>
-            <a:pPr indent="0" marL="0">
-              <a:buNone/>
-            </a:pPr>
-            <a:r>
-              <a:rPr lang="en-US" sz="1050" dirty="0">
-                <a:solidFill>
-                  <a:srgbClr val="6E6B68"/>
-                </a:solidFill>
-                <a:latin typeface="Pretendard" pitchFamily="34" charset="0"/>
-                <a:ea typeface="Pretendard" pitchFamily="34" charset="-122"/>
-                <a:cs typeface="Pretendard" pitchFamily="34" charset="-120"/>
-              </a:rPr>
-              <a:t>미리 나가는 홍보비</a:t>
-            </a:r>
-            <a:endParaRPr lang="en-US" sz="1050" dirty="0"/>
-          </a:p>
-        </p:txBody>
-      </p:sp>
-      <p:sp>
-        <p:nvSpPr>
-          <p:cNvPr id="31" name="Text 24"/>
-          <p:cNvSpPr txBox="1"/>
-          <p:nvPr/>
-        </p:nvSpPr>
-        <p:spPr>
-          <a:xfrm>
-            <a:off x="5303520" y="5669280"/>
-            <a:ext cx="5882335" cy="274320"/>
-          </a:xfrm>
-          <a:prstGeom prst="rect">
-            <a:avLst/>
-          </a:prstGeom>
-          <a:noFill/>
-          <a:ln/>
-        </p:spPr>
-        <p:txBody>
-          <a:bodyPr wrap="square" lIns="0" tIns="0" rIns="0" bIns="0" rtlCol="0" anchor="ctr"/>
-          <a:lstStyle/>
-          <a:p>
-            <a:pPr indent="0" marL="0">
-              <a:buNone/>
-            </a:pPr>
-            <a:r>
-              <a:rPr lang="en-US" sz="1050" b="1" dirty="0">
-                <a:solidFill>
-                  <a:srgbClr val="16181C"/>
-                </a:solidFill>
-                <a:latin typeface="Pretendard" pitchFamily="34" charset="0"/>
-                <a:ea typeface="Pretendard" pitchFamily="34" charset="-122"/>
-                <a:cs typeface="Pretendard" pitchFamily="34" charset="-120"/>
-              </a:rPr>
-              <a:t>소개비 %는 사장님이 정합니다. 제안하지 않으면 아무것도 나가지 않습니다.</a:t>
-            </a:r>
-            <a:endParaRPr lang="en-US" sz="1050" dirty="0"/>
+              <a:t>유어딜 크리에이터 풀 관리 화면 (실제 화면, 연락처는 가렸습니다)</a:t>
+            </a:r>
+            <a:endParaRPr lang="en-US" sz="1000" dirty="0"/>
           </a:p>
         </p:txBody>
       </p:sp>

--- a/docs/business/proposals/urdeal-store-owner-deck.pptx
+++ b/docs/business/proposals/urdeal-store-owner-deck.pptx
@@ -510,7 +510,7 @@
           <a:p>
             <a:r>
               <a:rPr lang="en-US" dirty="0"/>
-              <a:t>표지. 대표 최종 구성안(09-14). 10%: 직접 등록 기준(fee-resolver.ts). 오른쪽은 urdeal.kr 홈 라이브 캡처.</a:t>
+              <a:t>표지. 09-14 대표 "체험단, 할 만큼 해보셨잖아요" 는 어조가 예의 있지 않다 → 같은 대비를 정중하게. 10%: 직접 등록 기준(fee-resolver.ts). 오른쪽은 urdeal.kr 홈 라이브 캡처.</a:t>
             </a:r>
             <a:endParaRPr lang="en-US" dirty="0"/>
           </a:p>
@@ -1698,7 +1698,7 @@
         <p:spPr>
           <a:xfrm>
             <a:off x="685800" y="1188720"/>
-            <a:ext cx="7315200" cy="1737360"/>
+            <a:ext cx="7498080" cy="1737360"/>
           </a:xfrm>
           <a:prstGeom prst="rect">
             <a:avLst/>
@@ -1717,7 +1717,7 @@
               <a:buNone/>
             </a:pPr>
             <a:r>
-              <a:rPr lang="en-US" sz="4200" b="1" spc="-140" kern="0" dirty="0">
+              <a:rPr lang="en-US" sz="3800" b="1" spc="-140" kern="0" dirty="0">
                 <a:solidFill>
                   <a:srgbClr val="F8F7FC"/>
                 </a:solidFill>
@@ -1725,9 +1725,9 @@
                 <a:ea typeface="Pretendard" pitchFamily="34" charset="-122"/>
                 <a:cs typeface="Pretendard" pitchFamily="34" charset="-120"/>
               </a:rPr>
-              <a:t>체험단,</a:t>
-            </a:r>
-            <a:endParaRPr lang="en-US" sz="4200" dirty="0"/>
+              <a:t>체험단 말고,</a:t>
+            </a:r>
+            <a:endParaRPr lang="en-US" sz="3800" dirty="0"/>
           </a:p>
           <a:p>
             <a:pPr indent="0" marL="0">
@@ -1737,7 +1737,7 @@
               <a:buNone/>
             </a:pPr>
             <a:r>
-              <a:rPr lang="en-US" sz="4200" b="1" spc="-140" kern="0" dirty="0">
+              <a:rPr lang="en-US" sz="3800" b="1" spc="-140" kern="0" dirty="0">
                 <a:solidFill>
                   <a:srgbClr val="F8F7FC"/>
                 </a:solidFill>
@@ -1745,9 +1745,9 @@
                 <a:ea typeface="Pretendard" pitchFamily="34" charset="-122"/>
                 <a:cs typeface="Pretendard" pitchFamily="34" charset="-120"/>
               </a:rPr>
-              <a:t>할 만큼 해보셨잖아요.</a:t>
-            </a:r>
-            <a:endParaRPr lang="en-US" sz="4200" dirty="0"/>
+              <a:t>계산하는 손님을 부르는 방법입니다.</a:t>
+            </a:r>
+            <a:endParaRPr lang="en-US" sz="3800" dirty="0"/>
           </a:p>
         </p:txBody>
       </p:sp>
@@ -1784,7 +1784,7 @@
                 <a:ea typeface="Pretendard" pitchFamily="34" charset="-122"/>
                 <a:cs typeface="Pretendard" pitchFamily="34" charset="-120"/>
               </a:rPr>
-              <a:t>공짜로 먹고 가는 사람 말고, 계산하고 가는 손님을 만드는 방법입니다.</a:t>
+              <a:t>무료 식사를 내드리고 후기를 받는 대신, 손님이 먼저 결제하고 가게에 옵니다.</a:t>
             </a:r>
             <a:endParaRPr lang="en-US" sz="1500" dirty="0"/>
           </a:p>
@@ -1826,7 +1826,7 @@
                 <a:ea typeface="Pretendard" pitchFamily="34" charset="-122"/>
                 <a:cs typeface="Pretendard" pitchFamily="34" charset="-120"/>
               </a:rPr>
-              <a:t>후기 몇 개 받자고 무료 식사를 내드리는 것도, 대행비를 먼저 보내는 것도 이제 그만할 때가 됐습니다. 유어딜은 가게 이용권을 온라인에서 미리 파는 곳입니다. 손님이 먼저 결제하고, 이용권을 들고 가게로 옵니다. 사장님이 내는 건 팔린 이용권의 수수료 10%, 그게 전부입니다.</a:t>
+              <a:t>후기 몇 개를 받으려고 무료 식사를 내드리고 대행비를 먼저 보내는 방식은, 이제 안 하셔도 됩니다. 유어딜은 가게 이용권을 온라인에서 미리 파는 곳입니다. 손님이 먼저 결제하고, 이용권을 들고 가게로 옵니다. 사장님이 내는 건 팔린 이용권의 수수료 10%, 그게 전부입니다.</a:t>
             </a:r>
             <a:endParaRPr lang="en-US" sz="1250" dirty="0"/>
           </a:p>
